--- a/group1_advanced/week1/slides/W1_group1.pptx
+++ b/group1_advanced/week1/slides/W1_group1.pptx
@@ -20,11 +20,6 @@
     <p:sldId id="268" r:id="rId19"/>
     <p:sldId id="269" r:id="rId20"/>
     <p:sldId id="270" r:id="rId21"/>
-    <p:sldId id="271" r:id="rId22"/>
-    <p:sldId id="272" r:id="rId23"/>
-    <p:sldId id="273" r:id="rId24"/>
-    <p:sldId id="274" r:id="rId25"/>
-    <p:sldId id="275" r:id="rId26"/>
   </p:sldIdLst>
   <p:sldSz cx="12191695" cy="6858000" type="screen4x3"/>
   <p:notesSz cx="6858000" cy="9144000"/>
@@ -3221,7 +3216,7 @@
                 </a:solidFill>
                 <a:latin typeface="Pretendard Black"/>
               </a:rPr>
-              <a:t>Digital Rock 데이터 탐색</a:t>
+              <a:t>데이터 탐색 + Classical Baseline</a:t>
             </a:r>
           </a:p>
         </p:txBody>
@@ -3260,7 +3255,7 @@
                 </a:solidFill>
                 <a:latin typeface="Pretendard SemiBold"/>
               </a:rPr>
-              <a:t>3D voxel · 공극률 · sparse imaging · 선형 보간</a:t>
+              <a:t>Voxel · 전처리 · sparse · 선형/Cubic · k sweep</a:t>
             </a:r>
           </a:p>
         </p:txBody>
@@ -3324,20 +3319,59 @@
       <p:grpSpPr/>
       <p:sp>
         <p:nvSpPr>
-          <p:cNvPr id="2" name="Rectangle 1"/>
+          <p:cNvPr id="2" name="TextBox 1"/>
+          <p:cNvSpPr txBox="1"/>
+          <p:nvPr/>
+        </p:nvSpPr>
+        <p:spPr>
+          <a:xfrm>
+            <a:off x="457200" y="320040"/>
+            <a:ext cx="11430000" cy="640080"/>
+          </a:xfrm>
+          <a:prstGeom prst="rect">
+            <a:avLst/>
+          </a:prstGeom>
+          <a:noFill/>
+        </p:spPr>
+        <p:txBody>
+          <a:bodyPr wrap="square" lIns="45720" rIns="45720">
+            <a:spAutoFit/>
+          </a:bodyPr>
+          <a:lstStyle/>
+          <a:p>
+            <a:pPr algn="l">
+              <a:lnSpc>
+                <a:spcPct val="115000"/>
+              </a:lnSpc>
+            </a:pPr>
+            <a:r>
+              <a:rPr sz="2800" b="0">
+                <a:solidFill>
+                  <a:srgbClr val="EA851B"/>
+                </a:solidFill>
+                <a:latin typeface="Pretendard Black"/>
+              </a:rPr>
+              <a:t>1.5  Otsu 시각 — 인공 grayscale에서</a:t>
+            </a:r>
+          </a:p>
+        </p:txBody>
+      </p:sp>
+      <p:sp>
+        <p:nvSpPr>
+          <p:cNvPr id="3" name="Rectangle 2"/>
           <p:cNvSpPr/>
           <p:nvPr/>
         </p:nvSpPr>
         <p:spPr>
           <a:xfrm>
-            <a:off x="0" y="0"/>
-            <a:ext cx="12191695" cy="6858000"/>
+            <a:off x="502920" y="960120"/>
+            <a:ext cx="1097280" cy="54864"/>
           </a:xfrm>
           <a:prstGeom prst="rect">
             <a:avLst/>
           </a:prstGeom>
           <a:solidFill>
-            <a:srgbClr val="FAF5EE"/>
+            <a:srgbClr val="EA851B"/>
           </a:solidFill>
           <a:ln>
             <a:noFill/>
@@ -3360,19 +3394,21 @@
         <p:txBody>
           <a:bodyPr rtlCol="0" anchor="ctr"/>
           <a:lstStyle/>
-          <a:p/>
-        </p:txBody>
-      </p:sp>
-      <p:sp>
-        <p:nvSpPr>
-          <p:cNvPr id="3" name="TextBox 2"/>
+          <a:p>
+            <a:pPr algn="ctr"/>
+          </a:p>
+        </p:txBody>
+      </p:sp>
+      <p:sp>
+        <p:nvSpPr>
+          <p:cNvPr id="4" name="TextBox 3"/>
           <p:cNvSpPr txBox="1"/>
           <p:nvPr/>
         </p:nvSpPr>
         <p:spPr>
           <a:xfrm>
-            <a:off x="731520" y="2286000"/>
-            <a:ext cx="10058400" cy="548640"/>
+            <a:off x="365760" y="6492240"/>
+            <a:ext cx="7315200" cy="274320"/>
           </a:xfrm>
           <a:prstGeom prst="rect">
             <a:avLst/>
@@ -3391,27 +3427,27 @@
               </a:lnSpc>
             </a:pPr>
             <a:r>
-              <a:rPr sz="2000" b="0">
-                <a:solidFill>
-                  <a:srgbClr val="EA851B"/>
-                </a:solidFill>
-                <a:latin typeface="Pretendard ExtraBold"/>
-              </a:rPr>
-              <a:t>Section 2</a:t>
-            </a:r>
-          </a:p>
-        </p:txBody>
-      </p:sp>
-      <p:sp>
-        <p:nvSpPr>
-          <p:cNvPr id="4" name="TextBox 3"/>
+              <a:rPr sz="1000" b="0">
+                <a:solidFill>
+                  <a:srgbClr val="7A7A7A"/>
+                </a:solidFill>
+                <a:latin typeface="Pretendard Medium"/>
+              </a:rPr>
+              <a:t>W1 — 데이터 + Classical · 1조 Advanced</a:t>
+            </a:r>
+          </a:p>
+        </p:txBody>
+      </p:sp>
+      <p:sp>
+        <p:nvSpPr>
+          <p:cNvPr id="5" name="TextBox 4"/>
           <p:cNvSpPr txBox="1"/>
           <p:nvPr/>
         </p:nvSpPr>
         <p:spPr>
           <a:xfrm>
-            <a:off x="731520" y="2834640"/>
-            <a:ext cx="10058400" cy="1371600"/>
+            <a:off x="11155680" y="6492240"/>
+            <a:ext cx="914400" cy="274320"/>
           </a:xfrm>
           <a:prstGeom prst="rect">
             <a:avLst/>
@@ -3424,33 +3460,57 @@
           </a:bodyPr>
           <a:lstStyle/>
           <a:p>
-            <a:pPr algn="l">
+            <a:pPr algn="r">
               <a:lnSpc>
                 <a:spcPct val="115000"/>
               </a:lnSpc>
             </a:pPr>
             <a:r>
-              <a:rPr sz="4400" b="0">
-                <a:solidFill>
-                  <a:srgbClr val="181818"/>
-                </a:solidFill>
-                <a:latin typeface="Pretendard Black"/>
-              </a:rPr>
-              <a:t>공극률과 등방성</a:t>
-            </a:r>
-          </a:p>
-        </p:txBody>
-      </p:sp>
-      <p:sp>
-        <p:nvSpPr>
-          <p:cNvPr id="5" name="TextBox 4"/>
+              <a:rPr sz="1000" b="0">
+                <a:solidFill>
+                  <a:srgbClr val="7A7A7A"/>
+                </a:solidFill>
+                <a:latin typeface="Pretendard Medium"/>
+              </a:rPr>
+              <a:t>10 / 15</a:t>
+            </a:r>
+          </a:p>
+        </p:txBody>
+      </p:sp>
+      <p:pic>
+        <p:nvPicPr>
+          <p:cNvPr id="6" name="Picture 5" descr="fig3_otsu.png"/>
+          <p:cNvPicPr>
+            <a:picLocks noChangeAspect="1"/>
+          </p:cNvPicPr>
+          <p:nvPr/>
+        </p:nvPicPr>
+        <p:blipFill>
+          <a:blip r:embed="rId2"/>
+          <a:stretch>
+            <a:fillRect/>
+          </a:stretch>
+        </p:blipFill>
+        <p:spPr>
+          <a:xfrm>
+            <a:off x="274320" y="1280160"/>
+            <a:ext cx="11612880" cy="3665462"/>
+          </a:xfrm>
+          <a:prstGeom prst="rect">
+            <a:avLst/>
+          </a:prstGeom>
+        </p:spPr>
+      </p:pic>
+      <p:sp>
+        <p:nvSpPr>
+          <p:cNvPr id="7" name="TextBox 6"/>
           <p:cNvSpPr txBox="1"/>
           <p:nvPr/>
         </p:nvSpPr>
         <p:spPr>
           <a:xfrm>
-            <a:off x="365760" y="6492240"/>
-            <a:ext cx="7315200" cy="274320"/>
+            <a:off x="731520" y="5212080"/>
+            <a:ext cx="10972800" cy="457200"/>
           </a:xfrm>
           <a:prstGeom prst="rect">
             <a:avLst/>
@@ -3469,52 +3529,13 @@
               </a:lnSpc>
             </a:pPr>
             <a:r>
-              <a:rPr sz="1000" b="0">
-                <a:solidFill>
-                  <a:srgbClr val="7A7A7A"/>
-                </a:solidFill>
-                <a:latin typeface="Pretendard Medium"/>
-              </a:rPr>
-              <a:t>Week 1 — 데이터 탐색</a:t>
-            </a:r>
-          </a:p>
-        </p:txBody>
-      </p:sp>
-      <p:sp>
-        <p:nvSpPr>
-          <p:cNvPr id="6" name="TextBox 5"/>
-          <p:cNvSpPr txBox="1"/>
-          <p:nvPr/>
-        </p:nvSpPr>
-        <p:spPr>
-          <a:xfrm>
-            <a:off x="11155680" y="6492240"/>
-            <a:ext cx="914400" cy="274320"/>
-          </a:xfrm>
-          <a:prstGeom prst="rect">
-            <a:avLst/>
-          </a:prstGeom>
-          <a:noFill/>
-        </p:spPr>
-        <p:txBody>
-          <a:bodyPr wrap="square" lIns="45720" rIns="45720">
-            <a:spAutoFit/>
-          </a:bodyPr>
-          <a:lstStyle/>
-          <a:p>
-            <a:pPr algn="r">
-              <a:lnSpc>
-                <a:spcPct val="115000"/>
-              </a:lnSpc>
-            </a:pPr>
-            <a:r>
-              <a:rPr sz="1000" b="0">
-                <a:solidFill>
-                  <a:srgbClr val="7A7A7A"/>
-                </a:solidFill>
-                <a:latin typeface="Pretendard Medium"/>
-              </a:rPr>
-              <a:t>10 / 20</a:t>
+              <a:rPr sz="1500" b="0">
+                <a:solidFill>
+                  <a:srgbClr val="EA851B"/>
+                </a:solidFill>
+                <a:latin typeface="Pretendard ExtraBold"/>
+              </a:rPr>
+              <a:t>[Try-it!] 노이즈 σ를 0.05/0.2/0.4로 바꾸면 Otsu가 어디서 망가지나</a:t>
             </a:r>
           </a:p>
         </p:txBody>
@@ -3539,59 +3560,20 @@
       <p:grpSpPr/>
       <p:sp>
         <p:nvSpPr>
-          <p:cNvPr id="2" name="TextBox 1"/>
-          <p:cNvSpPr txBox="1"/>
-          <p:nvPr/>
-        </p:nvSpPr>
-        <p:spPr>
-          <a:xfrm>
-            <a:off x="457200" y="320040"/>
-            <a:ext cx="11430000" cy="640080"/>
-          </a:xfrm>
-          <a:prstGeom prst="rect">
-            <a:avLst/>
-          </a:prstGeom>
-          <a:noFill/>
-        </p:spPr>
-        <p:txBody>
-          <a:bodyPr wrap="square" lIns="45720" rIns="45720">
-            <a:spAutoFit/>
-          </a:bodyPr>
-          <a:lstStyle/>
-          <a:p>
-            <a:pPr algn="l">
-              <a:lnSpc>
-                <a:spcPct val="115000"/>
-              </a:lnSpc>
-            </a:pPr>
-            <a:r>
-              <a:rPr sz="2800" b="0">
-                <a:solidFill>
-                  <a:srgbClr val="EA851B"/>
-                </a:solidFill>
-                <a:latin typeface="Pretendard Black"/>
-              </a:rPr>
-              <a:t>2.1  공극률 (Porosity, φ)</a:t>
-            </a:r>
-          </a:p>
-        </p:txBody>
-      </p:sp>
-      <p:sp>
-        <p:nvSpPr>
-          <p:cNvPr id="3" name="Rectangle 2"/>
+          <p:cNvPr id="2" name="Rectangle 1"/>
           <p:cNvSpPr/>
           <p:nvPr/>
         </p:nvSpPr>
         <p:spPr>
           <a:xfrm>
-            <a:off x="502920" y="960120"/>
-            <a:ext cx="1097280" cy="54864"/>
+            <a:off x="0" y="0"/>
+            <a:ext cx="12191695" cy="6858000"/>
           </a:xfrm>
           <a:prstGeom prst="rect">
             <a:avLst/>
           </a:prstGeom>
           <a:solidFill>
-            <a:srgbClr val="EA851B"/>
+            <a:srgbClr val="FAF5EE"/>
           </a:solidFill>
           <a:ln>
             <a:noFill/>
@@ -3614,8 +3596,45 @@
         <p:txBody>
           <a:bodyPr rtlCol="0" anchor="ctr"/>
           <a:lstStyle/>
-          <a:p>
-            <a:pPr algn="ctr"/>
+          <a:p/>
+        </p:txBody>
+      </p:sp>
+      <p:sp>
+        <p:nvSpPr>
+          <p:cNvPr id="3" name="TextBox 2"/>
+          <p:cNvSpPr txBox="1"/>
+          <p:nvPr/>
+        </p:nvSpPr>
+        <p:spPr>
+          <a:xfrm>
+            <a:off x="731520" y="2286000"/>
+            <a:ext cx="10058400" cy="548640"/>
+          </a:xfrm>
+          <a:prstGeom prst="rect">
+            <a:avLst/>
+          </a:prstGeom>
+          <a:noFill/>
+        </p:spPr>
+        <p:txBody>
+          <a:bodyPr wrap="square" lIns="45720" rIns="45720">
+            <a:spAutoFit/>
+          </a:bodyPr>
+          <a:lstStyle/>
+          <a:p>
+            <a:pPr algn="l">
+              <a:lnSpc>
+                <a:spcPct val="115000"/>
+              </a:lnSpc>
+            </a:pPr>
+            <a:r>
+              <a:rPr sz="2000" b="0">
+                <a:solidFill>
+                  <a:srgbClr val="EA851B"/>
+                </a:solidFill>
+                <a:latin typeface="Pretendard ExtraBold"/>
+              </a:rPr>
+              <a:t>Section 2</a:t>
+            </a:r>
           </a:p>
         </p:txBody>
       </p:sp>
@@ -3627,6 +3646,45 @@
         </p:nvSpPr>
         <p:spPr>
           <a:xfrm>
+            <a:off x="731520" y="2834640"/>
+            <a:ext cx="10058400" cy="1371600"/>
+          </a:xfrm>
+          <a:prstGeom prst="rect">
+            <a:avLst/>
+          </a:prstGeom>
+          <a:noFill/>
+        </p:spPr>
+        <p:txBody>
+          <a:bodyPr wrap="square" lIns="45720" rIns="45720">
+            <a:spAutoFit/>
+          </a:bodyPr>
+          <a:lstStyle/>
+          <a:p>
+            <a:pPr algn="l">
+              <a:lnSpc>
+                <a:spcPct val="115000"/>
+              </a:lnSpc>
+            </a:pPr>
+            <a:r>
+              <a:rPr sz="4400" b="0">
+                <a:solidFill>
+                  <a:srgbClr val="181818"/>
+                </a:solidFill>
+                <a:latin typeface="Pretendard Black"/>
+              </a:rPr>
+              <a:t>Sparse Imaging + Classical Baseline</a:t>
+            </a:r>
+          </a:p>
+        </p:txBody>
+      </p:sp>
+      <p:sp>
+        <p:nvSpPr>
+          <p:cNvPr id="5" name="TextBox 4"/>
+          <p:cNvSpPr txBox="1"/>
+          <p:nvPr/>
+        </p:nvSpPr>
+        <p:spPr>
+          <a:xfrm>
             <a:off x="365760" y="6492240"/>
             <a:ext cx="7315200" cy="274320"/>
           </a:xfrm>
@@ -3653,14 +3711,14 @@
                 </a:solidFill>
                 <a:latin typeface="Pretendard Medium"/>
               </a:rPr>
-              <a:t>Week 1 — 데이터 탐색</a:t>
-            </a:r>
-          </a:p>
-        </p:txBody>
-      </p:sp>
-      <p:sp>
-        <p:nvSpPr>
-          <p:cNvPr id="5" name="TextBox 4"/>
+              <a:t>W1 — 데이터 + Classical · 1조 Advanced</a:t>
+            </a:r>
+          </a:p>
+        </p:txBody>
+      </p:sp>
+      <p:sp>
+        <p:nvSpPr>
+          <p:cNvPr id="6" name="TextBox 5"/>
           <p:cNvSpPr txBox="1"/>
           <p:nvPr/>
         </p:nvSpPr>
@@ -3692,261 +3750,7 @@
                 </a:solidFill>
                 <a:latin typeface="Pretendard Medium"/>
               </a:rPr>
-              <a:t>11 / 20</a:t>
-            </a:r>
-          </a:p>
-        </p:txBody>
-      </p:sp>
-      <p:sp>
-        <p:nvSpPr>
-          <p:cNvPr id="6" name="Rounded Rectangle 5"/>
-          <p:cNvSpPr/>
-          <p:nvPr/>
-        </p:nvSpPr>
-        <p:spPr>
-          <a:xfrm>
-            <a:off x="1828800" y="1463040"/>
-            <a:ext cx="8503920" cy="1097280"/>
-          </a:xfrm>
-          <a:prstGeom prst="roundRect">
-            <a:avLst/>
-          </a:prstGeom>
-          <a:solidFill>
-            <a:srgbClr val="FAF5EE"/>
-          </a:solidFill>
-          <a:ln>
-            <a:noFill/>
-          </a:ln>
-        </p:spPr>
-        <p:style>
-          <a:lnRef idx="1">
-            <a:schemeClr val="accent1"/>
-          </a:lnRef>
-          <a:fillRef idx="3">
-            <a:schemeClr val="accent1"/>
-          </a:fillRef>
-          <a:effectRef idx="2">
-            <a:schemeClr val="accent1"/>
-          </a:effectRef>
-          <a:fontRef idx="minor">
-            <a:schemeClr val="lt1"/>
-          </a:fontRef>
-        </p:style>
-        <p:txBody>
-          <a:bodyPr rtlCol="0" anchor="ctr"/>
-          <a:lstStyle/>
-          <a:p/>
-        </p:txBody>
-      </p:sp>
-      <p:sp>
-        <p:nvSpPr>
-          <p:cNvPr id="7" name="TextBox 6"/>
-          <p:cNvSpPr txBox="1"/>
-          <p:nvPr/>
-        </p:nvSpPr>
-        <p:spPr>
-          <a:xfrm>
-            <a:off x="1828800" y="1783080"/>
-            <a:ext cx="8503920" cy="640080"/>
-          </a:xfrm>
-          <a:prstGeom prst="rect">
-            <a:avLst/>
-          </a:prstGeom>
-          <a:noFill/>
-        </p:spPr>
-        <p:txBody>
-          <a:bodyPr wrap="square" lIns="45720" rIns="45720">
-            <a:spAutoFit/>
-          </a:bodyPr>
-          <a:lstStyle/>
-          <a:p>
-            <a:pPr algn="ctr">
-              <a:lnSpc>
-                <a:spcPct val="115000"/>
-              </a:lnSpc>
-            </a:pPr>
-            <a:r>
-              <a:rPr sz="2800" b="0">
-                <a:solidFill>
-                  <a:srgbClr val="EA851B"/>
-                </a:solidFill>
-                <a:latin typeface="Pretendard Black"/>
-              </a:rPr>
-              <a:t>φ = (공극 voxel 수) / (전체 voxel 수)</a:t>
-            </a:r>
-          </a:p>
-        </p:txBody>
-      </p:sp>
-      <p:sp>
-        <p:nvSpPr>
-          <p:cNvPr id="8" name="TextBox 7"/>
-          <p:cNvSpPr txBox="1"/>
-          <p:nvPr/>
-        </p:nvSpPr>
-        <p:spPr>
-          <a:xfrm>
-            <a:off x="731520" y="2926080"/>
-            <a:ext cx="10972800" cy="457200"/>
-          </a:xfrm>
-          <a:prstGeom prst="rect">
-            <a:avLst/>
-          </a:prstGeom>
-          <a:noFill/>
-        </p:spPr>
-        <p:txBody>
-          <a:bodyPr wrap="square" lIns="45720" rIns="45720">
-            <a:spAutoFit/>
-          </a:bodyPr>
-          <a:lstStyle/>
-          <a:p>
-            <a:pPr algn="l">
-              <a:lnSpc>
-                <a:spcPct val="115000"/>
-              </a:lnSpc>
-            </a:pPr>
-            <a:r>
-              <a:rPr sz="2200" b="0">
-                <a:solidFill>
-                  <a:srgbClr val="181818"/>
-                </a:solidFill>
-                <a:latin typeface="Pretendard ExtraBold"/>
-              </a:rPr>
-              <a:t>왜 중요한가</a:t>
-            </a:r>
-          </a:p>
-        </p:txBody>
-      </p:sp>
-      <p:sp>
-        <p:nvSpPr>
-          <p:cNvPr id="9" name="TextBox 8"/>
-          <p:cNvSpPr txBox="1"/>
-          <p:nvPr/>
-        </p:nvSpPr>
-        <p:spPr>
-          <a:xfrm>
-            <a:off x="731520" y="3474720"/>
-            <a:ext cx="10972800" cy="2743200"/>
-          </a:xfrm>
-          <a:prstGeom prst="rect">
-            <a:avLst/>
-          </a:prstGeom>
-          <a:noFill/>
-        </p:spPr>
-        <p:txBody>
-          <a:bodyPr wrap="square">
-            <a:spAutoFit/>
-          </a:bodyPr>
-          <a:lstStyle/>
-          <a:p>
-            <a:pPr>
-              <a:lnSpc>
-                <a:spcPct val="130000"/>
-              </a:lnSpc>
-              <a:spcAft>
-                <a:spcPts val="600"/>
-              </a:spcAft>
-            </a:pPr>
-            <a:r>
-              <a:rPr sz="1800" b="0">
-                <a:solidFill>
-                  <a:srgbClr val="EA851B"/>
-                </a:solidFill>
-                <a:latin typeface="Pretendard ExtraBold"/>
-              </a:rPr>
-              <a:t>•  </a:t>
-            </a:r>
-            <a:r>
-              <a:rPr sz="1800" b="0">
-                <a:solidFill>
-                  <a:srgbClr val="181818"/>
-                </a:solidFill>
-                <a:latin typeface="Pretendard SemiBold"/>
-              </a:rPr>
-              <a:t>암석이 얼마나 많은 액체/기체를 저장할 수 있는지 결정 (석유/지하수)</a:t>
-            </a:r>
-          </a:p>
-          <a:p>
-            <a:pPr>
-              <a:lnSpc>
-                <a:spcPct val="130000"/>
-              </a:lnSpc>
-              <a:spcAft>
-                <a:spcPts val="600"/>
-              </a:spcAft>
-            </a:pPr>
-            <a:r>
-              <a:rPr sz="1800" b="0">
-                <a:solidFill>
-                  <a:srgbClr val="EA851B"/>
-                </a:solidFill>
-                <a:latin typeface="Pretendard ExtraBold"/>
-              </a:rPr>
-              <a:t>•  </a:t>
-            </a:r>
-            <a:r>
-              <a:rPr sz="1800" b="0">
-                <a:solidFill>
-                  <a:srgbClr val="181818"/>
-                </a:solidFill>
-                <a:latin typeface="Pretendard SemiBold"/>
-              </a:rPr>
-              <a:t>보간 평가 핵심 지표: 출력의 φ가 원본과 같아야 \"물리적으로 일관됨\"</a:t>
-            </a:r>
-          </a:p>
-          <a:p>
-            <a:pPr>
-              <a:lnSpc>
-                <a:spcPct val="130000"/>
-              </a:lnSpc>
-              <a:spcAft>
-                <a:spcPts val="600"/>
-              </a:spcAft>
-            </a:pPr>
-            <a:r>
-              <a:rPr sz="1800" b="0">
-                <a:solidFill>
-                  <a:srgbClr val="EA851B"/>
-                </a:solidFill>
-                <a:latin typeface="Pretendard ExtraBold"/>
-              </a:rPr>
-              <a:t>•  </a:t>
-            </a:r>
-            <a:r>
-              <a:rPr sz="1800" b="0">
-                <a:solidFill>
-                  <a:srgbClr val="181818"/>
-                </a:solidFill>
-                <a:latin typeface="Pretendard SemiBold"/>
-              </a:rPr>
-              <a:t>본 연구 metric: |Δφ| = |φ(예측) − φ(원본)|, 낮을수록 좋음</a:t>
-            </a:r>
-          </a:p>
-          <a:p>
-            <a:pPr>
-              <a:lnSpc>
-                <a:spcPct val="130000"/>
-              </a:lnSpc>
-              <a:spcAft>
-                <a:spcPts val="600"/>
-              </a:spcAft>
-            </a:pPr>
-            <a:r>
-              <a:rPr sz="1800" b="0">
-                <a:solidFill>
-                  <a:srgbClr val="EA851B"/>
-                </a:solidFill>
-                <a:latin typeface="Pretendard ExtraBold"/>
-              </a:rPr>
-              <a:t>•  </a:t>
-            </a:r>
-            <a:r>
-              <a:rPr sz="1800" b="0">
-                <a:solidFill>
-                  <a:srgbClr val="181818"/>
-                </a:solidFill>
-                <a:latin typeface="Pretendard SemiBold"/>
-              </a:rPr>
-              <a:t>numpy 한 줄: phi = volume.mean()  (값이 0/1이므로 평균 = pore 비율)</a:t>
+              <a:t>11 / 15</a:t>
             </a:r>
           </a:p>
         </p:txBody>
@@ -4003,7 +3807,7 @@
                 </a:solidFill>
                 <a:latin typeface="Pretendard Black"/>
               </a:rPr>
-              <a:t>2.2  등방성 검토 — 방향별 공극률 프로파일</a:t>
+              <a:t>2.1  Sparse Imaging — 왜 필요한가</a:t>
             </a:r>
           </a:p>
         </p:txBody>
@@ -4085,7 +3889,7 @@
                 </a:solidFill>
                 <a:latin typeface="Pretendard Medium"/>
               </a:rPr>
-              <a:t>Week 1 — 데이터 탐색</a:t>
+              <a:t>W1 — 데이터 + Classical · 1조 Advanced</a:t>
             </a:r>
           </a:p>
         </p:txBody>
@@ -4124,35 +3928,50 @@
                 </a:solidFill>
                 <a:latin typeface="Pretendard Medium"/>
               </a:rPr>
-              <a:t>12 / 20</a:t>
-            </a:r>
-          </a:p>
-        </p:txBody>
-      </p:sp>
-      <p:pic>
-        <p:nvPicPr>
-          <p:cNvPr id="6" name="Picture 5" descr="fig3_porosity_profile.png"/>
-          <p:cNvPicPr>
-            <a:picLocks noChangeAspect="1"/>
-          </p:cNvPicPr>
-          <p:nvPr/>
-        </p:nvPicPr>
-        <p:blipFill>
-          <a:blip r:embed="rId2"/>
-          <a:stretch>
-            <a:fillRect/>
-          </a:stretch>
-        </p:blipFill>
-        <p:spPr>
-          <a:xfrm>
-            <a:off x="2286000" y="1280160"/>
-            <a:ext cx="7589520" cy="3697990"/>
-          </a:xfrm>
-          <a:prstGeom prst="rect">
-            <a:avLst/>
-          </a:prstGeom>
-        </p:spPr>
-      </p:pic>
+              <a:t>12 / 15</a:t>
+            </a:r>
+          </a:p>
+        </p:txBody>
+      </p:sp>
+      <p:sp>
+        <p:nvSpPr>
+          <p:cNvPr id="6" name="TextBox 5"/>
+          <p:cNvSpPr txBox="1"/>
+          <p:nvPr/>
+        </p:nvSpPr>
+        <p:spPr>
+          <a:xfrm>
+            <a:off x="731520" y="1280160"/>
+            <a:ext cx="10972800" cy="457200"/>
+          </a:xfrm>
+          <a:prstGeom prst="rect">
+            <a:avLst/>
+          </a:prstGeom>
+          <a:noFill/>
+        </p:spPr>
+        <p:txBody>
+          <a:bodyPr wrap="square" lIns="45720" rIns="45720">
+            <a:spAutoFit/>
+          </a:bodyPr>
+          <a:lstStyle/>
+          <a:p>
+            <a:pPr algn="l">
+              <a:lnSpc>
+                <a:spcPct val="115000"/>
+              </a:lnSpc>
+            </a:pPr>
+            <a:r>
+              <a:rPr sz="2200" b="0">
+                <a:solidFill>
+                  <a:srgbClr val="EA851B"/>
+                </a:solidFill>
+                <a:latin typeface="Pretendard ExtraBold"/>
+              </a:rPr>
+              <a:t>문제</a:t>
+            </a:r>
+          </a:p>
+        </p:txBody>
+      </p:sp>
       <p:sp>
         <p:nvSpPr>
           <p:cNvPr id="7" name="TextBox 6"/>
@@ -4161,7 +3980,58 @@
         </p:nvSpPr>
         <p:spPr>
           <a:xfrm>
-            <a:off x="731520" y="5394960"/>
+            <a:off x="731520" y="1828800"/>
+            <a:ext cx="10972800" cy="548640"/>
+          </a:xfrm>
+          <a:prstGeom prst="rect">
+            <a:avLst/>
+          </a:prstGeom>
+          <a:noFill/>
+        </p:spPr>
+        <p:txBody>
+          <a:bodyPr wrap="square">
+            <a:spAutoFit/>
+          </a:bodyPr>
+          <a:lstStyle/>
+          <a:p>
+            <a:pPr>
+              <a:lnSpc>
+                <a:spcPct val="130000"/>
+              </a:lnSpc>
+              <a:spcAft>
+                <a:spcPts val="600"/>
+              </a:spcAft>
+            </a:pPr>
+            <a:r>
+              <a:rPr sz="1900" b="0">
+                <a:solidFill>
+                  <a:srgbClr val="EA851B"/>
+                </a:solidFill>
+                <a:latin typeface="Pretendard ExtraBold"/>
+              </a:rPr>
+              <a:t>•  </a:t>
+            </a:r>
+            <a:r>
+              <a:rPr sz="1900" b="0">
+                <a:solidFill>
+                  <a:srgbClr val="181818"/>
+                </a:solidFill>
+                <a:latin typeface="Pretendard SemiBold"/>
+              </a:rPr>
+              <a:t>micro-CT 스캔은 시간 + 비용 비쌈</a:t>
+            </a:r>
+          </a:p>
+        </p:txBody>
+      </p:sp>
+      <p:sp>
+        <p:nvSpPr>
+          <p:cNvPr id="8" name="TextBox 7"/>
+          <p:cNvSpPr txBox="1"/>
+          <p:nvPr/>
+        </p:nvSpPr>
+        <p:spPr>
+          <a:xfrm>
+            <a:off x="731520" y="2560320"/>
             <a:ext cx="10972800" cy="457200"/>
           </a:xfrm>
           <a:prstGeom prst="rect">
@@ -4181,27 +4051,27 @@
               </a:lnSpc>
             </a:pPr>
             <a:r>
-              <a:rPr sz="1700" b="0">
+              <a:rPr sz="2200" b="0">
                 <a:solidFill>
                   <a:srgbClr val="EA851B"/>
                 </a:solidFill>
                 <a:latin typeface="Pretendard ExtraBold"/>
               </a:rPr>
-              <a:t>세 축 프로파일이 비슷할수록 \"등방성(isotropic)\" 부피</a:t>
-            </a:r>
-          </a:p>
-        </p:txBody>
-      </p:sp>
-      <p:sp>
-        <p:nvSpPr>
-          <p:cNvPr id="8" name="TextBox 7"/>
+              <a:t>해결</a:t>
+            </a:r>
+          </a:p>
+        </p:txBody>
+      </p:sp>
+      <p:sp>
+        <p:nvSpPr>
+          <p:cNvPr id="9" name="TextBox 8"/>
           <p:cNvSpPr txBox="1"/>
           <p:nvPr/>
         </p:nvSpPr>
         <p:spPr>
           <a:xfrm>
-            <a:off x="731520" y="5852160"/>
-            <a:ext cx="10972800" cy="457200"/>
+            <a:off x="731520" y="3108960"/>
+            <a:ext cx="10972800" cy="2286000"/>
           </a:xfrm>
           <a:prstGeom prst="rect">
             <a:avLst/>
@@ -4209,24 +4079,92 @@
           <a:noFill/>
         </p:spPr>
         <p:txBody>
-          <a:bodyPr wrap="square" lIns="45720" rIns="45720">
+          <a:bodyPr wrap="square">
             <a:spAutoFit/>
           </a:bodyPr>
           <a:lstStyle/>
           <a:p>
-            <a:pPr algn="l">
-              <a:lnSpc>
-                <a:spcPct val="115000"/>
-              </a:lnSpc>
-            </a:pPr>
-            <a:r>
-              <a:rPr sz="1500" b="0">
+            <a:pPr>
+              <a:lnSpc>
+                <a:spcPct val="130000"/>
+              </a:lnSpc>
+              <a:spcAft>
+                <a:spcPts val="600"/>
+              </a:spcAft>
+            </a:pPr>
+            <a:r>
+              <a:rPr sz="1900" b="0">
+                <a:solidFill>
+                  <a:srgbClr val="EA851B"/>
+                </a:solidFill>
+                <a:latin typeface="Pretendard ExtraBold"/>
+              </a:rPr>
+              <a:t>•  </a:t>
+            </a:r>
+            <a:r>
+              <a:rPr sz="1900" b="0">
                 <a:solidFill>
                   <a:srgbClr val="181818"/>
                 </a:solidFill>
                 <a:latin typeface="Pretendard SemiBold"/>
               </a:rPr>
-              <a:t>본 연구의 tri-axis aggregation은 이 등방성 가정 위에 서 있음</a:t>
+              <a:t>k 슬라이스마다 1개만 측정 → 시간 (1−1/k)×100% 절감</a:t>
+            </a:r>
+          </a:p>
+          <a:p>
+            <a:pPr>
+              <a:lnSpc>
+                <a:spcPct val="130000"/>
+              </a:lnSpc>
+              <a:spcAft>
+                <a:spcPts val="600"/>
+              </a:spcAft>
+            </a:pPr>
+            <a:r>
+              <a:rPr sz="1900" b="0">
+                <a:solidFill>
+                  <a:srgbClr val="EA851B"/>
+                </a:solidFill>
+                <a:latin typeface="Pretendard ExtraBold"/>
+              </a:rPr>
+              <a:t>•  </a:t>
+            </a:r>
+            <a:r>
+              <a:rPr sz="1900" b="0">
+                <a:solidFill>
+                  <a:srgbClr val="181818"/>
+                </a:solidFill>
+                <a:latin typeface="Pretendard SemiBold"/>
+              </a:rPr>
+              <a:t>k=3 → 67% 절감, k=5 → 80% 절감</a:t>
+            </a:r>
+          </a:p>
+          <a:p>
+            <a:pPr>
+              <a:lnSpc>
+                <a:spcPct val="130000"/>
+              </a:lnSpc>
+              <a:spcAft>
+                <a:spcPts val="600"/>
+              </a:spcAft>
+            </a:pPr>
+            <a:r>
+              <a:rPr sz="1900" b="0">
+                <a:solidFill>
+                  <a:srgbClr val="EA851B"/>
+                </a:solidFill>
+                <a:latin typeface="Pretendard ExtraBold"/>
+              </a:rPr>
+              <a:t>•  </a:t>
+            </a:r>
+            <a:r>
+              <a:rPr sz="1900" b="0">
+                <a:solidFill>
+                  <a:srgbClr val="181818"/>
+                </a:solidFill>
+                <a:latin typeface="Pretendard SemiBold"/>
+              </a:rPr>
+              <a:t>핵심 질문: 누락 슬라이스를 측정 슬라이스로부터 얼마나 정확히 복원?</a:t>
             </a:r>
           </a:p>
         </p:txBody>
@@ -4251,20 +4189,59 @@
       <p:grpSpPr/>
       <p:sp>
         <p:nvSpPr>
-          <p:cNvPr id="2" name="Rectangle 1"/>
+          <p:cNvPr id="2" name="TextBox 1"/>
+          <p:cNvSpPr txBox="1"/>
+          <p:nvPr/>
+        </p:nvSpPr>
+        <p:spPr>
+          <a:xfrm>
+            <a:off x="457200" y="320040"/>
+            <a:ext cx="11430000" cy="640080"/>
+          </a:xfrm>
+          <a:prstGeom prst="rect">
+            <a:avLst/>
+          </a:prstGeom>
+          <a:noFill/>
+        </p:spPr>
+        <p:txBody>
+          <a:bodyPr wrap="square" lIns="45720" rIns="45720">
+            <a:spAutoFit/>
+          </a:bodyPr>
+          <a:lstStyle/>
+          <a:p>
+            <a:pPr algn="l">
+              <a:lnSpc>
+                <a:spcPct val="115000"/>
+              </a:lnSpc>
+            </a:pPr>
+            <a:r>
+              <a:rPr sz="2800" b="0">
+                <a:solidFill>
+                  <a:srgbClr val="EA851B"/>
+                </a:solidFill>
+                <a:latin typeface="Pretendard Black"/>
+              </a:rPr>
+              <a:t>2.2  B1 Linear vs B2 Cubic (z=62, k=5)</a:t>
+            </a:r>
+          </a:p>
+        </p:txBody>
+      </p:sp>
+      <p:sp>
+        <p:nvSpPr>
+          <p:cNvPr id="3" name="Rectangle 2"/>
           <p:cNvSpPr/>
           <p:nvPr/>
         </p:nvSpPr>
         <p:spPr>
           <a:xfrm>
-            <a:off x="0" y="0"/>
-            <a:ext cx="12191695" cy="6858000"/>
+            <a:off x="502920" y="960120"/>
+            <a:ext cx="1097280" cy="54864"/>
           </a:xfrm>
           <a:prstGeom prst="rect">
             <a:avLst/>
           </a:prstGeom>
           <a:solidFill>
-            <a:srgbClr val="FAF5EE"/>
+            <a:srgbClr val="EA851B"/>
           </a:solidFill>
           <a:ln>
             <a:noFill/>
@@ -4287,19 +4264,21 @@
         <p:txBody>
           <a:bodyPr rtlCol="0" anchor="ctr"/>
           <a:lstStyle/>
-          <a:p/>
-        </p:txBody>
-      </p:sp>
-      <p:sp>
-        <p:nvSpPr>
-          <p:cNvPr id="3" name="TextBox 2"/>
+          <a:p>
+            <a:pPr algn="ctr"/>
+          </a:p>
+        </p:txBody>
+      </p:sp>
+      <p:sp>
+        <p:nvSpPr>
+          <p:cNvPr id="4" name="TextBox 3"/>
           <p:cNvSpPr txBox="1"/>
           <p:nvPr/>
         </p:nvSpPr>
         <p:spPr>
           <a:xfrm>
-            <a:off x="731520" y="2286000"/>
-            <a:ext cx="10058400" cy="548640"/>
+            <a:off x="365760" y="6492240"/>
+            <a:ext cx="7315200" cy="274320"/>
           </a:xfrm>
           <a:prstGeom prst="rect">
             <a:avLst/>
@@ -4318,27 +4297,27 @@
               </a:lnSpc>
             </a:pPr>
             <a:r>
-              <a:rPr sz="2000" b="0">
-                <a:solidFill>
-                  <a:srgbClr val="EA851B"/>
-                </a:solidFill>
-                <a:latin typeface="Pretendard ExtraBold"/>
-              </a:rPr>
-              <a:t>Section 3</a:t>
-            </a:r>
-          </a:p>
-        </p:txBody>
-      </p:sp>
-      <p:sp>
-        <p:nvSpPr>
-          <p:cNvPr id="4" name="TextBox 3"/>
+              <a:rPr sz="1000" b="0">
+                <a:solidFill>
+                  <a:srgbClr val="7A7A7A"/>
+                </a:solidFill>
+                <a:latin typeface="Pretendard Medium"/>
+              </a:rPr>
+              <a:t>W1 — 데이터 + Classical · 1조 Advanced</a:t>
+            </a:r>
+          </a:p>
+        </p:txBody>
+      </p:sp>
+      <p:sp>
+        <p:nvSpPr>
+          <p:cNvPr id="5" name="TextBox 4"/>
           <p:cNvSpPr txBox="1"/>
           <p:nvPr/>
         </p:nvSpPr>
         <p:spPr>
           <a:xfrm>
-            <a:off x="731520" y="2834640"/>
-            <a:ext cx="10058400" cy="1371600"/>
+            <a:off x="11155680" y="6492240"/>
+            <a:ext cx="914400" cy="274320"/>
           </a:xfrm>
           <a:prstGeom prst="rect">
             <a:avLst/>
@@ -4351,33 +4330,57 @@
           </a:bodyPr>
           <a:lstStyle/>
           <a:p>
-            <a:pPr algn="l">
+            <a:pPr algn="r">
               <a:lnSpc>
                 <a:spcPct val="115000"/>
               </a:lnSpc>
             </a:pPr>
             <a:r>
-              <a:rPr sz="4400" b="0">
-                <a:solidFill>
-                  <a:srgbClr val="181818"/>
-                </a:solidFill>
-                <a:latin typeface="Pretendard Black"/>
-              </a:rPr>
-              <a:t>Sparse Imaging — 우리의 문제</a:t>
-            </a:r>
-          </a:p>
-        </p:txBody>
-      </p:sp>
-      <p:sp>
-        <p:nvSpPr>
-          <p:cNvPr id="5" name="TextBox 4"/>
+              <a:rPr sz="1000" b="0">
+                <a:solidFill>
+                  <a:srgbClr val="7A7A7A"/>
+                </a:solidFill>
+                <a:latin typeface="Pretendard Medium"/>
+              </a:rPr>
+              <a:t>13 / 15</a:t>
+            </a:r>
+          </a:p>
+        </p:txBody>
+      </p:sp>
+      <p:pic>
+        <p:nvPicPr>
+          <p:cNvPr id="6" name="Picture 5" descr="fig4_b1_vs_b2.png"/>
+          <p:cNvPicPr>
+            <a:picLocks noChangeAspect="1"/>
+          </p:cNvPicPr>
+          <p:nvPr/>
+        </p:nvPicPr>
+        <p:blipFill>
+          <a:blip r:embed="rId2"/>
+          <a:stretch>
+            <a:fillRect/>
+          </a:stretch>
+        </p:blipFill>
+        <p:spPr>
+          <a:xfrm>
+            <a:off x="457200" y="1280160"/>
+            <a:ext cx="11247120" cy="3989961"/>
+          </a:xfrm>
+          <a:prstGeom prst="rect">
+            <a:avLst/>
+          </a:prstGeom>
+        </p:spPr>
+      </p:pic>
+      <p:sp>
+        <p:nvSpPr>
+          <p:cNvPr id="7" name="TextBox 6"/>
           <p:cNvSpPr txBox="1"/>
           <p:nvPr/>
         </p:nvSpPr>
         <p:spPr>
           <a:xfrm>
-            <a:off x="365760" y="6492240"/>
-            <a:ext cx="7315200" cy="274320"/>
+            <a:off x="731520" y="5394960"/>
+            <a:ext cx="10972800" cy="457200"/>
           </a:xfrm>
           <a:prstGeom prst="rect">
             <a:avLst/>
@@ -4396,27 +4399,27 @@
               </a:lnSpc>
             </a:pPr>
             <a:r>
-              <a:rPr sz="1000" b="0">
-                <a:solidFill>
-                  <a:srgbClr val="7A7A7A"/>
-                </a:solidFill>
-                <a:latin typeface="Pretendard Medium"/>
-              </a:rPr>
-              <a:t>Week 1 — 데이터 탐색</a:t>
-            </a:r>
-          </a:p>
-        </p:txBody>
-      </p:sp>
-      <p:sp>
-        <p:nvSpPr>
-          <p:cNvPr id="6" name="TextBox 5"/>
+              <a:rPr sz="1600" b="0">
+                <a:solidFill>
+                  <a:srgbClr val="EA851B"/>
+                </a:solidFill>
+                <a:latin typeface="Pretendard ExtraBold"/>
+              </a:rPr>
+              <a:t>B1 = 선형 (직선), B2 = scipy cubic spline (부드러운 곡선)</a:t>
+            </a:r>
+          </a:p>
+        </p:txBody>
+      </p:sp>
+      <p:sp>
+        <p:nvSpPr>
+          <p:cNvPr id="8" name="TextBox 7"/>
           <p:cNvSpPr txBox="1"/>
           <p:nvPr/>
         </p:nvSpPr>
         <p:spPr>
           <a:xfrm>
-            <a:off x="11155680" y="6492240"/>
-            <a:ext cx="914400" cy="274320"/>
+            <a:off x="731520" y="5852160"/>
+            <a:ext cx="10972800" cy="457200"/>
           </a:xfrm>
           <a:prstGeom prst="rect">
             <a:avLst/>
@@ -4429,19 +4432,19 @@
           </a:bodyPr>
           <a:lstStyle/>
           <a:p>
-            <a:pPr algn="r">
+            <a:pPr algn="l">
               <a:lnSpc>
                 <a:spcPct val="115000"/>
               </a:lnSpc>
             </a:pPr>
             <a:r>
-              <a:rPr sz="1000" b="0">
-                <a:solidFill>
-                  <a:srgbClr val="7A7A7A"/>
-                </a:solidFill>
-                <a:latin typeface="Pretendard Medium"/>
-              </a:rPr>
-              <a:t>13 / 20</a:t>
+              <a:rPr sz="1400" b="0">
+                <a:solidFill>
+                  <a:srgbClr val="181818"/>
+                </a:solidFill>
+                <a:latin typeface="Pretendard SemiBold"/>
+              </a:rPr>
+              <a:t>평가 지표 3종: |Δφ| (공극률 오차), |ΔSA| (표면적 오차), SSIM (구조 유사도)</a:t>
             </a:r>
           </a:p>
         </p:txBody>
@@ -4498,7 +4501,7 @@
                 </a:solidFill>
                 <a:latin typeface="Pretendard Black"/>
               </a:rPr>
-              <a:t>3.1  왜 sparse imaging인가?</a:t>
+              <a:t>2.3  k Sweep — 본 연구의 motivation</a:t>
             </a:r>
           </a:p>
         </p:txBody>
@@ -4580,7 +4583,7 @@
                 </a:solidFill>
                 <a:latin typeface="Pretendard Medium"/>
               </a:rPr>
-              <a:t>Week 1 — 데이터 탐색</a:t>
+              <a:t>W1 — 데이터 + Classical · 1조 Advanced</a:t>
             </a:r>
           </a:p>
         </p:txBody>
@@ -4619,20 +4622,44 @@
                 </a:solidFill>
                 <a:latin typeface="Pretendard Medium"/>
               </a:rPr>
-              <a:t>14 / 20</a:t>
-            </a:r>
-          </a:p>
-        </p:txBody>
-      </p:sp>
-      <p:sp>
-        <p:nvSpPr>
-          <p:cNvPr id="6" name="TextBox 5"/>
+              <a:t>14 / 15</a:t>
+            </a:r>
+          </a:p>
+        </p:txBody>
+      </p:sp>
+      <p:pic>
+        <p:nvPicPr>
+          <p:cNvPr id="6" name="Picture 5" descr="fig5_motivation.png"/>
+          <p:cNvPicPr>
+            <a:picLocks noChangeAspect="1"/>
+          </p:cNvPicPr>
+          <p:nvPr/>
+        </p:nvPicPr>
+        <p:blipFill>
+          <a:blip r:embed="rId2"/>
+          <a:stretch>
+            <a:fillRect/>
+          </a:stretch>
+        </p:blipFill>
+        <p:spPr>
+          <a:xfrm>
+            <a:off x="2286000" y="1188720"/>
+            <a:ext cx="7589520" cy="3746725"/>
+          </a:xfrm>
+          <a:prstGeom prst="rect">
+            <a:avLst/>
+          </a:prstGeom>
+        </p:spPr>
+      </p:pic>
+      <p:sp>
+        <p:nvSpPr>
+          <p:cNvPr id="7" name="TextBox 6"/>
           <p:cNvSpPr txBox="1"/>
           <p:nvPr/>
         </p:nvSpPr>
         <p:spPr>
           <a:xfrm>
-            <a:off x="731520" y="1371600"/>
+            <a:off x="731520" y="5486400"/>
             <a:ext cx="10972800" cy="457200"/>
           </a:xfrm>
           <a:prstGeom prst="rect">
@@ -4652,92 +4679,13 @@
               </a:lnSpc>
             </a:pPr>
             <a:r>
-              <a:rPr sz="2200" b="0">
+              <a:rPr sz="1600" b="0">
                 <a:solidFill>
                   <a:srgbClr val="EA851B"/>
                 </a:solidFill>
                 <a:latin typeface="Pretendard ExtraBold"/>
               </a:rPr>
-              <a:t>문제 상황</a:t>
-            </a:r>
-          </a:p>
-        </p:txBody>
-      </p:sp>
-      <p:sp>
-        <p:nvSpPr>
-          <p:cNvPr id="7" name="TextBox 6"/>
-          <p:cNvSpPr txBox="1"/>
-          <p:nvPr/>
-        </p:nvSpPr>
-        <p:spPr>
-          <a:xfrm>
-            <a:off x="731520" y="1920240"/>
-            <a:ext cx="10972800" cy="1188720"/>
-          </a:xfrm>
-          <a:prstGeom prst="rect">
-            <a:avLst/>
-          </a:prstGeom>
-          <a:noFill/>
-        </p:spPr>
-        <p:txBody>
-          <a:bodyPr wrap="square">
-            <a:spAutoFit/>
-          </a:bodyPr>
-          <a:lstStyle/>
-          <a:p>
-            <a:pPr>
-              <a:lnSpc>
-                <a:spcPct val="130000"/>
-              </a:lnSpc>
-              <a:spcAft>
-                <a:spcPts val="600"/>
-              </a:spcAft>
-            </a:pPr>
-            <a:r>
-              <a:rPr sz="1900" b="0">
-                <a:solidFill>
-                  <a:srgbClr val="EA851B"/>
-                </a:solidFill>
-                <a:latin typeface="Pretendard ExtraBold"/>
-              </a:rPr>
-              <a:t>•  </a:t>
-            </a:r>
-            <a:r>
-              <a:rPr sz="1900" b="0">
-                <a:solidFill>
-                  <a:srgbClr val="181818"/>
-                </a:solidFill>
-                <a:latin typeface="Pretendard SemiBold"/>
-              </a:rPr>
-              <a:t>micro-CT 스캔은 시간 + 비용이 비싸다</a:t>
-            </a:r>
-          </a:p>
-          <a:p>
-            <a:pPr>
-              <a:lnSpc>
-                <a:spcPct val="130000"/>
-              </a:lnSpc>
-              <a:spcAft>
-                <a:spcPts val="600"/>
-              </a:spcAft>
-            </a:pPr>
-            <a:r>
-              <a:rPr sz="1900" b="0">
-                <a:solidFill>
-                  <a:srgbClr val="EA851B"/>
-                </a:solidFill>
-                <a:latin typeface="Pretendard ExtraBold"/>
-              </a:rPr>
-              <a:t>•  </a:t>
-            </a:r>
-            <a:r>
-              <a:rPr sz="1900" b="0">
-                <a:solidFill>
-                  <a:srgbClr val="181818"/>
-                </a:solidFill>
-                <a:latin typeface="Pretendard SemiBold"/>
-              </a:rPr>
-              <a:t>모든 z 슬라이스 측정 → 측정 시간 100%</a:t>
+              <a:t>k 가 커질수록 모든 도메인의 |Δφ| 가 빠르게 악화</a:t>
             </a:r>
           </a:p>
         </p:txBody>
@@ -4750,7 +4698,7 @@
         </p:nvSpPr>
         <p:spPr>
           <a:xfrm>
-            <a:off x="731520" y="3291840"/>
+            <a:off x="731520" y="5943600"/>
             <a:ext cx="10972800" cy="457200"/>
           </a:xfrm>
           <a:prstGeom prst="rect">
@@ -4770,120 +4718,13 @@
               </a:lnSpc>
             </a:pPr>
             <a:r>
-              <a:rPr sz="2200" b="0">
-                <a:solidFill>
-                  <a:srgbClr val="EA851B"/>
-                </a:solidFill>
-                <a:latin typeface="Pretendard ExtraBold"/>
-              </a:rPr>
-              <a:t>Sparse 전략</a:t>
-            </a:r>
-          </a:p>
-        </p:txBody>
-      </p:sp>
-      <p:sp>
-        <p:nvSpPr>
-          <p:cNvPr id="9" name="TextBox 8"/>
-          <p:cNvSpPr txBox="1"/>
-          <p:nvPr/>
-        </p:nvSpPr>
-        <p:spPr>
-          <a:xfrm>
-            <a:off x="731520" y="3840480"/>
-            <a:ext cx="10972800" cy="2286000"/>
-          </a:xfrm>
-          <a:prstGeom prst="rect">
-            <a:avLst/>
-          </a:prstGeom>
-          <a:noFill/>
-        </p:spPr>
-        <p:txBody>
-          <a:bodyPr wrap="square">
-            <a:spAutoFit/>
-          </a:bodyPr>
-          <a:lstStyle/>
-          <a:p>
-            <a:pPr>
-              <a:lnSpc>
-                <a:spcPct val="130000"/>
-              </a:lnSpc>
-              <a:spcAft>
-                <a:spcPts val="600"/>
-              </a:spcAft>
-            </a:pPr>
-            <a:r>
-              <a:rPr sz="1900" b="0">
-                <a:solidFill>
-                  <a:srgbClr val="EA851B"/>
-                </a:solidFill>
-                <a:latin typeface="Pretendard ExtraBold"/>
-              </a:rPr>
-              <a:t>•  </a:t>
-            </a:r>
-            <a:r>
-              <a:rPr sz="1900" b="0">
+              <a:rPr sz="1400" b="0">
                 <a:solidFill>
                   <a:srgbClr val="181818"/>
                 </a:solidFill>
                 <a:latin typeface="Pretendard SemiBold"/>
               </a:rPr>
-              <a:t>k 슬라이스마다 1개만 측정, 나머지는 컴퓨터로 \"복원\"</a:t>
-            </a:r>
-          </a:p>
-          <a:p>
-            <a:pPr>
-              <a:lnSpc>
-                <a:spcPct val="130000"/>
-              </a:lnSpc>
-              <a:spcAft>
-                <a:spcPts val="600"/>
-              </a:spcAft>
-            </a:pPr>
-            <a:r>
-              <a:rPr sz="1900" b="0">
-                <a:solidFill>
-                  <a:srgbClr val="EA851B"/>
-                </a:solidFill>
-                <a:latin typeface="Pretendard ExtraBold"/>
-              </a:rPr>
-              <a:t>•  </a:t>
-            </a:r>
-            <a:r>
-              <a:rPr sz="1900" b="0">
-                <a:solidFill>
-                  <a:srgbClr val="181818"/>
-                </a:solidFill>
-                <a:latin typeface="Pretendard SemiBold"/>
-              </a:rPr>
-              <a:t>k=3 → 시간 1/3 (67% 절감), k=5 → 1/5 (80% 절감)</a:t>
-            </a:r>
-          </a:p>
-          <a:p>
-            <a:pPr>
-              <a:lnSpc>
-                <a:spcPct val="130000"/>
-              </a:lnSpc>
-              <a:spcAft>
-                <a:spcPts val="600"/>
-              </a:spcAft>
-            </a:pPr>
-            <a:r>
-              <a:rPr sz="1900" b="0">
-                <a:solidFill>
-                  <a:srgbClr val="EA851B"/>
-                </a:solidFill>
-                <a:latin typeface="Pretendard ExtraBold"/>
-              </a:rPr>
-              <a:t>•  </a:t>
-            </a:r>
-            <a:r>
-              <a:rPr sz="1900" b="0">
-                <a:solidFill>
-                  <a:srgbClr val="181818"/>
-                </a:solidFill>
-                <a:latin typeface="Pretendard SemiBold"/>
-              </a:rPr>
-              <a:t>핵심 질문: 측정되지 않은 슬라이스를 얼마나 정확히 복원할 수 있는가?</a:t>
+              <a:t>Deep learning이 이 곡선을 "평평하게" 만들 수 있을까? → W3 이후</a:t>
             </a:r>
           </a:p>
         </p:txBody>
@@ -4940,7 +4781,7 @@
                 </a:solidFill>
                 <a:latin typeface="Pretendard Black"/>
               </a:rPr>
-              <a:t>3.2  Sparse k=3 시각화 (연속 6장)</a:t>
+              <a:t>자기 점검 &amp; W2 예고</a:t>
             </a:r>
           </a:p>
         </p:txBody>
@@ -5022,7 +4863,7 @@
                 </a:solidFill>
                 <a:latin typeface="Pretendard Medium"/>
               </a:rPr>
-              <a:t>Week 1 — 데이터 탐색</a:t>
+              <a:t>W1 — 데이터 + Classical · 1조 Advanced</a:t>
             </a:r>
           </a:p>
         </p:txBody>
@@ -5061,35 +4902,50 @@
                 </a:solidFill>
                 <a:latin typeface="Pretendard Medium"/>
               </a:rPr>
-              <a:t>15 / 20</a:t>
-            </a:r>
-          </a:p>
-        </p:txBody>
-      </p:sp>
-      <p:pic>
-        <p:nvPicPr>
-          <p:cNvPr id="6" name="Picture 5" descr="fig4_sparse_demo.png"/>
-          <p:cNvPicPr>
-            <a:picLocks noChangeAspect="1"/>
-          </p:cNvPicPr>
-          <p:nvPr/>
-        </p:nvPicPr>
-        <p:blipFill>
-          <a:blip r:embed="rId2"/>
-          <a:stretch>
-            <a:fillRect/>
-          </a:stretch>
-        </p:blipFill>
-        <p:spPr>
-          <a:xfrm>
-            <a:off x="274320" y="1371600"/>
-            <a:ext cx="11612880" cy="2630791"/>
-          </a:xfrm>
-          <a:prstGeom prst="rect">
-            <a:avLst/>
-          </a:prstGeom>
-        </p:spPr>
-      </p:pic>
+              <a:t>15 / 15</a:t>
+            </a:r>
+          </a:p>
+        </p:txBody>
+      </p:sp>
+      <p:sp>
+        <p:nvSpPr>
+          <p:cNvPr id="6" name="TextBox 5"/>
+          <p:cNvSpPr txBox="1"/>
+          <p:nvPr/>
+        </p:nvSpPr>
+        <p:spPr>
+          <a:xfrm>
+            <a:off x="548640" y="1280160"/>
+            <a:ext cx="6400800" cy="457200"/>
+          </a:xfrm>
+          <a:prstGeom prst="rect">
+            <a:avLst/>
+          </a:prstGeom>
+          <a:noFill/>
+        </p:spPr>
+        <p:txBody>
+          <a:bodyPr wrap="square" lIns="45720" rIns="45720">
+            <a:spAutoFit/>
+          </a:bodyPr>
+          <a:lstStyle/>
+          <a:p>
+            <a:pPr algn="l">
+              <a:lnSpc>
+                <a:spcPct val="115000"/>
+              </a:lnSpc>
+            </a:pPr>
+            <a:r>
+              <a:rPr sz="2000" b="0">
+                <a:solidFill>
+                  <a:srgbClr val="EA851B"/>
+                </a:solidFill>
+                <a:latin typeface="Pretendard ExtraBold"/>
+              </a:rPr>
+              <a:t>자기 점검</a:t>
+            </a:r>
+          </a:p>
+        </p:txBody>
+      </p:sp>
       <p:sp>
         <p:nvSpPr>
           <p:cNvPr id="7" name="TextBox 6"/>
@@ -5098,8 +4954,171 @@
         </p:nvSpPr>
         <p:spPr>
           <a:xfrm>
-            <a:off x="731520" y="5029200"/>
-            <a:ext cx="10972800" cy="457200"/>
+            <a:off x="548640" y="1828800"/>
+            <a:ext cx="6400800" cy="3657600"/>
+          </a:xfrm>
+          <a:prstGeom prst="rect">
+            <a:avLst/>
+          </a:prstGeom>
+          <a:noFill/>
+        </p:spPr>
+        <p:txBody>
+          <a:bodyPr wrap="square">
+            <a:spAutoFit/>
+          </a:bodyPr>
+          <a:lstStyle/>
+          <a:p>
+            <a:pPr>
+              <a:lnSpc>
+                <a:spcPct val="130000"/>
+              </a:lnSpc>
+              <a:spcAft>
+                <a:spcPts val="600"/>
+              </a:spcAft>
+            </a:pPr>
+            <a:r>
+              <a:rPr sz="1500" b="0">
+                <a:solidFill>
+                  <a:srgbClr val="EA851B"/>
+                </a:solidFill>
+                <a:latin typeface="Pretendard ExtraBold"/>
+              </a:rPr>
+              <a:t>•  </a:t>
+            </a:r>
+            <a:r>
+              <a:rPr sz="1500" b="0">
+                <a:solidFill>
+                  <a:srgbClr val="181818"/>
+                </a:solidFill>
+                <a:latin typeface="Pretendard SemiBold"/>
+              </a:rPr>
+              <a:t>normalize_to_float가 DL에 필요한 이유</a:t>
+            </a:r>
+          </a:p>
+          <a:p>
+            <a:pPr>
+              <a:lnSpc>
+                <a:spcPct val="130000"/>
+              </a:lnSpc>
+              <a:spcAft>
+                <a:spcPts val="600"/>
+              </a:spcAft>
+            </a:pPr>
+            <a:r>
+              <a:rPr sz="1500" b="0">
+                <a:solidFill>
+                  <a:srgbClr val="EA851B"/>
+                </a:solidFill>
+                <a:latin typeface="Pretendard ExtraBold"/>
+              </a:rPr>
+              <a:t>•  </a:t>
+            </a:r>
+            <a:r>
+              <a:rPr sz="1500" b="0">
+                <a:solidFill>
+                  <a:srgbClr val="181818"/>
+                </a:solidFill>
+                <a:latin typeface="Pretendard SemiBold"/>
+              </a:rPr>
+              <a:t>Otsu가 binary에서 trivial한 이유</a:t>
+            </a:r>
+          </a:p>
+          <a:p>
+            <a:pPr>
+              <a:lnSpc>
+                <a:spcPct val="130000"/>
+              </a:lnSpc>
+              <a:spcAft>
+                <a:spcPts val="600"/>
+              </a:spcAft>
+            </a:pPr>
+            <a:r>
+              <a:rPr sz="1500" b="0">
+                <a:solidFill>
+                  <a:srgbClr val="EA851B"/>
+                </a:solidFill>
+                <a:latin typeface="Pretendard ExtraBold"/>
+              </a:rPr>
+              <a:t>•  </a:t>
+            </a:r>
+            <a:r>
+              <a:rPr sz="1500" b="0">
+                <a:solidFill>
+                  <a:srgbClr val="181818"/>
+                </a:solidFill>
+                <a:latin typeface="Pretendard SemiBold"/>
+              </a:rPr>
+              <a:t>4 도메인 등방성 순위</a:t>
+            </a:r>
+          </a:p>
+          <a:p>
+            <a:pPr>
+              <a:lnSpc>
+                <a:spcPct val="130000"/>
+              </a:lnSpc>
+              <a:spcAft>
+                <a:spcPts val="600"/>
+              </a:spcAft>
+            </a:pPr>
+            <a:r>
+              <a:rPr sz="1500" b="0">
+                <a:solidFill>
+                  <a:srgbClr val="EA851B"/>
+                </a:solidFill>
+                <a:latin typeface="Pretendard ExtraBold"/>
+              </a:rPr>
+              <a:t>•  </a:t>
+            </a:r>
+            <a:r>
+              <a:rPr sz="1500" b="0">
+                <a:solidFill>
+                  <a:srgbClr val="181818"/>
+                </a:solidFill>
+                <a:latin typeface="Pretendard SemiBold"/>
+              </a:rPr>
+              <a:t>B1·B2 k=5 차이 + 가설</a:t>
+            </a:r>
+          </a:p>
+          <a:p>
+            <a:pPr>
+              <a:lnSpc>
+                <a:spcPct val="130000"/>
+              </a:lnSpc>
+              <a:spcAft>
+                <a:spcPts val="600"/>
+              </a:spcAft>
+            </a:pPr>
+            <a:r>
+              <a:rPr sz="1500" b="0">
+                <a:solidFill>
+                  <a:srgbClr val="EA851B"/>
+                </a:solidFill>
+                <a:latin typeface="Pretendard ExtraBold"/>
+              </a:rPr>
+              <a:t>•  </a:t>
+            </a:r>
+            <a:r>
+              <a:rPr sz="1500" b="0">
+                <a:solidFill>
+                  <a:srgbClr val="181818"/>
+                </a:solidFill>
+                <a:latin typeface="Pretendard SemiBold"/>
+              </a:rPr>
+              <a:t>"왜 DL이 필요한가" — motivation 곡선 해석</a:t>
+            </a:r>
+          </a:p>
+        </p:txBody>
+      </p:sp>
+      <p:sp>
+        <p:nvSpPr>
+          <p:cNvPr id="8" name="TextBox 7"/>
+          <p:cNvSpPr txBox="1"/>
+          <p:nvPr/>
+        </p:nvSpPr>
+        <p:spPr>
+          <a:xfrm>
+            <a:off x="7132320" y="1280160"/>
+            <a:ext cx="5029200" cy="457200"/>
           </a:xfrm>
           <a:prstGeom prst="rect">
             <a:avLst/>
@@ -5118,27 +5137,27 @@
               </a:lnSpc>
             </a:pPr>
             <a:r>
-              <a:rPr sz="1700" b="0">
+              <a:rPr sz="2000" b="0">
                 <a:solidFill>
                   <a:srgbClr val="EA851B"/>
                 </a:solidFill>
                 <a:latin typeface="Pretendard ExtraBold"/>
               </a:rPr>
-              <a:t>연속 z 슬라이스는 매우 비슷하지만 살짝 다르다 → 이웃 정보로 가운데를 예측 가능</a:t>
-            </a:r>
-          </a:p>
-        </p:txBody>
-      </p:sp>
-      <p:sp>
-        <p:nvSpPr>
-          <p:cNvPr id="8" name="TextBox 7"/>
+              <a:t>W2 — DL 입문 + mini UNet 학습</a:t>
+            </a:r>
+          </a:p>
+        </p:txBody>
+      </p:sp>
+      <p:sp>
+        <p:nvSpPr>
+          <p:cNvPr id="9" name="TextBox 8"/>
           <p:cNvSpPr txBox="1"/>
           <p:nvPr/>
         </p:nvSpPr>
         <p:spPr>
           <a:xfrm>
-            <a:off x="731520" y="5577840"/>
-            <a:ext cx="10972800" cy="457200"/>
+            <a:off x="7132320" y="1828800"/>
+            <a:ext cx="5029200" cy="3657600"/>
           </a:xfrm>
           <a:prstGeom prst="rect">
             <a:avLst/>
@@ -5146,58 +5165,164 @@
           <a:noFill/>
         </p:spPr>
         <p:txBody>
-          <a:bodyPr wrap="square" lIns="45720" rIns="45720">
+          <a:bodyPr wrap="square">
             <a:spAutoFit/>
           </a:bodyPr>
           <a:lstStyle/>
           <a:p>
-            <a:pPr algn="l">
-              <a:lnSpc>
-                <a:spcPct val="115000"/>
-              </a:lnSpc>
+            <a:pPr>
+              <a:lnSpc>
+                <a:spcPct val="130000"/>
+              </a:lnSpc>
+              <a:spcAft>
+                <a:spcPts val="600"/>
+              </a:spcAft>
             </a:pPr>
             <a:r>
               <a:rPr sz="1500" b="0">
                 <a:solidFill>
+                  <a:srgbClr val="EA851B"/>
+                </a:solidFill>
+                <a:latin typeface="Pretendard ExtraBold"/>
+              </a:rPr>
+              <a:t>•  </a:t>
+            </a:r>
+            <a:r>
+              <a:rPr sz="1500" b="0">
+                <a:solidFill>
                   <a:srgbClr val="181818"/>
                 </a:solidFill>
                 <a:latin typeface="Pretendard SemiBold"/>
               </a:rPr>
-              <a:t>본 코스에서 보간 정확도를 점차 올린다: 선형(W2) → UNet(W3) → tri-axis(W5)</a:t>
-            </a:r>
-          </a:p>
-        </p:txBody>
-      </p:sp>
-    </p:spTree>
-  </p:cSld>
-  <p:clrMapOvr>
-    <a:masterClrMapping/>
-  </p:clrMapOvr>
-</p:sld>
-</file>
-
-<file path=ppt/slides/slide16.xml><?xml version="1.0" encoding="utf-8"?>
-<p:sld xmlns:a="http://schemas.openxmlformats.org/drawingml/2006/main" xmlns:p="http://schemas.openxmlformats.org/presentationml/2006/main" xmlns:r="http://schemas.openxmlformats.org/officeDocument/2006/relationships">
-  <p:cSld>
-    <p:spTree>
-      <p:nvGrpSpPr>
-        <p:cNvPr id="1" name=""/>
-        <p:cNvGrpSpPr/>
-        <p:nvPr/>
-      </p:nvGrpSpPr>
-      <p:grpSpPr/>
-      <p:sp>
-        <p:nvSpPr>
-          <p:cNvPr id="2" name="Rectangle 1"/>
+              <a:t>UNet 구조 + skip-connection 이해</a:t>
+            </a:r>
+          </a:p>
+          <a:p>
+            <a:pPr>
+              <a:lnSpc>
+                <a:spcPct val="130000"/>
+              </a:lnSpc>
+              <a:spcAft>
+                <a:spcPts val="600"/>
+              </a:spcAft>
+            </a:pPr>
+            <a:r>
+              <a:rPr sz="1500" b="0">
+                <a:solidFill>
+                  <a:srgbClr val="EA851B"/>
+                </a:solidFill>
+                <a:latin typeface="Pretendard ExtraBold"/>
+              </a:rPr>
+              <a:t>•  </a:t>
+            </a:r>
+            <a:r>
+              <a:rPr sz="1500" b="0">
+                <a:solidFill>
+                  <a:srgbClr val="181818"/>
+                </a:solidFill>
+                <a:latin typeface="Pretendard SemiBold"/>
+              </a:rPr>
+              <a:t>mini UNet (~100K params) 직접 학습</a:t>
+            </a:r>
+          </a:p>
+          <a:p>
+            <a:pPr>
+              <a:lnSpc>
+                <a:spcPct val="130000"/>
+              </a:lnSpc>
+              <a:spcAft>
+                <a:spcPts val="600"/>
+              </a:spcAft>
+            </a:pPr>
+            <a:r>
+              <a:rPr sz="1500" b="0">
+                <a:solidFill>
+                  <a:srgbClr val="EA851B"/>
+                </a:solidFill>
+                <a:latin typeface="Pretendard ExtraBold"/>
+              </a:rPr>
+              <a:t>•  </a:t>
+            </a:r>
+            <a:r>
+              <a:rPr sz="1500" b="0">
+                <a:solidFill>
+                  <a:srgbClr val="181818"/>
+                </a:solidFill>
+                <a:latin typeface="Pretendard SemiBold"/>
+              </a:rPr>
+              <a:t>학습 시간 옵션: 10분 / 30분 / 60분</a:t>
+            </a:r>
+          </a:p>
+          <a:p>
+            <a:pPr>
+              <a:lnSpc>
+                <a:spcPct val="130000"/>
+              </a:lnSpc>
+              <a:spcAft>
+                <a:spcPts val="600"/>
+              </a:spcAft>
+            </a:pPr>
+            <a:r>
+              <a:rPr sz="1500" b="0">
+                <a:solidFill>
+                  <a:srgbClr val="EA851B"/>
+                </a:solidFill>
+                <a:latin typeface="Pretendard ExtraBold"/>
+              </a:rPr>
+              <a:t>•  </a:t>
+            </a:r>
+            <a:r>
+              <a:rPr sz="1500" b="0">
+                <a:solidFill>
+                  <a:srgbClr val="181818"/>
+                </a:solidFill>
+                <a:latin typeface="Pretendard SemiBold"/>
+              </a:rPr>
+              <a:t>본 W1 baseline vs UNet 직접 비교</a:t>
+            </a:r>
+          </a:p>
+          <a:p>
+            <a:pPr>
+              <a:lnSpc>
+                <a:spcPct val="130000"/>
+              </a:lnSpc>
+              <a:spcAft>
+                <a:spcPts val="600"/>
+              </a:spcAft>
+            </a:pPr>
+            <a:r>
+              <a:rPr sz="1500" b="0">
+                <a:solidFill>
+                  <a:srgbClr val="EA851B"/>
+                </a:solidFill>
+                <a:latin typeface="Pretendard ExtraBold"/>
+              </a:rPr>
+              <a:t>•  </a:t>
+            </a:r>
+            <a:r>
+              <a:rPr sz="1500" b="0">
+                <a:solidFill>
+                  <a:srgbClr val="181818"/>
+                </a:solidFill>
+                <a:latin typeface="Pretendard SemiBold"/>
+              </a:rPr>
+              <a:t>pip install torch torchvision pytorch-msssim</a:t>
+            </a:r>
+          </a:p>
+        </p:txBody>
+      </p:sp>
+      <p:sp>
+        <p:nvSpPr>
+          <p:cNvPr id="10" name="Rounded Rectangle 9"/>
           <p:cNvSpPr/>
           <p:nvPr/>
         </p:nvSpPr>
         <p:spPr>
           <a:xfrm>
-            <a:off x="0" y="0"/>
-            <a:ext cx="12191695" cy="6858000"/>
-          </a:xfrm>
-          <a:prstGeom prst="rect">
+            <a:off x="548640" y="5486400"/>
+            <a:ext cx="11612880" cy="731520"/>
+          </a:xfrm>
+          <a:prstGeom prst="roundRect">
             <a:avLst/>
           </a:prstGeom>
           <a:solidFill>
@@ -5229,14 +5354,14 @@
       </p:sp>
       <p:sp>
         <p:nvSpPr>
-          <p:cNvPr id="3" name="TextBox 2"/>
+          <p:cNvPr id="11" name="TextBox 10"/>
           <p:cNvSpPr txBox="1"/>
           <p:nvPr/>
         </p:nvSpPr>
         <p:spPr>
           <a:xfrm>
-            <a:off x="731520" y="2286000"/>
-            <a:ext cx="10058400" cy="548640"/>
+            <a:off x="731520" y="5669280"/>
+            <a:ext cx="11247120" cy="457200"/>
           </a:xfrm>
           <a:prstGeom prst="rect">
             <a:avLst/>
@@ -5249,1278 +5374,19 @@
           </a:bodyPr>
           <a:lstStyle/>
           <a:p>
-            <a:pPr algn="l">
+            <a:pPr algn="ctr">
               <a:lnSpc>
                 <a:spcPct val="115000"/>
               </a:lnSpc>
             </a:pPr>
             <a:r>
-              <a:rPr sz="2000" b="0">
+              <a:rPr sz="1700" b="0">
                 <a:solidFill>
                   <a:srgbClr val="EA851B"/>
                 </a:solidFill>
                 <a:latin typeface="Pretendard ExtraBold"/>
               </a:rPr>
-              <a:t>Section 4</a:t>
-            </a:r>
-          </a:p>
-        </p:txBody>
-      </p:sp>
-      <p:sp>
-        <p:nvSpPr>
-          <p:cNvPr id="4" name="TextBox 3"/>
-          <p:cNvSpPr txBox="1"/>
-          <p:nvPr/>
-        </p:nvSpPr>
-        <p:spPr>
-          <a:xfrm>
-            <a:off x="731520" y="2834640"/>
-            <a:ext cx="10058400" cy="1371600"/>
-          </a:xfrm>
-          <a:prstGeom prst="rect">
-            <a:avLst/>
-          </a:prstGeom>
-          <a:noFill/>
-        </p:spPr>
-        <p:txBody>
-          <a:bodyPr wrap="square" lIns="45720" rIns="45720">
-            <a:spAutoFit/>
-          </a:bodyPr>
-          <a:lstStyle/>
-          <a:p>
-            <a:pPr algn="l">
-              <a:lnSpc>
-                <a:spcPct val="115000"/>
-              </a:lnSpc>
-            </a:pPr>
-            <a:r>
-              <a:rPr sz="4400" b="0">
-                <a:solidFill>
-                  <a:srgbClr val="181818"/>
-                </a:solidFill>
-                <a:latin typeface="Pretendard Black"/>
-              </a:rPr>
-              <a:t>가장 단순한 보간 — 선형</a:t>
-            </a:r>
-          </a:p>
-        </p:txBody>
-      </p:sp>
-      <p:sp>
-        <p:nvSpPr>
-          <p:cNvPr id="5" name="TextBox 4"/>
-          <p:cNvSpPr txBox="1"/>
-          <p:nvPr/>
-        </p:nvSpPr>
-        <p:spPr>
-          <a:xfrm>
-            <a:off x="365760" y="6492240"/>
-            <a:ext cx="7315200" cy="274320"/>
-          </a:xfrm>
-          <a:prstGeom prst="rect">
-            <a:avLst/>
-          </a:prstGeom>
-          <a:noFill/>
-        </p:spPr>
-        <p:txBody>
-          <a:bodyPr wrap="square" lIns="45720" rIns="45720">
-            <a:spAutoFit/>
-          </a:bodyPr>
-          <a:lstStyle/>
-          <a:p>
-            <a:pPr algn="l">
-              <a:lnSpc>
-                <a:spcPct val="115000"/>
-              </a:lnSpc>
-            </a:pPr>
-            <a:r>
-              <a:rPr sz="1000" b="0">
-                <a:solidFill>
-                  <a:srgbClr val="7A7A7A"/>
-                </a:solidFill>
-                <a:latin typeface="Pretendard Medium"/>
-              </a:rPr>
-              <a:t>Week 1 — 데이터 탐색</a:t>
-            </a:r>
-          </a:p>
-        </p:txBody>
-      </p:sp>
-      <p:sp>
-        <p:nvSpPr>
-          <p:cNvPr id="6" name="TextBox 5"/>
-          <p:cNvSpPr txBox="1"/>
-          <p:nvPr/>
-        </p:nvSpPr>
-        <p:spPr>
-          <a:xfrm>
-            <a:off x="11155680" y="6492240"/>
-            <a:ext cx="914400" cy="274320"/>
-          </a:xfrm>
-          <a:prstGeom prst="rect">
-            <a:avLst/>
-          </a:prstGeom>
-          <a:noFill/>
-        </p:spPr>
-        <p:txBody>
-          <a:bodyPr wrap="square" lIns="45720" rIns="45720">
-            <a:spAutoFit/>
-          </a:bodyPr>
-          <a:lstStyle/>
-          <a:p>
-            <a:pPr algn="r">
-              <a:lnSpc>
-                <a:spcPct val="115000"/>
-              </a:lnSpc>
-            </a:pPr>
-            <a:r>
-              <a:rPr sz="1000" b="0">
-                <a:solidFill>
-                  <a:srgbClr val="7A7A7A"/>
-                </a:solidFill>
-                <a:latin typeface="Pretendard Medium"/>
-              </a:rPr>
-              <a:t>16 / 20</a:t>
-            </a:r>
-          </a:p>
-        </p:txBody>
-      </p:sp>
-    </p:spTree>
-  </p:cSld>
-  <p:clrMapOvr>
-    <a:masterClrMapping/>
-  </p:clrMapOvr>
-</p:sld>
-</file>
-
-<file path=ppt/slides/slide17.xml><?xml version="1.0" encoding="utf-8"?>
-<p:sld xmlns:a="http://schemas.openxmlformats.org/drawingml/2006/main" xmlns:p="http://schemas.openxmlformats.org/presentationml/2006/main" xmlns:r="http://schemas.openxmlformats.org/officeDocument/2006/relationships">
-  <p:cSld>
-    <p:spTree>
-      <p:nvGrpSpPr>
-        <p:cNvPr id="1" name=""/>
-        <p:cNvGrpSpPr/>
-        <p:nvPr/>
-      </p:nvGrpSpPr>
-      <p:grpSpPr/>
-      <p:sp>
-        <p:nvSpPr>
-          <p:cNvPr id="2" name="TextBox 1"/>
-          <p:cNvSpPr txBox="1"/>
-          <p:nvPr/>
-        </p:nvSpPr>
-        <p:spPr>
-          <a:xfrm>
-            <a:off x="457200" y="320040"/>
-            <a:ext cx="11430000" cy="640080"/>
-          </a:xfrm>
-          <a:prstGeom prst="rect">
-            <a:avLst/>
-          </a:prstGeom>
-          <a:noFill/>
-        </p:spPr>
-        <p:txBody>
-          <a:bodyPr wrap="square" lIns="45720" rIns="45720">
-            <a:spAutoFit/>
-          </a:bodyPr>
-          <a:lstStyle/>
-          <a:p>
-            <a:pPr algn="l">
-              <a:lnSpc>
-                <a:spcPct val="115000"/>
-              </a:lnSpc>
-            </a:pPr>
-            <a:r>
-              <a:rPr sz="2800" b="0">
-                <a:solidFill>
-                  <a:srgbClr val="EA851B"/>
-                </a:solidFill>
-                <a:latin typeface="Pretendard Black"/>
-              </a:rPr>
-              <a:t>4.1  선형 보간 — α 값 변화에 따른 결과</a:t>
-            </a:r>
-          </a:p>
-        </p:txBody>
-      </p:sp>
-      <p:sp>
-        <p:nvSpPr>
-          <p:cNvPr id="3" name="Rectangle 2"/>
-          <p:cNvSpPr/>
-          <p:nvPr/>
-        </p:nvSpPr>
-        <p:spPr>
-          <a:xfrm>
-            <a:off x="502920" y="960120"/>
-            <a:ext cx="1097280" cy="54864"/>
-          </a:xfrm>
-          <a:prstGeom prst="rect">
-            <a:avLst/>
-          </a:prstGeom>
-          <a:solidFill>
-            <a:srgbClr val="EA851B"/>
-          </a:solidFill>
-          <a:ln>
-            <a:noFill/>
-          </a:ln>
-        </p:spPr>
-        <p:style>
-          <a:lnRef idx="1">
-            <a:schemeClr val="accent1"/>
-          </a:lnRef>
-          <a:fillRef idx="3">
-            <a:schemeClr val="accent1"/>
-          </a:fillRef>
-          <a:effectRef idx="2">
-            <a:schemeClr val="accent1"/>
-          </a:effectRef>
-          <a:fontRef idx="minor">
-            <a:schemeClr val="lt1"/>
-          </a:fontRef>
-        </p:style>
-        <p:txBody>
-          <a:bodyPr rtlCol="0" anchor="ctr"/>
-          <a:lstStyle/>
-          <a:p>
-            <a:pPr algn="ctr"/>
-          </a:p>
-        </p:txBody>
-      </p:sp>
-      <p:sp>
-        <p:nvSpPr>
-          <p:cNvPr id="4" name="TextBox 3"/>
-          <p:cNvSpPr txBox="1"/>
-          <p:nvPr/>
-        </p:nvSpPr>
-        <p:spPr>
-          <a:xfrm>
-            <a:off x="365760" y="6492240"/>
-            <a:ext cx="7315200" cy="274320"/>
-          </a:xfrm>
-          <a:prstGeom prst="rect">
-            <a:avLst/>
-          </a:prstGeom>
-          <a:noFill/>
-        </p:spPr>
-        <p:txBody>
-          <a:bodyPr wrap="square" lIns="45720" rIns="45720">
-            <a:spAutoFit/>
-          </a:bodyPr>
-          <a:lstStyle/>
-          <a:p>
-            <a:pPr algn="l">
-              <a:lnSpc>
-                <a:spcPct val="115000"/>
-              </a:lnSpc>
-            </a:pPr>
-            <a:r>
-              <a:rPr sz="1000" b="0">
-                <a:solidFill>
-                  <a:srgbClr val="7A7A7A"/>
-                </a:solidFill>
-                <a:latin typeface="Pretendard Medium"/>
-              </a:rPr>
-              <a:t>Week 1 — 데이터 탐색</a:t>
-            </a:r>
-          </a:p>
-        </p:txBody>
-      </p:sp>
-      <p:sp>
-        <p:nvSpPr>
-          <p:cNvPr id="5" name="TextBox 4"/>
-          <p:cNvSpPr txBox="1"/>
-          <p:nvPr/>
-        </p:nvSpPr>
-        <p:spPr>
-          <a:xfrm>
-            <a:off x="11155680" y="6492240"/>
-            <a:ext cx="914400" cy="274320"/>
-          </a:xfrm>
-          <a:prstGeom prst="rect">
-            <a:avLst/>
-          </a:prstGeom>
-          <a:noFill/>
-        </p:spPr>
-        <p:txBody>
-          <a:bodyPr wrap="square" lIns="45720" rIns="45720">
-            <a:spAutoFit/>
-          </a:bodyPr>
-          <a:lstStyle/>
-          <a:p>
-            <a:pPr algn="r">
-              <a:lnSpc>
-                <a:spcPct val="115000"/>
-              </a:lnSpc>
-            </a:pPr>
-            <a:r>
-              <a:rPr sz="1000" b="0">
-                <a:solidFill>
-                  <a:srgbClr val="7A7A7A"/>
-                </a:solidFill>
-                <a:latin typeface="Pretendard Medium"/>
-              </a:rPr>
-              <a:t>17 / 20</a:t>
-            </a:r>
-          </a:p>
-        </p:txBody>
-      </p:sp>
-      <p:pic>
-        <p:nvPicPr>
-          <p:cNvPr id="6" name="Picture 5" descr="fig5_linear_alpha.png"/>
-          <p:cNvPicPr>
-            <a:picLocks noChangeAspect="1"/>
-          </p:cNvPicPr>
-          <p:nvPr/>
-        </p:nvPicPr>
-        <p:blipFill>
-          <a:blip r:embed="rId2"/>
-          <a:stretch>
-            <a:fillRect/>
-          </a:stretch>
-        </p:blipFill>
-        <p:spPr>
-          <a:xfrm>
-            <a:off x="274320" y="1280160"/>
-            <a:ext cx="11612880" cy="2883778"/>
-          </a:xfrm>
-          <a:prstGeom prst="rect">
-            <a:avLst/>
-          </a:prstGeom>
-        </p:spPr>
-      </p:pic>
-      <p:sp>
-        <p:nvSpPr>
-          <p:cNvPr id="7" name="TextBox 6"/>
-          <p:cNvSpPr txBox="1"/>
-          <p:nvPr/>
-        </p:nvSpPr>
-        <p:spPr>
-          <a:xfrm>
-            <a:off x="731520" y="4937760"/>
-            <a:ext cx="10972800" cy="457200"/>
-          </a:xfrm>
-          <a:prstGeom prst="rect">
-            <a:avLst/>
-          </a:prstGeom>
-          <a:noFill/>
-        </p:spPr>
-        <p:txBody>
-          <a:bodyPr wrap="square" lIns="45720" rIns="45720">
-            <a:spAutoFit/>
-          </a:bodyPr>
-          <a:lstStyle/>
-          <a:p>
-            <a:pPr algn="ctr">
-              <a:lnSpc>
-                <a:spcPct val="115000"/>
-              </a:lnSpc>
-            </a:pPr>
-            <a:r>
-              <a:rPr sz="1800" b="0">
-                <a:solidFill>
-                  <a:srgbClr val="181818"/>
-                </a:solidFill>
-                <a:latin typeface="Consolas"/>
-              </a:rPr>
-              <a:t>predicted = (1−α)·slice_before + α·slice_after</a:t>
-            </a:r>
-          </a:p>
-        </p:txBody>
-      </p:sp>
-      <p:sp>
-        <p:nvSpPr>
-          <p:cNvPr id="8" name="TextBox 7"/>
-          <p:cNvSpPr txBox="1"/>
-          <p:nvPr/>
-        </p:nvSpPr>
-        <p:spPr>
-          <a:xfrm>
-            <a:off x="731520" y="5577840"/>
-            <a:ext cx="10972800" cy="457200"/>
-          </a:xfrm>
-          <a:prstGeom prst="rect">
-            <a:avLst/>
-          </a:prstGeom>
-          <a:noFill/>
-        </p:spPr>
-        <p:txBody>
-          <a:bodyPr wrap="square" lIns="45720" rIns="45720">
-            <a:spAutoFit/>
-          </a:bodyPr>
-          <a:lstStyle/>
-          <a:p>
-            <a:pPr algn="l">
-              <a:lnSpc>
-                <a:spcPct val="115000"/>
-              </a:lnSpc>
-            </a:pPr>
-            <a:r>
-              <a:rPr sz="1600" b="0">
-                <a:solidFill>
-                  <a:srgbClr val="EA851B"/>
-                </a:solidFill>
-                <a:latin typeface="Pretendard ExtraBold"/>
-              </a:rPr>
-              <a:t>두 슬라이스 간격이 클수록 α=0.5 결과가 \"흐릿\"해짐 → 본 연구 deep learning의 동기</a:t>
-            </a:r>
-          </a:p>
-        </p:txBody>
-      </p:sp>
-    </p:spTree>
-  </p:cSld>
-  <p:clrMapOvr>
-    <a:masterClrMapping/>
-  </p:clrMapOvr>
-</p:sld>
-</file>
-
-<file path=ppt/slides/slide18.xml><?xml version="1.0" encoding="utf-8"?>
-<p:sld xmlns:a="http://schemas.openxmlformats.org/drawingml/2006/main" xmlns:p="http://schemas.openxmlformats.org/presentationml/2006/main" xmlns:r="http://schemas.openxmlformats.org/officeDocument/2006/relationships">
-  <p:cSld>
-    <p:spTree>
-      <p:nvGrpSpPr>
-        <p:cNvPr id="1" name=""/>
-        <p:cNvGrpSpPr/>
-        <p:nvPr/>
-      </p:nvGrpSpPr>
-      <p:grpSpPr/>
-      <p:sp>
-        <p:nvSpPr>
-          <p:cNvPr id="2" name="TextBox 1"/>
-          <p:cNvSpPr txBox="1"/>
-          <p:nvPr/>
-        </p:nvSpPr>
-        <p:spPr>
-          <a:xfrm>
-            <a:off x="457200" y="320040"/>
-            <a:ext cx="11430000" cy="640080"/>
-          </a:xfrm>
-          <a:prstGeom prst="rect">
-            <a:avLst/>
-          </a:prstGeom>
-          <a:noFill/>
-        </p:spPr>
-        <p:txBody>
-          <a:bodyPr wrap="square" lIns="45720" rIns="45720">
-            <a:spAutoFit/>
-          </a:bodyPr>
-          <a:lstStyle/>
-          <a:p>
-            <a:pPr algn="l">
-              <a:lnSpc>
-                <a:spcPct val="115000"/>
-              </a:lnSpc>
-            </a:pPr>
-            <a:r>
-              <a:rPr sz="2800" b="0">
-                <a:solidFill>
-                  <a:srgbClr val="EA851B"/>
-                </a:solidFill>
-                <a:latin typeface="Pretendard Black"/>
-              </a:rPr>
-              <a:t>4.2  k Sweep — 본 연구의 정량 motivation</a:t>
-            </a:r>
-          </a:p>
-        </p:txBody>
-      </p:sp>
-      <p:sp>
-        <p:nvSpPr>
-          <p:cNvPr id="3" name="Rectangle 2"/>
-          <p:cNvSpPr/>
-          <p:nvPr/>
-        </p:nvSpPr>
-        <p:spPr>
-          <a:xfrm>
-            <a:off x="502920" y="960120"/>
-            <a:ext cx="1097280" cy="54864"/>
-          </a:xfrm>
-          <a:prstGeom prst="rect">
-            <a:avLst/>
-          </a:prstGeom>
-          <a:solidFill>
-            <a:srgbClr val="EA851B"/>
-          </a:solidFill>
-          <a:ln>
-            <a:noFill/>
-          </a:ln>
-        </p:spPr>
-        <p:style>
-          <a:lnRef idx="1">
-            <a:schemeClr val="accent1"/>
-          </a:lnRef>
-          <a:fillRef idx="3">
-            <a:schemeClr val="accent1"/>
-          </a:fillRef>
-          <a:effectRef idx="2">
-            <a:schemeClr val="accent1"/>
-          </a:effectRef>
-          <a:fontRef idx="minor">
-            <a:schemeClr val="lt1"/>
-          </a:fontRef>
-        </p:style>
-        <p:txBody>
-          <a:bodyPr rtlCol="0" anchor="ctr"/>
-          <a:lstStyle/>
-          <a:p>
-            <a:pPr algn="ctr"/>
-          </a:p>
-        </p:txBody>
-      </p:sp>
-      <p:sp>
-        <p:nvSpPr>
-          <p:cNvPr id="4" name="TextBox 3"/>
-          <p:cNvSpPr txBox="1"/>
-          <p:nvPr/>
-        </p:nvSpPr>
-        <p:spPr>
-          <a:xfrm>
-            <a:off x="365760" y="6492240"/>
-            <a:ext cx="7315200" cy="274320"/>
-          </a:xfrm>
-          <a:prstGeom prst="rect">
-            <a:avLst/>
-          </a:prstGeom>
-          <a:noFill/>
-        </p:spPr>
-        <p:txBody>
-          <a:bodyPr wrap="square" lIns="45720" rIns="45720">
-            <a:spAutoFit/>
-          </a:bodyPr>
-          <a:lstStyle/>
-          <a:p>
-            <a:pPr algn="l">
-              <a:lnSpc>
-                <a:spcPct val="115000"/>
-              </a:lnSpc>
-            </a:pPr>
-            <a:r>
-              <a:rPr sz="1000" b="0">
-                <a:solidFill>
-                  <a:srgbClr val="7A7A7A"/>
-                </a:solidFill>
-                <a:latin typeface="Pretendard Medium"/>
-              </a:rPr>
-              <a:t>Week 1 — 데이터 탐색</a:t>
-            </a:r>
-          </a:p>
-        </p:txBody>
-      </p:sp>
-      <p:sp>
-        <p:nvSpPr>
-          <p:cNvPr id="5" name="TextBox 4"/>
-          <p:cNvSpPr txBox="1"/>
-          <p:nvPr/>
-        </p:nvSpPr>
-        <p:spPr>
-          <a:xfrm>
-            <a:off x="11155680" y="6492240"/>
-            <a:ext cx="914400" cy="274320"/>
-          </a:xfrm>
-          <a:prstGeom prst="rect">
-            <a:avLst/>
-          </a:prstGeom>
-          <a:noFill/>
-        </p:spPr>
-        <p:txBody>
-          <a:bodyPr wrap="square" lIns="45720" rIns="45720">
-            <a:spAutoFit/>
-          </a:bodyPr>
-          <a:lstStyle/>
-          <a:p>
-            <a:pPr algn="r">
-              <a:lnSpc>
-                <a:spcPct val="115000"/>
-              </a:lnSpc>
-            </a:pPr>
-            <a:r>
-              <a:rPr sz="1000" b="0">
-                <a:solidFill>
-                  <a:srgbClr val="7A7A7A"/>
-                </a:solidFill>
-                <a:latin typeface="Pretendard Medium"/>
-              </a:rPr>
-              <a:t>18 / 20</a:t>
-            </a:r>
-          </a:p>
-        </p:txBody>
-      </p:sp>
-      <p:pic>
-        <p:nvPicPr>
-          <p:cNvPr id="6" name="Picture 5" descr="fig6_k_sweep.png"/>
-          <p:cNvPicPr>
-            <a:picLocks noChangeAspect="1"/>
-          </p:cNvPicPr>
-          <p:nvPr/>
-        </p:nvPicPr>
-        <p:blipFill>
-          <a:blip r:embed="rId2"/>
-          <a:stretch>
-            <a:fillRect/>
-          </a:stretch>
-        </p:blipFill>
-        <p:spPr>
-          <a:xfrm>
-            <a:off x="1828800" y="1188720"/>
-            <a:ext cx="8503920" cy="4159152"/>
-          </a:xfrm>
-          <a:prstGeom prst="rect">
-            <a:avLst/>
-          </a:prstGeom>
-        </p:spPr>
-      </p:pic>
-      <p:sp>
-        <p:nvSpPr>
-          <p:cNvPr id="7" name="TextBox 6"/>
-          <p:cNvSpPr txBox="1"/>
-          <p:nvPr/>
-        </p:nvSpPr>
-        <p:spPr>
-          <a:xfrm>
-            <a:off x="731520" y="5577840"/>
-            <a:ext cx="10972800" cy="457200"/>
-          </a:xfrm>
-          <a:prstGeom prst="rect">
-            <a:avLst/>
-          </a:prstGeom>
-          <a:noFill/>
-        </p:spPr>
-        <p:txBody>
-          <a:bodyPr wrap="square" lIns="45720" rIns="45720">
-            <a:spAutoFit/>
-          </a:bodyPr>
-          <a:lstStyle/>
-          <a:p>
-            <a:pPr algn="l">
-              <a:lnSpc>
-                <a:spcPct val="115000"/>
-              </a:lnSpc>
-            </a:pPr>
-            <a:r>
-              <a:rPr sz="1700" b="0">
-                <a:solidFill>
-                  <a:srgbClr val="EA851B"/>
-                </a:solidFill>
-                <a:latin typeface="Pretendard ExtraBold"/>
-              </a:rPr>
-              <a:t>시간 절감을 늘릴수록 (k↑) 복원 오차도 커진다</a:t>
-            </a:r>
-          </a:p>
-        </p:txBody>
-      </p:sp>
-      <p:sp>
-        <p:nvSpPr>
-          <p:cNvPr id="8" name="TextBox 7"/>
-          <p:cNvSpPr txBox="1"/>
-          <p:nvPr/>
-        </p:nvSpPr>
-        <p:spPr>
-          <a:xfrm>
-            <a:off x="731520" y="5989320"/>
-            <a:ext cx="10972800" cy="457200"/>
-          </a:xfrm>
-          <a:prstGeom prst="rect">
-            <a:avLst/>
-          </a:prstGeom>
-          <a:noFill/>
-        </p:spPr>
-        <p:txBody>
-          <a:bodyPr wrap="square" lIns="45720" rIns="45720">
-            <a:spAutoFit/>
-          </a:bodyPr>
-          <a:lstStyle/>
-          <a:p>
-            <a:pPr algn="l">
-              <a:lnSpc>
-                <a:spcPct val="115000"/>
-              </a:lnSpc>
-            </a:pPr>
-            <a:r>
-              <a:rPr sz="1500" b="0">
-                <a:solidFill>
-                  <a:srgbClr val="181818"/>
-                </a:solidFill>
-                <a:latin typeface="Pretendard SemiBold"/>
-              </a:rPr>
-              <a:t>Deep learning이 이 곡선을 \"평평하게\" 만들 수 있다면 → 큰 실용적 가치</a:t>
-            </a:r>
-          </a:p>
-        </p:txBody>
-      </p:sp>
-    </p:spTree>
-  </p:cSld>
-  <p:clrMapOvr>
-    <a:masterClrMapping/>
-  </p:clrMapOvr>
-</p:sld>
-</file>
-
-<file path=ppt/slides/slide19.xml><?xml version="1.0" encoding="utf-8"?>
-<p:sld xmlns:a="http://schemas.openxmlformats.org/drawingml/2006/main" xmlns:p="http://schemas.openxmlformats.org/presentationml/2006/main" xmlns:r="http://schemas.openxmlformats.org/officeDocument/2006/relationships">
-  <p:cSld>
-    <p:spTree>
-      <p:nvGrpSpPr>
-        <p:cNvPr id="1" name=""/>
-        <p:cNvGrpSpPr/>
-        <p:nvPr/>
-      </p:nvGrpSpPr>
-      <p:grpSpPr/>
-      <p:sp>
-        <p:nvSpPr>
-          <p:cNvPr id="2" name="TextBox 1"/>
-          <p:cNvSpPr txBox="1"/>
-          <p:nvPr/>
-        </p:nvSpPr>
-        <p:spPr>
-          <a:xfrm>
-            <a:off x="457200" y="320040"/>
-            <a:ext cx="11430000" cy="640080"/>
-          </a:xfrm>
-          <a:prstGeom prst="rect">
-            <a:avLst/>
-          </a:prstGeom>
-          <a:noFill/>
-        </p:spPr>
-        <p:txBody>
-          <a:bodyPr wrap="square" lIns="45720" rIns="45720">
-            <a:spAutoFit/>
-          </a:bodyPr>
-          <a:lstStyle/>
-          <a:p>
-            <a:pPr algn="l">
-              <a:lnSpc>
-                <a:spcPct val="115000"/>
-              </a:lnSpc>
-            </a:pPr>
-            <a:r>
-              <a:rPr sz="2800" b="0">
-                <a:solidFill>
-                  <a:srgbClr val="EA851B"/>
-                </a:solidFill>
-                <a:latin typeface="Pretendard Black"/>
-              </a:rPr>
-              <a:t>자기 점검 &amp; 다음 주 예고</a:t>
-            </a:r>
-          </a:p>
-        </p:txBody>
-      </p:sp>
-      <p:sp>
-        <p:nvSpPr>
-          <p:cNvPr id="3" name="Rectangle 2"/>
-          <p:cNvSpPr/>
-          <p:nvPr/>
-        </p:nvSpPr>
-        <p:spPr>
-          <a:xfrm>
-            <a:off x="502920" y="960120"/>
-            <a:ext cx="1097280" cy="54864"/>
-          </a:xfrm>
-          <a:prstGeom prst="rect">
-            <a:avLst/>
-          </a:prstGeom>
-          <a:solidFill>
-            <a:srgbClr val="EA851B"/>
-          </a:solidFill>
-          <a:ln>
-            <a:noFill/>
-          </a:ln>
-        </p:spPr>
-        <p:style>
-          <a:lnRef idx="1">
-            <a:schemeClr val="accent1"/>
-          </a:lnRef>
-          <a:fillRef idx="3">
-            <a:schemeClr val="accent1"/>
-          </a:fillRef>
-          <a:effectRef idx="2">
-            <a:schemeClr val="accent1"/>
-          </a:effectRef>
-          <a:fontRef idx="minor">
-            <a:schemeClr val="lt1"/>
-          </a:fontRef>
-        </p:style>
-        <p:txBody>
-          <a:bodyPr rtlCol="0" anchor="ctr"/>
-          <a:lstStyle/>
-          <a:p>
-            <a:pPr algn="ctr"/>
-          </a:p>
-        </p:txBody>
-      </p:sp>
-      <p:sp>
-        <p:nvSpPr>
-          <p:cNvPr id="4" name="TextBox 3"/>
-          <p:cNvSpPr txBox="1"/>
-          <p:nvPr/>
-        </p:nvSpPr>
-        <p:spPr>
-          <a:xfrm>
-            <a:off x="365760" y="6492240"/>
-            <a:ext cx="7315200" cy="274320"/>
-          </a:xfrm>
-          <a:prstGeom prst="rect">
-            <a:avLst/>
-          </a:prstGeom>
-          <a:noFill/>
-        </p:spPr>
-        <p:txBody>
-          <a:bodyPr wrap="square" lIns="45720" rIns="45720">
-            <a:spAutoFit/>
-          </a:bodyPr>
-          <a:lstStyle/>
-          <a:p>
-            <a:pPr algn="l">
-              <a:lnSpc>
-                <a:spcPct val="115000"/>
-              </a:lnSpc>
-            </a:pPr>
-            <a:r>
-              <a:rPr sz="1000" b="0">
-                <a:solidFill>
-                  <a:srgbClr val="7A7A7A"/>
-                </a:solidFill>
-                <a:latin typeface="Pretendard Medium"/>
-              </a:rPr>
-              <a:t>Week 1 — 데이터 탐색</a:t>
-            </a:r>
-          </a:p>
-        </p:txBody>
-      </p:sp>
-      <p:sp>
-        <p:nvSpPr>
-          <p:cNvPr id="5" name="TextBox 4"/>
-          <p:cNvSpPr txBox="1"/>
-          <p:nvPr/>
-        </p:nvSpPr>
-        <p:spPr>
-          <a:xfrm>
-            <a:off x="11155680" y="6492240"/>
-            <a:ext cx="914400" cy="274320"/>
-          </a:xfrm>
-          <a:prstGeom prst="rect">
-            <a:avLst/>
-          </a:prstGeom>
-          <a:noFill/>
-        </p:spPr>
-        <p:txBody>
-          <a:bodyPr wrap="square" lIns="45720" rIns="45720">
-            <a:spAutoFit/>
-          </a:bodyPr>
-          <a:lstStyle/>
-          <a:p>
-            <a:pPr algn="r">
-              <a:lnSpc>
-                <a:spcPct val="115000"/>
-              </a:lnSpc>
-            </a:pPr>
-            <a:r>
-              <a:rPr sz="1000" b="0">
-                <a:solidFill>
-                  <a:srgbClr val="7A7A7A"/>
-                </a:solidFill>
-                <a:latin typeface="Pretendard Medium"/>
-              </a:rPr>
-              <a:t>19 / 20</a:t>
-            </a:r>
-          </a:p>
-        </p:txBody>
-      </p:sp>
-      <p:sp>
-        <p:nvSpPr>
-          <p:cNvPr id="6" name="TextBox 5"/>
-          <p:cNvSpPr txBox="1"/>
-          <p:nvPr/>
-        </p:nvSpPr>
-        <p:spPr>
-          <a:xfrm>
-            <a:off x="548640" y="1280160"/>
-            <a:ext cx="6400800" cy="457200"/>
-          </a:xfrm>
-          <a:prstGeom prst="rect">
-            <a:avLst/>
-          </a:prstGeom>
-          <a:noFill/>
-        </p:spPr>
-        <p:txBody>
-          <a:bodyPr wrap="square" lIns="45720" rIns="45720">
-            <a:spAutoFit/>
-          </a:bodyPr>
-          <a:lstStyle/>
-          <a:p>
-            <a:pPr algn="l">
-              <a:lnSpc>
-                <a:spcPct val="115000"/>
-              </a:lnSpc>
-            </a:pPr>
-            <a:r>
-              <a:rPr sz="2000" b="0">
-                <a:solidFill>
-                  <a:srgbClr val="EA851B"/>
-                </a:solidFill>
-                <a:latin typeface="Pretendard ExtraBold"/>
-              </a:rPr>
-              <a:t>자기 점검 (자신의 말로 답해보기)</a:t>
-            </a:r>
-          </a:p>
-        </p:txBody>
-      </p:sp>
-      <p:sp>
-        <p:nvSpPr>
-          <p:cNvPr id="7" name="TextBox 6"/>
-          <p:cNvSpPr txBox="1"/>
-          <p:nvPr/>
-        </p:nvSpPr>
-        <p:spPr>
-          <a:xfrm>
-            <a:off x="548640" y="1828800"/>
-            <a:ext cx="6400800" cy="4114800"/>
-          </a:xfrm>
-          <a:prstGeom prst="rect">
-            <a:avLst/>
-          </a:prstGeom>
-          <a:noFill/>
-        </p:spPr>
-        <p:txBody>
-          <a:bodyPr wrap="square">
-            <a:spAutoFit/>
-          </a:bodyPr>
-          <a:lstStyle/>
-          <a:p>
-            <a:pPr>
-              <a:lnSpc>
-                <a:spcPct val="130000"/>
-              </a:lnSpc>
-              <a:spcAft>
-                <a:spcPts val="600"/>
-              </a:spcAft>
-            </a:pPr>
-            <a:r>
-              <a:rPr sz="1500" b="0">
-                <a:solidFill>
-                  <a:srgbClr val="EA851B"/>
-                </a:solidFill>
-                <a:latin typeface="Pretendard ExtraBold"/>
-              </a:rPr>
-              <a:t>•  </a:t>
-            </a:r>
-            <a:r>
-              <a:rPr sz="1500" b="0">
-                <a:solidFill>
-                  <a:srgbClr val="181818"/>
-                </a:solidFill>
-                <a:latin typeface="Pretendard SemiBold"/>
-              </a:rPr>
-              <a:t>Voxel과 pixel의 차이</a:t>
-            </a:r>
-          </a:p>
-          <a:p>
-            <a:pPr>
-              <a:lnSpc>
-                <a:spcPct val="130000"/>
-              </a:lnSpc>
-              <a:spcAft>
-                <a:spcPts val="600"/>
-              </a:spcAft>
-            </a:pPr>
-            <a:r>
-              <a:rPr sz="1500" b="0">
-                <a:solidFill>
-                  <a:srgbClr val="EA851B"/>
-                </a:solidFill>
-                <a:latin typeface="Pretendard ExtraBold"/>
-              </a:rPr>
-              <a:t>•  </a:t>
-            </a:r>
-            <a:r>
-              <a:rPr sz="1500" b="0">
-                <a:solidFill>
-                  <a:srgbClr val="181818"/>
-                </a:solidFill>
-                <a:latin typeface="Pretendard SemiBold"/>
-              </a:rPr>
-              <a:t>porosity profile std가 작다는 것의 의미</a:t>
-            </a:r>
-          </a:p>
-          <a:p>
-            <a:pPr>
-              <a:lnSpc>
-                <a:spcPct val="130000"/>
-              </a:lnSpc>
-              <a:spcAft>
-                <a:spcPts val="600"/>
-              </a:spcAft>
-            </a:pPr>
-            <a:r>
-              <a:rPr sz="1500" b="0">
-                <a:solidFill>
-                  <a:srgbClr val="EA851B"/>
-                </a:solidFill>
-                <a:latin typeface="Pretendard ExtraBold"/>
-              </a:rPr>
-              <a:t>•  </a:t>
-            </a:r>
-            <a:r>
-              <a:rPr sz="1500" b="0">
-                <a:solidFill>
-                  <a:srgbClr val="181818"/>
-                </a:solidFill>
-                <a:latin typeface="Pretendard SemiBold"/>
-              </a:rPr>
-              <a:t>k=5 sparse일 때 시간 절감률과 BB |Δφ|</a:t>
-            </a:r>
-          </a:p>
-          <a:p>
-            <a:pPr>
-              <a:lnSpc>
-                <a:spcPct val="130000"/>
-              </a:lnSpc>
-              <a:spcAft>
-                <a:spcPts val="600"/>
-              </a:spcAft>
-            </a:pPr>
-            <a:r>
-              <a:rPr sz="1500" b="0">
-                <a:solidFill>
-                  <a:srgbClr val="EA851B"/>
-                </a:solidFill>
-                <a:latin typeface="Pretendard ExtraBold"/>
-              </a:rPr>
-              <a:t>•  </a:t>
-            </a:r>
-            <a:r>
-              <a:rPr sz="1500" b="0">
-                <a:solidFill>
-                  <a:srgbClr val="181818"/>
-                </a:solidFill>
-                <a:latin typeface="Pretendard SemiBold"/>
-              </a:rPr>
-              <a:t>세 축 슬라이스 패턴 유사성이 본 연구 어떤 가정과 연결되나</a:t>
-            </a:r>
-          </a:p>
-          <a:p>
-            <a:pPr>
-              <a:lnSpc>
-                <a:spcPct val="130000"/>
-              </a:lnSpc>
-              <a:spcAft>
-                <a:spcPts val="600"/>
-              </a:spcAft>
-            </a:pPr>
-            <a:r>
-              <a:rPr sz="1500" b="0">
-                <a:solidFill>
-                  <a:srgbClr val="EA851B"/>
-                </a:solidFill>
-                <a:latin typeface="Pretendard ExtraBold"/>
-              </a:rPr>
-              <a:t>•  </a:t>
-            </a:r>
-            <a:r>
-              <a:rPr sz="1500" b="0">
-                <a:solidFill>
-                  <a:srgbClr val="181818"/>
-                </a:solidFill>
-                <a:latin typeface="Pretendard SemiBold"/>
-              </a:rPr>
-              <a:t>오늘 측정한 곡선이 \"왜 DL이 필요한지\"를 어떻게 설명하나</a:t>
-            </a:r>
-          </a:p>
-        </p:txBody>
-      </p:sp>
-      <p:sp>
-        <p:nvSpPr>
-          <p:cNvPr id="8" name="TextBox 7"/>
-          <p:cNvSpPr txBox="1"/>
-          <p:nvPr/>
-        </p:nvSpPr>
-        <p:spPr>
-          <a:xfrm>
-            <a:off x="7132320" y="1280160"/>
-            <a:ext cx="5029200" cy="457200"/>
-          </a:xfrm>
-          <a:prstGeom prst="rect">
-            <a:avLst/>
-          </a:prstGeom>
-          <a:noFill/>
-        </p:spPr>
-        <p:txBody>
-          <a:bodyPr wrap="square" lIns="45720" rIns="45720">
-            <a:spAutoFit/>
-          </a:bodyPr>
-          <a:lstStyle/>
-          <a:p>
-            <a:pPr algn="l">
-              <a:lnSpc>
-                <a:spcPct val="115000"/>
-              </a:lnSpc>
-            </a:pPr>
-            <a:r>
-              <a:rPr sz="2000" b="0">
-                <a:solidFill>
-                  <a:srgbClr val="EA851B"/>
-                </a:solidFill>
-                <a:latin typeface="Pretendard ExtraBold"/>
-              </a:rPr>
-              <a:t>W2 예고 — Classical Baseline</a:t>
-            </a:r>
-          </a:p>
-        </p:txBody>
-      </p:sp>
-      <p:sp>
-        <p:nvSpPr>
-          <p:cNvPr id="9" name="TextBox 8"/>
-          <p:cNvSpPr txBox="1"/>
-          <p:nvPr/>
-        </p:nvSpPr>
-        <p:spPr>
-          <a:xfrm>
-            <a:off x="7132320" y="1828800"/>
-            <a:ext cx="5029200" cy="4114800"/>
-          </a:xfrm>
-          <a:prstGeom prst="rect">
-            <a:avLst/>
-          </a:prstGeom>
-          <a:noFill/>
-        </p:spPr>
-        <p:txBody>
-          <a:bodyPr wrap="square">
-            <a:spAutoFit/>
-          </a:bodyPr>
-          <a:lstStyle/>
-          <a:p>
-            <a:pPr>
-              <a:lnSpc>
-                <a:spcPct val="130000"/>
-              </a:lnSpc>
-              <a:spcAft>
-                <a:spcPts val="600"/>
-              </a:spcAft>
-            </a:pPr>
-            <a:r>
-              <a:rPr sz="1500" b="0">
-                <a:solidFill>
-                  <a:srgbClr val="EA851B"/>
-                </a:solidFill>
-                <a:latin typeface="Pretendard ExtraBold"/>
-              </a:rPr>
-              <a:t>•  </a:t>
-            </a:r>
-            <a:r>
-              <a:rPr sz="1500" b="0">
-                <a:solidFill>
-                  <a:srgbClr val="181818"/>
-                </a:solidFill>
-                <a:latin typeface="Pretendard SemiBold"/>
-              </a:rPr>
-              <a:t>scipy 기반 선형 + Cubic 정식 구현</a:t>
-            </a:r>
-          </a:p>
-          <a:p>
-            <a:pPr>
-              <a:lnSpc>
-                <a:spcPct val="130000"/>
-              </a:lnSpc>
-              <a:spcAft>
-                <a:spcPts val="600"/>
-              </a:spcAft>
-            </a:pPr>
-            <a:r>
-              <a:rPr sz="1500" b="0">
-                <a:solidFill>
-                  <a:srgbClr val="EA851B"/>
-                </a:solidFill>
-                <a:latin typeface="Pretendard ExtraBold"/>
-              </a:rPr>
-              <a:t>•  </a:t>
-            </a:r>
-            <a:r>
-              <a:rPr sz="1500" b="0">
-                <a:solidFill>
-                  <a:srgbClr val="181818"/>
-                </a:solidFill>
-                <a:latin typeface="Pretendard SemiBold"/>
-              </a:rPr>
-              <a:t>평가지표 확장 — Δφ + 표면적 + SSIM</a:t>
-            </a:r>
-          </a:p>
-          <a:p>
-            <a:pPr>
-              <a:lnSpc>
-                <a:spcPct val="130000"/>
-              </a:lnSpc>
-              <a:spcAft>
-                <a:spcPts val="600"/>
-              </a:spcAft>
-            </a:pPr>
-            <a:r>
-              <a:rPr sz="1500" b="0">
-                <a:solidFill>
-                  <a:srgbClr val="EA851B"/>
-                </a:solidFill>
-                <a:latin typeface="Pretendard ExtraBold"/>
-              </a:rPr>
-              <a:t>•  </a:t>
-            </a:r>
-            <a:r>
-              <a:rPr sz="1500" b="0">
-                <a:solidFill>
-                  <a:srgbClr val="181818"/>
-                </a:solidFill>
-                <a:latin typeface="Pretendard SemiBold"/>
-              </a:rPr>
-              <a:t>k=1,3,5 비교 표 작성</a:t>
-            </a:r>
-          </a:p>
-          <a:p>
-            <a:pPr>
-              <a:lnSpc>
-                <a:spcPct val="130000"/>
-              </a:lnSpc>
-              <a:spcAft>
-                <a:spcPts val="600"/>
-              </a:spcAft>
-            </a:pPr>
-            <a:r>
-              <a:rPr sz="1500" b="0">
-                <a:solidFill>
-                  <a:srgbClr val="EA851B"/>
-                </a:solidFill>
-                <a:latin typeface="Pretendard ExtraBold"/>
-              </a:rPr>
-              <a:t>•  </a:t>
-            </a:r>
-            <a:r>
-              <a:rPr sz="1500" b="0">
-                <a:solidFill>
-                  <a:srgbClr val="181818"/>
-                </a:solidFill>
-                <a:latin typeface="Pretendard SemiBold"/>
-              </a:rPr>
-              <a:t>본 연구의 baseline B1, B2, B3</a:t>
-            </a:r>
-          </a:p>
-          <a:p>
-            <a:pPr>
-              <a:lnSpc>
-                <a:spcPct val="130000"/>
-              </a:lnSpc>
-              <a:spcAft>
-                <a:spcPts val="600"/>
-              </a:spcAft>
-            </a:pPr>
-            <a:r>
-              <a:rPr sz="1500" b="0">
-                <a:solidFill>
-                  <a:srgbClr val="EA851B"/>
-                </a:solidFill>
-                <a:latin typeface="Pretendard ExtraBold"/>
-              </a:rPr>
-              <a:t>•  </a:t>
-            </a:r>
-            <a:r>
-              <a:rPr sz="1500" b="0">
-                <a:solidFill>
-                  <a:srgbClr val="181818"/>
-                </a:solidFill>
-                <a:latin typeface="Pretendard SemiBold"/>
-              </a:rPr>
-              <a:t>pip install scipy 확인</a:t>
+              <a:t>Q&amp;A — 막힌 부분 / 더 알고 싶은 부분 자유롭게</a:t>
             </a:r>
           </a:p>
         </p:txBody>
@@ -6577,7 +5443,7 @@
                 </a:solidFill>
                 <a:latin typeface="Pretendard Black"/>
               </a:rPr>
-              <a:t>6주 코스 한눈에 보기</a:t>
+              <a:t>신 6주 코스 한눈에 보기</a:t>
             </a:r>
           </a:p>
         </p:txBody>
@@ -6659,7 +5525,7 @@
                 </a:solidFill>
                 <a:latin typeface="Pretendard Medium"/>
               </a:rPr>
-              <a:t>Week 1 — 데이터 탐색</a:t>
+              <a:t>W1 — 데이터 + Classical · 1조 Advanced</a:t>
             </a:r>
           </a:p>
         </p:txBody>
@@ -6698,7 +5564,7 @@
                 </a:solidFill>
                 <a:latin typeface="Pretendard Medium"/>
               </a:rPr>
-              <a:t>2 / 20</a:t>
+              <a:t>2 / 15</a:t>
             </a:r>
           </a:p>
         </p:txBody>
@@ -6770,13 +5636,13 @@
               </a:lnSpc>
             </a:pPr>
             <a:r>
-              <a:rPr sz="1800" b="0">
+              <a:rPr sz="1700" b="0">
                 <a:solidFill>
                   <a:srgbClr val="181818"/>
                 </a:solidFill>
                 <a:latin typeface="Pretendard SemiBold"/>
               </a:rPr>
-              <a:t>데이터 탐색 — voxel/공극률/sparse 문제 정의</a:t>
+              <a:t>데이터 탐색 + Classical Baseline (구 W1+W2 통합)</a:t>
             </a:r>
           </a:p>
         </p:txBody>
@@ -6887,13 +5753,13 @@
               </a:lnSpc>
             </a:pPr>
             <a:r>
-              <a:rPr sz="1800" b="0">
+              <a:rPr sz="1700" b="0">
                 <a:solidFill>
                   <a:srgbClr val="181818"/>
                 </a:solidFill>
                 <a:latin typeface="Pretendard SemiBold"/>
               </a:rPr>
-              <a:t>Classical baseline — scipy 선형/Cubic 보간</a:t>
+              <a:t>Deep Learning 입문 — mini UNet 학습</a:t>
             </a:r>
           </a:p>
         </p:txBody>
@@ -7004,13 +5870,13 @@
               </a:lnSpc>
             </a:pPr>
             <a:r>
-              <a:rPr sz="1800" b="0">
+              <a:rPr sz="1700" b="0">
                 <a:solidFill>
                   <a:srgbClr val="181818"/>
                 </a:solidFill>
                 <a:latin typeface="Pretendard SemiBold"/>
               </a:rPr>
-              <a:t>2D UNet 기초 — 모델 구조 + 미니 학습</a:t>
+              <a:t>손실 함수 + HPO 입문 (Optuna)</a:t>
             </a:r>
           </a:p>
         </p:txBody>
@@ -7082,13 +5948,13 @@
               </a:lnSpc>
             </a:pPr>
             <a:r>
-              <a:rPr sz="1800" b="0">
+              <a:rPr sz="1700" b="0">
                 <a:solidFill>
                   <a:srgbClr val="181818"/>
                 </a:solidFill>
                 <a:latin typeface="Pretendard SemiBold"/>
               </a:rPr>
-              <a:t>손실 함수 — L1 · SSIM · 형태 보존</a:t>
+              <a:t>다른 아키텍처 (SwinUNet vs UNetG vs 3D)</a:t>
             </a:r>
           </a:p>
         </p:txBody>
@@ -7160,13 +6026,13 @@
               </a:lnSpc>
             </a:pPr>
             <a:r>
-              <a:rPr sz="1800" b="0">
+              <a:rPr sz="1700" b="0">
                 <a:solidFill>
                   <a:srgbClr val="181818"/>
                 </a:solidFill>
                 <a:latin typeface="Pretendard SemiBold"/>
               </a:rPr>
-              <a:t>세 방향 보간 통합 (tri-axis aggregation)</a:t>
+              <a:t>Tri-Axis Aggregation — 본 연구 핵심</a:t>
             </a:r>
           </a:p>
         </p:txBody>
@@ -7238,269 +6104,13 @@
               </a:lnSpc>
             </a:pPr>
             <a:r>
-              <a:rPr sz="1800" b="0">
+              <a:rPr sz="1700" b="0">
                 <a:solidFill>
                   <a:srgbClr val="181818"/>
                 </a:solidFill>
                 <a:latin typeface="Pretendard SemiBold"/>
               </a:rPr>
-              <a:t>평가 / 벤치마크 / 발표</a:t>
-            </a:r>
-          </a:p>
-        </p:txBody>
-      </p:sp>
-    </p:spTree>
-  </p:cSld>
-  <p:clrMapOvr>
-    <a:masterClrMapping/>
-  </p:clrMapOvr>
-</p:sld>
-</file>
-
-<file path=ppt/slides/slide20.xml><?xml version="1.0" encoding="utf-8"?>
-<p:sld xmlns:a="http://schemas.openxmlformats.org/drawingml/2006/main" xmlns:p="http://schemas.openxmlformats.org/presentationml/2006/main" xmlns:r="http://schemas.openxmlformats.org/officeDocument/2006/relationships">
-  <p:cSld>
-    <p:spTree>
-      <p:nvGrpSpPr>
-        <p:cNvPr id="1" name=""/>
-        <p:cNvGrpSpPr/>
-        <p:nvPr/>
-      </p:nvGrpSpPr>
-      <p:grpSpPr/>
-      <p:sp>
-        <p:nvSpPr>
-          <p:cNvPr id="2" name="TextBox 1"/>
-          <p:cNvSpPr txBox="1"/>
-          <p:nvPr/>
-        </p:nvSpPr>
-        <p:spPr>
-          <a:xfrm>
-            <a:off x="457200" y="320040"/>
-            <a:ext cx="11430000" cy="640080"/>
-          </a:xfrm>
-          <a:prstGeom prst="rect">
-            <a:avLst/>
-          </a:prstGeom>
-          <a:noFill/>
-        </p:spPr>
-        <p:txBody>
-          <a:bodyPr wrap="square" lIns="45720" rIns="45720">
-            <a:spAutoFit/>
-          </a:bodyPr>
-          <a:lstStyle/>
-          <a:p>
-            <a:pPr algn="l">
-              <a:lnSpc>
-                <a:spcPct val="115000"/>
-              </a:lnSpc>
-            </a:pPr>
-            <a:r>
-              <a:rPr sz="2800" b="0">
-                <a:solidFill>
-                  <a:srgbClr val="EA851B"/>
-                </a:solidFill>
-                <a:latin typeface="Pretendard Black"/>
-              </a:rPr>
-              <a:t>Q &amp; A</a:t>
-            </a:r>
-          </a:p>
-        </p:txBody>
-      </p:sp>
-      <p:sp>
-        <p:nvSpPr>
-          <p:cNvPr id="3" name="Rectangle 2"/>
-          <p:cNvSpPr/>
-          <p:nvPr/>
-        </p:nvSpPr>
-        <p:spPr>
-          <a:xfrm>
-            <a:off x="502920" y="960120"/>
-            <a:ext cx="1097280" cy="54864"/>
-          </a:xfrm>
-          <a:prstGeom prst="rect">
-            <a:avLst/>
-          </a:prstGeom>
-          <a:solidFill>
-            <a:srgbClr val="EA851B"/>
-          </a:solidFill>
-          <a:ln>
-            <a:noFill/>
-          </a:ln>
-        </p:spPr>
-        <p:style>
-          <a:lnRef idx="1">
-            <a:schemeClr val="accent1"/>
-          </a:lnRef>
-          <a:fillRef idx="3">
-            <a:schemeClr val="accent1"/>
-          </a:fillRef>
-          <a:effectRef idx="2">
-            <a:schemeClr val="accent1"/>
-          </a:effectRef>
-          <a:fontRef idx="minor">
-            <a:schemeClr val="lt1"/>
-          </a:fontRef>
-        </p:style>
-        <p:txBody>
-          <a:bodyPr rtlCol="0" anchor="ctr"/>
-          <a:lstStyle/>
-          <a:p>
-            <a:pPr algn="ctr"/>
-          </a:p>
-        </p:txBody>
-      </p:sp>
-      <p:sp>
-        <p:nvSpPr>
-          <p:cNvPr id="4" name="TextBox 3"/>
-          <p:cNvSpPr txBox="1"/>
-          <p:nvPr/>
-        </p:nvSpPr>
-        <p:spPr>
-          <a:xfrm>
-            <a:off x="365760" y="6492240"/>
-            <a:ext cx="7315200" cy="274320"/>
-          </a:xfrm>
-          <a:prstGeom prst="rect">
-            <a:avLst/>
-          </a:prstGeom>
-          <a:noFill/>
-        </p:spPr>
-        <p:txBody>
-          <a:bodyPr wrap="square" lIns="45720" rIns="45720">
-            <a:spAutoFit/>
-          </a:bodyPr>
-          <a:lstStyle/>
-          <a:p>
-            <a:pPr algn="l">
-              <a:lnSpc>
-                <a:spcPct val="115000"/>
-              </a:lnSpc>
-            </a:pPr>
-            <a:r>
-              <a:rPr sz="1000" b="0">
-                <a:solidFill>
-                  <a:srgbClr val="7A7A7A"/>
-                </a:solidFill>
-                <a:latin typeface="Pretendard Medium"/>
-              </a:rPr>
-              <a:t>Week 1 — 데이터 탐색</a:t>
-            </a:r>
-          </a:p>
-        </p:txBody>
-      </p:sp>
-      <p:sp>
-        <p:nvSpPr>
-          <p:cNvPr id="5" name="TextBox 4"/>
-          <p:cNvSpPr txBox="1"/>
-          <p:nvPr/>
-        </p:nvSpPr>
-        <p:spPr>
-          <a:xfrm>
-            <a:off x="11155680" y="6492240"/>
-            <a:ext cx="914400" cy="274320"/>
-          </a:xfrm>
-          <a:prstGeom prst="rect">
-            <a:avLst/>
-          </a:prstGeom>
-          <a:noFill/>
-        </p:spPr>
-        <p:txBody>
-          <a:bodyPr wrap="square" lIns="45720" rIns="45720">
-            <a:spAutoFit/>
-          </a:bodyPr>
-          <a:lstStyle/>
-          <a:p>
-            <a:pPr algn="r">
-              <a:lnSpc>
-                <a:spcPct val="115000"/>
-              </a:lnSpc>
-            </a:pPr>
-            <a:r>
-              <a:rPr sz="1000" b="0">
-                <a:solidFill>
-                  <a:srgbClr val="7A7A7A"/>
-                </a:solidFill>
-                <a:latin typeface="Pretendard Medium"/>
-              </a:rPr>
-              <a:t>20 / 20</a:t>
-            </a:r>
-          </a:p>
-        </p:txBody>
-      </p:sp>
-      <p:sp>
-        <p:nvSpPr>
-          <p:cNvPr id="6" name="TextBox 5"/>
-          <p:cNvSpPr txBox="1"/>
-          <p:nvPr/>
-        </p:nvSpPr>
-        <p:spPr>
-          <a:xfrm>
-            <a:off x="731520" y="2743200"/>
-            <a:ext cx="10972800" cy="914400"/>
-          </a:xfrm>
-          <a:prstGeom prst="rect">
-            <a:avLst/>
-          </a:prstGeom>
-          <a:noFill/>
-        </p:spPr>
-        <p:txBody>
-          <a:bodyPr wrap="square" lIns="45720" rIns="45720">
-            <a:spAutoFit/>
-          </a:bodyPr>
-          <a:lstStyle/>
-          <a:p>
-            <a:pPr algn="ctr">
-              <a:lnSpc>
-                <a:spcPct val="115000"/>
-              </a:lnSpc>
-            </a:pPr>
-            <a:r>
-              <a:rPr sz="2400" b="0">
-                <a:solidFill>
-                  <a:srgbClr val="181818"/>
-                </a:solidFill>
-                <a:latin typeface="Pretendard ExtraBold"/>
-              </a:rPr>
-              <a:t>오늘 막혔던 부분, 더 깊이 알고 싶은 부분을 자유롭게</a:t>
-            </a:r>
-          </a:p>
-        </p:txBody>
-      </p:sp>
-      <p:sp>
-        <p:nvSpPr>
-          <p:cNvPr id="7" name="TextBox 6"/>
-          <p:cNvSpPr txBox="1"/>
-          <p:nvPr/>
-        </p:nvSpPr>
-        <p:spPr>
-          <a:xfrm>
-            <a:off x="731520" y="3840480"/>
-            <a:ext cx="10972800" cy="640080"/>
-          </a:xfrm>
-          <a:prstGeom prst="rect">
-            <a:avLst/>
-          </a:prstGeom>
-          <a:noFill/>
-        </p:spPr>
-        <p:txBody>
-          <a:bodyPr wrap="square" lIns="45720" rIns="45720">
-            <a:spAutoFit/>
-          </a:bodyPr>
-          <a:lstStyle/>
-          <a:p>
-            <a:pPr algn="ctr">
-              <a:lnSpc>
-                <a:spcPct val="115000"/>
-              </a:lnSpc>
-            </a:pPr>
-            <a:r>
-              <a:rPr sz="1800" b="0">
-                <a:solidFill>
-                  <a:srgbClr val="EA851B"/>
-                </a:solidFill>
-                <a:latin typeface="Pretendard SemiBold"/>
-              </a:rPr>
-              <a:t>탐구 과제 4문항은 노트북 마지막에 정리되어 있습니다</a:t>
+              <a:t>Cross-domain (Carbonate) + LBM + 발표</a:t>
             </a:r>
           </a:p>
         </p:txBody>
@@ -7557,7 +6167,7 @@
                 </a:solidFill>
                 <a:latin typeface="Pretendard Black"/>
               </a:rPr>
-              <a:t>이번 주가 끝나면 할 수 있어야 하는 것</a:t>
+              <a:t>이번 주가 끝나면</a:t>
             </a:r>
           </a:p>
         </p:txBody>
@@ -7639,7 +6249,7 @@
                 </a:solidFill>
                 <a:latin typeface="Pretendard Medium"/>
               </a:rPr>
-              <a:t>Week 1 — 데이터 탐색</a:t>
+              <a:t>W1 — 데이터 + Classical · 1조 Advanced</a:t>
             </a:r>
           </a:p>
         </p:txBody>
@@ -7678,7 +6288,7 @@
                 </a:solidFill>
                 <a:latin typeface="Pretendard Medium"/>
               </a:rPr>
-              <a:t>3 / 20</a:t>
+              <a:t>3 / 15</a:t>
             </a:r>
           </a:p>
         </p:txBody>
@@ -7714,7 +6324,7 @@
               </a:spcAft>
             </a:pPr>
             <a:r>
-              <a:rPr sz="2000" b="0">
+              <a:rPr sz="1900" b="0">
                 <a:solidFill>
                   <a:srgbClr val="EA851B"/>
                 </a:solidFill>
@@ -7723,13 +6333,13 @@
               <a:t>•  </a:t>
             </a:r>
             <a:r>
-              <a:rPr sz="2000" b="0">
+              <a:rPr sz="1900" b="0">
                 <a:solidFill>
                   <a:srgbClr val="181818"/>
                 </a:solidFill>
                 <a:latin typeface="Pretendard SemiBold"/>
               </a:rPr>
-              <a:t>3D voxel 데이터를 binary 파일에서 불러오고 세 축으로 시각화한다</a:t>
+              <a:t>데이터 I/O + 전처리: .bin 로드, float 정규화, Otsu 임계값</a:t>
             </a:r>
           </a:p>
           <a:p>
@@ -7742,7 +6352,7 @@
               </a:spcAft>
             </a:pPr>
             <a:r>
-              <a:rPr sz="2000" b="0">
+              <a:rPr sz="1900" b="0">
                 <a:solidFill>
                   <a:srgbClr val="EA851B"/>
                 </a:solidFill>
@@ -7751,13 +6361,13 @@
               <a:t>•  </a:t>
             </a:r>
             <a:r>
-              <a:rPr sz="2000" b="0">
+              <a:rPr sz="1900" b="0">
                 <a:solidFill>
                   <a:srgbClr val="181818"/>
                 </a:solidFill>
                 <a:latin typeface="Pretendard SemiBold"/>
               </a:rPr>
-              <a:t>세 도메인(BB / CastleGate / Bentheimer)의 통계를 비교한다</a:t>
+              <a:t>3D voxel 시각화 — 4 도메인 비교 + 등방성 검증</a:t>
             </a:r>
           </a:p>
           <a:p>
@@ -7770,7 +6380,7 @@
               </a:spcAft>
             </a:pPr>
             <a:r>
-              <a:rPr sz="2000" b="0">
+              <a:rPr sz="1900" b="0">
                 <a:solidFill>
                   <a:srgbClr val="EA851B"/>
                 </a:solidFill>
@@ -7779,13 +6389,13 @@
               <a:t>•  </a:t>
             </a:r>
             <a:r>
-              <a:rPr sz="2000" b="0">
+              <a:rPr sz="1900" b="0">
                 <a:solidFill>
                   <a:srgbClr val="181818"/>
                 </a:solidFill>
                 <a:latin typeface="Pretendard SemiBold"/>
               </a:rPr>
-              <a:t>공극률(porosity)과 등방성(isotropy) 개념을 정량적으로 검토한다</a:t>
+              <a:t>공극률(φ) · 표면적(SA) · SSIM 세 지표로 평가</a:t>
             </a:r>
           </a:p>
           <a:p>
@@ -7798,7 +6408,7 @@
               </a:spcAft>
             </a:pPr>
             <a:r>
-              <a:rPr sz="2000" b="0">
+              <a:rPr sz="1900" b="0">
                 <a:solidFill>
                   <a:srgbClr val="EA851B"/>
                 </a:solidFill>
@@ -7807,13 +6417,13 @@
               <a:t>•  </a:t>
             </a:r>
             <a:r>
-              <a:rPr sz="2000" b="0">
+              <a:rPr sz="1900" b="0">
                 <a:solidFill>
                   <a:srgbClr val="181818"/>
                 </a:solidFill>
                 <a:latin typeface="Pretendard SemiBold"/>
               </a:rPr>
-              <a:t>Sparse 시나리오를 시뮬레이션하고 선형 보간으로 복원해본다</a:t>
+              <a:t>Sparse imaging 문제 정의 + Classical baseline (B1 Linear, B2 Cubic)</a:t>
             </a:r>
           </a:p>
           <a:p>
@@ -7826,7 +6436,7 @@
               </a:spcAft>
             </a:pPr>
             <a:r>
-              <a:rPr sz="2000" b="0">
+              <a:rPr sz="1900" b="0">
                 <a:solidFill>
                   <a:srgbClr val="EA851B"/>
                 </a:solidFill>
@@ -7835,27 +6445,68 @@
               <a:t>•  </a:t>
             </a:r>
             <a:r>
-              <a:rPr sz="2000" b="0">
+              <a:rPr sz="1900" b="0">
                 <a:solidFill>
                   <a:srgbClr val="181818"/>
                 </a:solidFill>
                 <a:latin typeface="Pretendard SemiBold"/>
               </a:rPr>
-              <a:t>sparse 정도 k와 복원 오차의 관계를 측정 → W3 이후 deep learning 동기 이해</a:t>
-            </a:r>
-          </a:p>
-        </p:txBody>
-      </p:sp>
-      <p:sp>
-        <p:nvSpPr>
-          <p:cNvPr id="7" name="TextBox 6"/>
+              <a:t>k sweep으로 "왜 deep learning이 필요한가" 정량 확인</a:t>
+            </a:r>
+          </a:p>
+        </p:txBody>
+      </p:sp>
+      <p:sp>
+        <p:nvSpPr>
+          <p:cNvPr id="7" name="Rounded Rectangle 6"/>
+          <p:cNvSpPr/>
+          <p:nvPr/>
+        </p:nvSpPr>
+        <p:spPr>
+          <a:xfrm>
+            <a:off x="731520" y="5303520"/>
+            <a:ext cx="10698480" cy="822960"/>
+          </a:xfrm>
+          <a:prstGeom prst="roundRect">
+            <a:avLst/>
+          </a:prstGeom>
+          <a:solidFill>
+            <a:srgbClr val="FAF5EE"/>
+          </a:solidFill>
+          <a:ln>
+            <a:noFill/>
+          </a:ln>
+        </p:spPr>
+        <p:style>
+          <a:lnRef idx="1">
+            <a:schemeClr val="accent1"/>
+          </a:lnRef>
+          <a:fillRef idx="3">
+            <a:schemeClr val="accent1"/>
+          </a:fillRef>
+          <a:effectRef idx="2">
+            <a:schemeClr val="accent1"/>
+          </a:effectRef>
+          <a:fontRef idx="minor">
+            <a:schemeClr val="lt1"/>
+          </a:fontRef>
+        </p:style>
+        <p:txBody>
+          <a:bodyPr rtlCol="0" anchor="ctr"/>
+          <a:lstStyle/>
+          <a:p/>
+        </p:txBody>
+      </p:sp>
+      <p:sp>
+        <p:nvSpPr>
+          <p:cNvPr id="8" name="TextBox 7"/>
           <p:cNvSpPr txBox="1"/>
           <p:nvPr/>
         </p:nvSpPr>
         <p:spPr>
           <a:xfrm>
-            <a:off x="731520" y="5212080"/>
-            <a:ext cx="10972800" cy="457200"/>
+            <a:off x="914400" y="5486400"/>
+            <a:ext cx="10332720" cy="457200"/>
           </a:xfrm>
           <a:prstGeom prst="rect">
             <a:avLst/>
@@ -7868,58 +6519,19 @@
           </a:bodyPr>
           <a:lstStyle/>
           <a:p>
-            <a:pPr algn="l">
+            <a:pPr algn="ctr">
               <a:lnSpc>
                 <a:spcPct val="115000"/>
               </a:lnSpc>
             </a:pPr>
             <a:r>
-              <a:rPr sz="1600" b="0">
+              <a:rPr sz="1800" b="0">
                 <a:solidFill>
                   <a:srgbClr val="EA851B"/>
                 </a:solidFill>
                 <a:latin typeface="Pretendard ExtraBold"/>
               </a:rPr>
-              <a:t>오늘의 한 문장</a:t>
-            </a:r>
-          </a:p>
-        </p:txBody>
-      </p:sp>
-      <p:sp>
-        <p:nvSpPr>
-          <p:cNvPr id="8" name="TextBox 7"/>
-          <p:cNvSpPr txBox="1"/>
-          <p:nvPr/>
-        </p:nvSpPr>
-        <p:spPr>
-          <a:xfrm>
-            <a:off x="731520" y="5669280"/>
-            <a:ext cx="10972800" cy="548640"/>
-          </a:xfrm>
-          <a:prstGeom prst="rect">
-            <a:avLst/>
-          </a:prstGeom>
-          <a:noFill/>
-        </p:spPr>
-        <p:txBody>
-          <a:bodyPr wrap="square" lIns="45720" rIns="45720">
-            <a:spAutoFit/>
-          </a:bodyPr>
-          <a:lstStyle/>
-          <a:p>
-            <a:pPr algn="l">
-              <a:lnSpc>
-                <a:spcPct val="115000"/>
-              </a:lnSpc>
-            </a:pPr>
-            <a:r>
-              <a:rPr sz="1800" b="0">
-                <a:solidFill>
-                  <a:srgbClr val="181818"/>
-                </a:solidFill>
-                <a:latin typeface="Pretendard SemiBold"/>
-              </a:rPr>
-              <a:t>3D 암석 데이터를 다루기 위해 먼저 그것을 '보고' '재는' 법을 익힌다.</a:t>
+              <a:t>구 W1+W2를 합쳐서 한 세션에 데이터+classical까지 다룹니다</a:t>
             </a:r>
           </a:p>
         </p:txBody>
@@ -8058,7 +6670,7 @@
                 </a:solidFill>
                 <a:latin typeface="Pretendard Medium"/>
               </a:rPr>
-              <a:t>Week 1 — 데이터 탐색</a:t>
+              <a:t>W1 — 데이터 + Classical · 1조 Advanced</a:t>
             </a:r>
           </a:p>
         </p:txBody>
@@ -8097,7 +6709,7 @@
                 </a:solidFill>
                 <a:latin typeface="Pretendard Medium"/>
               </a:rPr>
-              <a:t>4 / 20</a:t>
+              <a:t>4 / 15</a:t>
             </a:r>
           </a:p>
         </p:txBody>
@@ -8171,13 +6783,13 @@
               </a:lnSpc>
             </a:pPr>
             <a:r>
-              <a:rPr sz="2000" b="0">
+              <a:rPr sz="1800" b="0">
                 <a:solidFill>
                   <a:srgbClr val="EA851B"/>
                 </a:solidFill>
                 <a:latin typeface="Pretendard ExtraBold"/>
               </a:rPr>
-              <a:t>"직접 코드를 짜기보다, 배포된 함수의 파라미터를 바꿔보며 결과 변화를 관찰한다"</a:t>
+              <a:t>코드를 직접 짜기보다, 배포된 함수의 인자를 바꿔보며 결과 변화를 관찰</a:t>
             </a:r>
           </a:p>
         </p:txBody>
@@ -8228,7 +6840,7 @@
                 </a:solidFill>
                 <a:latin typeface="Pretendard SemiBold"/>
               </a:rPr>
-              <a:t>[Try-it!]  박스 — 셀의 변수 값을 바꿔보고 차이를 눈으로 관찰</a:t>
+              <a:t>[Try-it!] 박스 — 변수 값을 바꿔보고 차이 관찰</a:t>
             </a:r>
           </a:p>
           <a:p>
@@ -8256,7 +6868,7 @@
                 </a:solidFill>
                 <a:latin typeface="Pretendard SemiBold"/>
               </a:rPr>
-              <a:t>[해석 질문]  박스 — 결과를 자신의 말로 설명하는 연습</a:t>
+              <a:t>[해석 질문] — 결과를 자신의 말로 답</a:t>
             </a:r>
           </a:p>
           <a:p>
@@ -8284,7 +6896,7 @@
                 </a:solidFill>
                 <a:latin typeface="Pretendard SemiBold"/>
               </a:rPr>
-              <a:t>탐구 과제 — 노트북 안에서 코드를 수정하면서 답을 만들기</a:t>
+              <a:t>[심화] — 추가 분석 트랙</a:t>
             </a:r>
           </a:p>
           <a:p>
@@ -8312,7 +6924,7 @@
                 </a:solidFill>
                 <a:latin typeface="Pretendard SemiBold"/>
               </a:rPr>
-              <a:t>6주 동안 동일한 helper 모듈(dr_utils.py)을 계속 확장</a:t>
+              <a:t>탐구 과제 — 노트북 안에서 코드 수정하며 답 만들기</a:t>
             </a:r>
           </a:p>
         </p:txBody>
@@ -8449,7 +7061,7 @@
                 </a:solidFill>
                 <a:latin typeface="Pretendard Black"/>
               </a:rPr>
-              <a:t>Digital Rock 데이터</a:t>
+              <a:t>데이터 + 전처리</a:t>
             </a:r>
           </a:p>
         </p:txBody>
@@ -8488,7 +7100,7 @@
                 </a:solidFill>
                 <a:latin typeface="Pretendard Medium"/>
               </a:rPr>
-              <a:t>Week 1 — 데이터 탐색</a:t>
+              <a:t>W1 — 데이터 + Classical · 1조 Advanced</a:t>
             </a:r>
           </a:p>
         </p:txBody>
@@ -8527,7 +7139,7 @@
                 </a:solidFill>
                 <a:latin typeface="Pretendard Medium"/>
               </a:rPr>
-              <a:t>5 / 20</a:t>
+              <a:t>5 / 15</a:t>
             </a:r>
           </a:p>
         </p:txBody>
@@ -8584,7 +7196,7 @@
                 </a:solidFill>
                 <a:latin typeface="Pretendard Black"/>
               </a:rPr>
-              <a:t>1.1  Digital Rock이란?</a:t>
+              <a:t>1.1  Voxel vs Pixel</a:t>
             </a:r>
           </a:p>
         </p:txBody>
@@ -8666,7 +7278,7 @@
                 </a:solidFill>
                 <a:latin typeface="Pretendard Medium"/>
               </a:rPr>
-              <a:t>Week 1 — 데이터 탐색</a:t>
+              <a:t>W1 — 데이터 + Classical · 1조 Advanced</a:t>
             </a:r>
           </a:p>
         </p:txBody>
@@ -8705,7 +7317,7 @@
                 </a:solidFill>
                 <a:latin typeface="Pretendard Medium"/>
               </a:rPr>
-              <a:t>6 / 20</a:t>
+              <a:t>6 / 15</a:t>
             </a:r>
           </a:p>
         </p:txBody>
@@ -8718,8 +7330,8 @@
         </p:nvSpPr>
         <p:spPr>
           <a:xfrm>
-            <a:off x="731520" y="1325880"/>
-            <a:ext cx="10972800" cy="548640"/>
+            <a:off x="548640" y="1463040"/>
+            <a:ext cx="5486400" cy="457200"/>
           </a:xfrm>
           <a:prstGeom prst="rect">
             <a:avLst/>
@@ -8738,13 +7350,13 @@
               </a:lnSpc>
             </a:pPr>
             <a:r>
-              <a:rPr sz="2000" b="0">
+              <a:rPr sz="2200" b="0">
                 <a:solidFill>
                   <a:srgbClr val="EA851B"/>
                 </a:solidFill>
-                <a:latin typeface="Pretendard ExtraBold"/>
-              </a:rPr>
-              <a:t>실제 암석 시료 → micro-CT 스캔 → 3D 디지털 부피 이미지</a:t>
+                <a:latin typeface="Pretendard Black"/>
+              </a:rPr>
+              <a:t>2D 이미지 (Pixel)</a:t>
             </a:r>
           </a:p>
         </p:txBody>
@@ -8757,8 +7369,8 @@
         </p:nvSpPr>
         <p:spPr>
           <a:xfrm>
-            <a:off x="731520" y="2103120"/>
-            <a:ext cx="10972800" cy="3200400"/>
+            <a:off x="548640" y="2011680"/>
+            <a:ext cx="5486400" cy="4572000"/>
           </a:xfrm>
           <a:prstGeom prst="rect">
             <a:avLst/>
@@ -8780,7 +7392,7 @@
               </a:spcAft>
             </a:pPr>
             <a:r>
-              <a:rPr sz="1900" b="0">
+              <a:rPr sz="1800" b="0">
                 <a:solidFill>
                   <a:srgbClr val="EA851B"/>
                 </a:solidFill>
@@ -8789,13 +7401,13 @@
               <a:t>•  </a:t>
             </a:r>
             <a:r>
-              <a:rPr sz="1900" b="0">
+              <a:rPr sz="1800" b="0">
                 <a:solidFill>
                   <a:srgbClr val="181818"/>
                 </a:solidFill>
                 <a:latin typeface="Pretendard SemiBold"/>
               </a:rPr>
-              <a:t>Micro-CT (Micro Computed Tomography): X-ray로 여러 각도 촬영 → 3D 재구성</a:t>
+              <a:t>Pixel = Picture Element</a:t>
             </a:r>
           </a:p>
           <a:p>
@@ -8808,7 +7420,7 @@
               </a:spcAft>
             </a:pPr>
             <a:r>
-              <a:rPr sz="1900" b="0">
+              <a:rPr sz="1800" b="0">
                 <a:solidFill>
                   <a:srgbClr val="EA851B"/>
                 </a:solidFill>
@@ -8817,13 +7429,13 @@
               <a:t>•  </a:t>
             </a:r>
             <a:r>
-              <a:rPr sz="1900" b="0">
+              <a:rPr sz="1800" b="0">
                 <a:solidFill>
                   <a:srgbClr val="181818"/>
                 </a:solidFill>
                 <a:latin typeface="Pretendard SemiBold"/>
               </a:rPr>
-              <a:t>암석을 깨뜨리지 않고 내부 공극(pore) 구조를 voxel 격자로 확보</a:t>
+              <a:t>2차원 격자 (높이 × 너비)</a:t>
             </a:r>
           </a:p>
           <a:p>
@@ -8836,7 +7448,7 @@
               </a:spcAft>
             </a:pPr>
             <a:r>
-              <a:rPr sz="1900" b="0">
+              <a:rPr sz="1800" b="0">
                 <a:solidFill>
                   <a:srgbClr val="EA851B"/>
                 </a:solidFill>
@@ -8845,15 +7457,77 @@
               <a:t>•  </a:t>
             </a:r>
             <a:r>
-              <a:rPr sz="1900" b="0">
+              <a:rPr sz="1800" b="0">
                 <a:solidFill>
                   <a:srgbClr val="181818"/>
                 </a:solidFill>
                 <a:latin typeface="Pretendard SemiBold"/>
               </a:rPr>
-              <a:t>디지털 부피 위에서 시뮬레이션 가능: 유체 흐름, 공극률, 투과성</a:t>
-            </a:r>
-          </a:p>
+              <a:t>numpy: img[y, x]</a:t>
+            </a:r>
+          </a:p>
+        </p:txBody>
+      </p:sp>
+      <p:sp>
+        <p:nvSpPr>
+          <p:cNvPr id="8" name="TextBox 7"/>
+          <p:cNvSpPr txBox="1"/>
+          <p:nvPr/>
+        </p:nvSpPr>
+        <p:spPr>
+          <a:xfrm>
+            <a:off x="6400800" y="1463040"/>
+            <a:ext cx="5486400" cy="457200"/>
+          </a:xfrm>
+          <a:prstGeom prst="rect">
+            <a:avLst/>
+          </a:prstGeom>
+          <a:noFill/>
+        </p:spPr>
+        <p:txBody>
+          <a:bodyPr wrap="square" lIns="45720" rIns="45720">
+            <a:spAutoFit/>
+          </a:bodyPr>
+          <a:lstStyle/>
+          <a:p>
+            <a:pPr algn="l">
+              <a:lnSpc>
+                <a:spcPct val="115000"/>
+              </a:lnSpc>
+            </a:pPr>
+            <a:r>
+              <a:rPr sz="2200" b="0">
+                <a:solidFill>
+                  <a:srgbClr val="EA851B"/>
+                </a:solidFill>
+                <a:latin typeface="Pretendard Black"/>
+              </a:rPr>
+              <a:t>3D 부피 (Voxel)</a:t>
+            </a:r>
+          </a:p>
+        </p:txBody>
+      </p:sp>
+      <p:sp>
+        <p:nvSpPr>
+          <p:cNvPr id="9" name="TextBox 8"/>
+          <p:cNvSpPr txBox="1"/>
+          <p:nvPr/>
+        </p:nvSpPr>
+        <p:spPr>
+          <a:xfrm>
+            <a:off x="6400800" y="2011680"/>
+            <a:ext cx="5486400" cy="4572000"/>
+          </a:xfrm>
+          <a:prstGeom prst="rect">
+            <a:avLst/>
+          </a:prstGeom>
+          <a:noFill/>
+        </p:spPr>
+        <p:txBody>
+          <a:bodyPr wrap="square">
+            <a:spAutoFit/>
+          </a:bodyPr>
+          <a:lstStyle/>
           <a:p>
             <a:pPr>
               <a:lnSpc>
@@ -8864,7 +7538,7 @@
               </a:spcAft>
             </a:pPr>
             <a:r>
-              <a:rPr sz="1900" b="0">
+              <a:rPr sz="1800" b="0">
                 <a:solidFill>
                   <a:srgbClr val="EA851B"/>
                 </a:solidFill>
@@ -8873,27 +7547,124 @@
               <a:t>•  </a:t>
             </a:r>
             <a:r>
-              <a:rPr sz="1900" b="0">
+              <a:rPr sz="1800" b="0">
                 <a:solidFill>
                   <a:srgbClr val="181818"/>
                 </a:solidFill>
                 <a:latin typeface="Pretendard SemiBold"/>
               </a:rPr>
-              <a:t>응용: 석유/가스 탐사, 지하수, 이산화탄소(CO₂) 저장, 지반공학</a:t>
-            </a:r>
-          </a:p>
-        </p:txBody>
-      </p:sp>
-      <p:sp>
-        <p:nvSpPr>
-          <p:cNvPr id="8" name="TextBox 7"/>
+              <a:t>Voxel = Volume Element</a:t>
+            </a:r>
+          </a:p>
+          <a:p>
+            <a:pPr>
+              <a:lnSpc>
+                <a:spcPct val="130000"/>
+              </a:lnSpc>
+              <a:spcAft>
+                <a:spcPts val="600"/>
+              </a:spcAft>
+            </a:pPr>
+            <a:r>
+              <a:rPr sz="1800" b="0">
+                <a:solidFill>
+                  <a:srgbClr val="EA851B"/>
+                </a:solidFill>
+                <a:latin typeface="Pretendard ExtraBold"/>
+              </a:rPr>
+              <a:t>•  </a:t>
+            </a:r>
+            <a:r>
+              <a:rPr sz="1800" b="0">
+                <a:solidFill>
+                  <a:srgbClr val="181818"/>
+                </a:solidFill>
+                <a:latin typeface="Pretendard SemiBold"/>
+              </a:rPr>
+              <a:t>3차원 (Z × Y × X), 본 W1: 256×256×256</a:t>
+            </a:r>
+          </a:p>
+          <a:p>
+            <a:pPr>
+              <a:lnSpc>
+                <a:spcPct val="130000"/>
+              </a:lnSpc>
+              <a:spcAft>
+                <a:spcPts val="600"/>
+              </a:spcAft>
+            </a:pPr>
+            <a:r>
+              <a:rPr sz="1800" b="0">
+                <a:solidFill>
+                  <a:srgbClr val="EA851B"/>
+                </a:solidFill>
+                <a:latin typeface="Pretendard ExtraBold"/>
+              </a:rPr>
+              <a:t>•  </a:t>
+            </a:r>
+            <a:r>
+              <a:rPr sz="1800" b="0">
+                <a:solidFill>
+                  <a:srgbClr val="181818"/>
+                </a:solidFill>
+                <a:latin typeface="Pretendard SemiBold"/>
+              </a:rPr>
+              <a:t>numpy: vol[z, y, x]</a:t>
+            </a:r>
+          </a:p>
+        </p:txBody>
+      </p:sp>
+      <p:sp>
+        <p:nvSpPr>
+          <p:cNvPr id="10" name="Rounded Rectangle 9"/>
+          <p:cNvSpPr/>
+          <p:nvPr/>
+        </p:nvSpPr>
+        <p:spPr>
+          <a:xfrm>
+            <a:off x="731520" y="5212080"/>
+            <a:ext cx="10698480" cy="914400"/>
+          </a:xfrm>
+          <a:prstGeom prst="roundRect">
+            <a:avLst/>
+          </a:prstGeom>
+          <a:solidFill>
+            <a:srgbClr val="FAF5EE"/>
+          </a:solidFill>
+          <a:ln>
+            <a:noFill/>
+          </a:ln>
+        </p:spPr>
+        <p:style>
+          <a:lnRef idx="1">
+            <a:schemeClr val="accent1"/>
+          </a:lnRef>
+          <a:fillRef idx="3">
+            <a:schemeClr val="accent1"/>
+          </a:fillRef>
+          <a:effectRef idx="2">
+            <a:schemeClr val="accent1"/>
+          </a:effectRef>
+          <a:fontRef idx="minor">
+            <a:schemeClr val="lt1"/>
+          </a:fontRef>
+        </p:style>
+        <p:txBody>
+          <a:bodyPr rtlCol="0" anchor="ctr"/>
+          <a:lstStyle/>
+          <a:p/>
+        </p:txBody>
+      </p:sp>
+      <p:sp>
+        <p:nvSpPr>
+          <p:cNvPr id="11" name="TextBox 10"/>
           <p:cNvSpPr txBox="1"/>
           <p:nvPr/>
         </p:nvSpPr>
         <p:spPr>
           <a:xfrm>
-            <a:off x="731520" y="5486400"/>
-            <a:ext cx="10972800" cy="548640"/>
+            <a:off x="914400" y="5440680"/>
+            <a:ext cx="10332720" cy="457200"/>
           </a:xfrm>
           <a:prstGeom prst="rect">
             <a:avLst/>
@@ -8906,19 +7677,19 @@
           </a:bodyPr>
           <a:lstStyle/>
           <a:p>
-            <a:pPr algn="l">
+            <a:pPr algn="ctr">
               <a:lnSpc>
                 <a:spcPct val="115000"/>
               </a:lnSpc>
             </a:pPr>
             <a:r>
-              <a:rPr sz="1700" b="0">
+              <a:rPr sz="1800" b="0">
                 <a:solidFill>
                   <a:srgbClr val="EA851B"/>
                 </a:solidFill>
                 <a:latin typeface="Pretendard ExtraBold"/>
               </a:rPr>
-              <a:t>"실험실의 rock physics 실험을 컴퓨터 안에서 한다" → 시간/비용 절감</a:t>
+              <a:t>한 voxel 한 변 = 2.25 μm</a:t>
             </a:r>
           </a:p>
         </p:txBody>
@@ -8975,7 +7746,7 @@
                 </a:solidFill>
                 <a:latin typeface="Pretendard Black"/>
               </a:rPr>
-              <a:t>1.2  Voxel vs Pixel — 3차원으로의 확장</a:t>
+              <a:t>1.2  4 도메인 비교 — 같은 z=128 슬라이스</a:t>
             </a:r>
           </a:p>
         </p:txBody>
@@ -9057,7 +7828,7 @@
                 </a:solidFill>
                 <a:latin typeface="Pretendard Medium"/>
               </a:rPr>
-              <a:t>Week 1 — 데이터 탐색</a:t>
+              <a:t>W1 — 데이터 + Classical · 1조 Advanced</a:t>
             </a:r>
           </a:p>
         </p:txBody>
@@ -9096,21 +7867,45 @@
                 </a:solidFill>
                 <a:latin typeface="Pretendard Medium"/>
               </a:rPr>
-              <a:t>7 / 20</a:t>
-            </a:r>
-          </a:p>
-        </p:txBody>
-      </p:sp>
-      <p:sp>
-        <p:nvSpPr>
-          <p:cNvPr id="6" name="TextBox 5"/>
+              <a:t>7 / 15</a:t>
+            </a:r>
+          </a:p>
+        </p:txBody>
+      </p:sp>
+      <p:pic>
+        <p:nvPicPr>
+          <p:cNvPr id="6" name="Picture 5" descr="fig1_domains.png"/>
+          <p:cNvPicPr>
+            <a:picLocks noChangeAspect="1"/>
+          </p:cNvPicPr>
+          <p:nvPr/>
+        </p:nvPicPr>
+        <p:blipFill>
+          <a:blip r:embed="rId2"/>
+          <a:stretch>
+            <a:fillRect/>
+          </a:stretch>
+        </p:blipFill>
+        <p:spPr>
+          <a:xfrm>
+            <a:off x="274320" y="1280160"/>
+            <a:ext cx="11612880" cy="3104728"/>
+          </a:xfrm>
+          <a:prstGeom prst="rect">
+            <a:avLst/>
+          </a:prstGeom>
+        </p:spPr>
+      </p:pic>
+      <p:sp>
+        <p:nvSpPr>
+          <p:cNvPr id="7" name="TextBox 6"/>
           <p:cNvSpPr txBox="1"/>
           <p:nvPr/>
         </p:nvSpPr>
         <p:spPr>
           <a:xfrm>
-            <a:off x="548640" y="1463040"/>
-            <a:ext cx="5486400" cy="457200"/>
+            <a:off x="731520" y="5486400"/>
+            <a:ext cx="10972800" cy="457200"/>
           </a:xfrm>
           <a:prstGeom prst="rect">
             <a:avLst/>
@@ -9129,374 +7924,13 @@
               </a:lnSpc>
             </a:pPr>
             <a:r>
-              <a:rPr sz="2200" b="0">
+              <a:rPr sz="1500" b="0">
                 <a:solidFill>
                   <a:srgbClr val="EA851B"/>
                 </a:solidFill>
-                <a:latin typeface="Pretendard Black"/>
-              </a:rPr>
-              <a:t>2D 이미지</a:t>
-            </a:r>
-          </a:p>
-        </p:txBody>
-      </p:sp>
-      <p:sp>
-        <p:nvSpPr>
-          <p:cNvPr id="7" name="TextBox 6"/>
-          <p:cNvSpPr txBox="1"/>
-          <p:nvPr/>
-        </p:nvSpPr>
-        <p:spPr>
-          <a:xfrm>
-            <a:off x="548640" y="2011680"/>
-            <a:ext cx="5486400" cy="4572000"/>
-          </a:xfrm>
-          <a:prstGeom prst="rect">
-            <a:avLst/>
-          </a:prstGeom>
-          <a:noFill/>
-        </p:spPr>
-        <p:txBody>
-          <a:bodyPr wrap="square">
-            <a:spAutoFit/>
-          </a:bodyPr>
-          <a:lstStyle/>
-          <a:p>
-            <a:pPr>
-              <a:lnSpc>
-                <a:spcPct val="130000"/>
-              </a:lnSpc>
-              <a:spcAft>
-                <a:spcPts val="600"/>
-              </a:spcAft>
-            </a:pPr>
-            <a:r>
-              <a:rPr sz="1800" b="0">
-                <a:solidFill>
-                  <a:srgbClr val="EA851B"/>
-                </a:solidFill>
                 <a:latin typeface="Pretendard ExtraBold"/>
               </a:rPr>
-              <a:t>•  </a:t>
-            </a:r>
-            <a:r>
-              <a:rPr sz="1800" b="0">
-                <a:solidFill>
-                  <a:srgbClr val="181818"/>
-                </a:solidFill>
-                <a:latin typeface="Pretendard SemiBold"/>
-              </a:rPr>
-              <a:t>Pixel (Picture Element) 격자</a:t>
-            </a:r>
-          </a:p>
-          <a:p>
-            <a:pPr>
-              <a:lnSpc>
-                <a:spcPct val="130000"/>
-              </a:lnSpc>
-              <a:spcAft>
-                <a:spcPts val="600"/>
-              </a:spcAft>
-            </a:pPr>
-            <a:r>
-              <a:rPr sz="1800" b="0">
-                <a:solidFill>
-                  <a:srgbClr val="EA851B"/>
-                </a:solidFill>
-                <a:latin typeface="Pretendard ExtraBold"/>
-              </a:rPr>
-              <a:t>•  </a:t>
-            </a:r>
-            <a:r>
-              <a:rPr sz="1800" b="0">
-                <a:solidFill>
-                  <a:srgbClr val="181818"/>
-                </a:solidFill>
-                <a:latin typeface="Pretendard SemiBold"/>
-              </a:rPr>
-              <a:t>shape = (높이, 너비)</a:t>
-            </a:r>
-          </a:p>
-          <a:p>
-            <a:pPr>
-              <a:lnSpc>
-                <a:spcPct val="130000"/>
-              </a:lnSpc>
-              <a:spcAft>
-                <a:spcPts val="600"/>
-              </a:spcAft>
-            </a:pPr>
-            <a:r>
-              <a:rPr sz="1800" b="0">
-                <a:solidFill>
-                  <a:srgbClr val="EA851B"/>
-                </a:solidFill>
-                <a:latin typeface="Pretendard ExtraBold"/>
-              </a:rPr>
-              <a:t>•  </a:t>
-            </a:r>
-            <a:r>
-              <a:rPr sz="1800" b="0">
-                <a:solidFill>
-                  <a:srgbClr val="181818"/>
-                </a:solidFill>
-                <a:latin typeface="Pretendard SemiBold"/>
-              </a:rPr>
-              <a:t>numpy: img[y, x]</a:t>
-            </a:r>
-          </a:p>
-        </p:txBody>
-      </p:sp>
-      <p:sp>
-        <p:nvSpPr>
-          <p:cNvPr id="8" name="TextBox 7"/>
-          <p:cNvSpPr txBox="1"/>
-          <p:nvPr/>
-        </p:nvSpPr>
-        <p:spPr>
-          <a:xfrm>
-            <a:off x="6400800" y="1463040"/>
-            <a:ext cx="5486400" cy="457200"/>
-          </a:xfrm>
-          <a:prstGeom prst="rect">
-            <a:avLst/>
-          </a:prstGeom>
-          <a:noFill/>
-        </p:spPr>
-        <p:txBody>
-          <a:bodyPr wrap="square" lIns="45720" rIns="45720">
-            <a:spAutoFit/>
-          </a:bodyPr>
-          <a:lstStyle/>
-          <a:p>
-            <a:pPr algn="l">
-              <a:lnSpc>
-                <a:spcPct val="115000"/>
-              </a:lnSpc>
-            </a:pPr>
-            <a:r>
-              <a:rPr sz="2200" b="0">
-                <a:solidFill>
-                  <a:srgbClr val="EA851B"/>
-                </a:solidFill>
-                <a:latin typeface="Pretendard Black"/>
-              </a:rPr>
-              <a:t>3D 부피</a:t>
-            </a:r>
-          </a:p>
-        </p:txBody>
-      </p:sp>
-      <p:sp>
-        <p:nvSpPr>
-          <p:cNvPr id="9" name="TextBox 8"/>
-          <p:cNvSpPr txBox="1"/>
-          <p:nvPr/>
-        </p:nvSpPr>
-        <p:spPr>
-          <a:xfrm>
-            <a:off x="6400800" y="2011680"/>
-            <a:ext cx="5486400" cy="4572000"/>
-          </a:xfrm>
-          <a:prstGeom prst="rect">
-            <a:avLst/>
-          </a:prstGeom>
-          <a:noFill/>
-        </p:spPr>
-        <p:txBody>
-          <a:bodyPr wrap="square">
-            <a:spAutoFit/>
-          </a:bodyPr>
-          <a:lstStyle/>
-          <a:p>
-            <a:pPr>
-              <a:lnSpc>
-                <a:spcPct val="130000"/>
-              </a:lnSpc>
-              <a:spcAft>
-                <a:spcPts val="600"/>
-              </a:spcAft>
-            </a:pPr>
-            <a:r>
-              <a:rPr sz="1800" b="0">
-                <a:solidFill>
-                  <a:srgbClr val="EA851B"/>
-                </a:solidFill>
-                <a:latin typeface="Pretendard ExtraBold"/>
-              </a:rPr>
-              <a:t>•  </a:t>
-            </a:r>
-            <a:r>
-              <a:rPr sz="1800" b="0">
-                <a:solidFill>
-                  <a:srgbClr val="181818"/>
-                </a:solidFill>
-                <a:latin typeface="Pretendard SemiBold"/>
-              </a:rPr>
-              <a:t>Voxel (Volume Element) 격자</a:t>
-            </a:r>
-          </a:p>
-          <a:p>
-            <a:pPr>
-              <a:lnSpc>
-                <a:spcPct val="130000"/>
-              </a:lnSpc>
-              <a:spcAft>
-                <a:spcPts val="600"/>
-              </a:spcAft>
-            </a:pPr>
-            <a:r>
-              <a:rPr sz="1800" b="0">
-                <a:solidFill>
-                  <a:srgbClr val="EA851B"/>
-                </a:solidFill>
-                <a:latin typeface="Pretendard ExtraBold"/>
-              </a:rPr>
-              <a:t>•  </a:t>
-            </a:r>
-            <a:r>
-              <a:rPr sz="1800" b="0">
-                <a:solidFill>
-                  <a:srgbClr val="181818"/>
-                </a:solidFill>
-                <a:latin typeface="Pretendard SemiBold"/>
-              </a:rPr>
-              <a:t>shape = (Z, Y, X) — 본 W1: (256,256,256)</a:t>
-            </a:r>
-          </a:p>
-          <a:p>
-            <a:pPr>
-              <a:lnSpc>
-                <a:spcPct val="130000"/>
-              </a:lnSpc>
-              <a:spcAft>
-                <a:spcPts val="600"/>
-              </a:spcAft>
-            </a:pPr>
-            <a:r>
-              <a:rPr sz="1800" b="0">
-                <a:solidFill>
-                  <a:srgbClr val="EA851B"/>
-                </a:solidFill>
-                <a:latin typeface="Pretendard ExtraBold"/>
-              </a:rPr>
-              <a:t>•  </a:t>
-            </a:r>
-            <a:r>
-              <a:rPr sz="1800" b="0">
-                <a:solidFill>
-                  <a:srgbClr val="181818"/>
-                </a:solidFill>
-                <a:latin typeface="Pretendard SemiBold"/>
-              </a:rPr>
-              <a:t>numpy: vol[z, y, x]</a:t>
-            </a:r>
-          </a:p>
-          <a:p>
-            <a:pPr>
-              <a:lnSpc>
-                <a:spcPct val="130000"/>
-              </a:lnSpc>
-              <a:spcAft>
-                <a:spcPts val="600"/>
-              </a:spcAft>
-            </a:pPr>
-            <a:r>
-              <a:rPr sz="1800" b="0">
-                <a:solidFill>
-                  <a:srgbClr val="EA851B"/>
-                </a:solidFill>
-                <a:latin typeface="Pretendard ExtraBold"/>
-              </a:rPr>
-              <a:t>•  </a:t>
-            </a:r>
-            <a:r>
-              <a:rPr sz="1800" b="0">
-                <a:solidFill>
-                  <a:srgbClr val="181818"/>
-                </a:solidFill>
-                <a:latin typeface="Pretendard SemiBold"/>
-              </a:rPr>
-              <a:t>한 voxel = 2.25 μm³</a:t>
-            </a:r>
-          </a:p>
-        </p:txBody>
-      </p:sp>
-      <p:sp>
-        <p:nvSpPr>
-          <p:cNvPr id="10" name="Rounded Rectangle 9"/>
-          <p:cNvSpPr/>
-          <p:nvPr/>
-        </p:nvSpPr>
-        <p:spPr>
-          <a:xfrm>
-            <a:off x="731520" y="5212080"/>
-            <a:ext cx="10698480" cy="914400"/>
-          </a:xfrm>
-          <a:prstGeom prst="roundRect">
-            <a:avLst/>
-          </a:prstGeom>
-          <a:solidFill>
-            <a:srgbClr val="FAF5EE"/>
-          </a:solidFill>
-          <a:ln>
-            <a:noFill/>
-          </a:ln>
-        </p:spPr>
-        <p:style>
-          <a:lnRef idx="1">
-            <a:schemeClr val="accent1"/>
-          </a:lnRef>
-          <a:fillRef idx="3">
-            <a:schemeClr val="accent1"/>
-          </a:fillRef>
-          <a:effectRef idx="2">
-            <a:schemeClr val="accent1"/>
-          </a:effectRef>
-          <a:fontRef idx="minor">
-            <a:schemeClr val="lt1"/>
-          </a:fontRef>
-        </p:style>
-        <p:txBody>
-          <a:bodyPr rtlCol="0" anchor="ctr"/>
-          <a:lstStyle/>
-          <a:p/>
-        </p:txBody>
-      </p:sp>
-      <p:sp>
-        <p:nvSpPr>
-          <p:cNvPr id="11" name="TextBox 10"/>
-          <p:cNvSpPr txBox="1"/>
-          <p:nvPr/>
-        </p:nvSpPr>
-        <p:spPr>
-          <a:xfrm>
-            <a:off x="914400" y="5440680"/>
-            <a:ext cx="10332720" cy="457200"/>
-          </a:xfrm>
-          <a:prstGeom prst="rect">
-            <a:avLst/>
-          </a:prstGeom>
-          <a:noFill/>
-        </p:spPr>
-        <p:txBody>
-          <a:bodyPr wrap="square" lIns="45720" rIns="45720">
-            <a:spAutoFit/>
-          </a:bodyPr>
-          <a:lstStyle/>
-          <a:p>
-            <a:pPr algn="ctr">
-              <a:lnSpc>
-                <a:spcPct val="115000"/>
-              </a:lnSpc>
-            </a:pPr>
-            <a:r>
-              <a:rPr sz="1800" b="0">
-                <a:solidFill>
-                  <a:srgbClr val="EA851B"/>
-                </a:solidFill>
-                <a:latin typeface="Pretendard ExtraBold"/>
-              </a:rPr>
-              <a:t>numpy 트릭:  vol[z, :, :] = z번째 슬라이스 (= 한 장의 2D 이미지)</a:t>
+              <a:t>도메인마다 공극률·구조가 분명히 다름 → W6 cross-domain 평가의 motivation</a:t>
             </a:r>
           </a:p>
         </p:txBody>
@@ -9553,7 +7987,7 @@
                 </a:solidFill>
                 <a:latin typeface="Pretendard Black"/>
               </a:rPr>
-              <a:t>1.3  세 도메인 동시 비교 — 같은 z=128 슬라이스</a:t>
+              <a:t>1.3  같은 부피, 세 축 슬라이스</a:t>
             </a:r>
           </a:p>
         </p:txBody>
@@ -9635,7 +8069,7 @@
                 </a:solidFill>
                 <a:latin typeface="Pretendard Medium"/>
               </a:rPr>
-              <a:t>Week 1 — 데이터 탐색</a:t>
+              <a:t>W1 — 데이터 + Classical · 1조 Advanced</a:t>
             </a:r>
           </a:p>
         </p:txBody>
@@ -9674,14 +8108,14 @@
                 </a:solidFill>
                 <a:latin typeface="Pretendard Medium"/>
               </a:rPr>
-              <a:t>8 / 20</a:t>
+              <a:t>8 / 15</a:t>
             </a:r>
           </a:p>
         </p:txBody>
       </p:sp>
       <p:pic>
         <p:nvPicPr>
-          <p:cNvPr id="6" name="Picture 5" descr="fig1_three_domains.png"/>
+          <p:cNvPr id="6" name="Picture 5" descr="fig2_three_axes.png"/>
           <p:cNvPicPr>
             <a:picLocks noChangeAspect="1"/>
           </p:cNvPicPr>
@@ -9695,8 +8129,8 @@
         </p:blipFill>
         <p:spPr>
           <a:xfrm>
-            <a:off x="457200" y="1371600"/>
-            <a:ext cx="11247120" cy="4000454"/>
+            <a:off x="457200" y="1280160"/>
+            <a:ext cx="11247120" cy="4004712"/>
           </a:xfrm>
           <a:prstGeom prst="rect">
             <a:avLst/>
@@ -9711,7 +8145,7 @@
         </p:nvSpPr>
         <p:spPr>
           <a:xfrm>
-            <a:off x="731520" y="5577840"/>
+            <a:off x="731520" y="5486400"/>
             <a:ext cx="10972800" cy="457200"/>
           </a:xfrm>
           <a:prstGeom prst="rect">
@@ -9731,52 +8165,13 @@
               </a:lnSpc>
             </a:pPr>
             <a:r>
-              <a:rPr sz="1600" b="0">
-                <a:solidFill>
-                  <a:srgbClr val="181818"/>
-                </a:solidFill>
-                <a:latin typeface="Pretendard SemiBold"/>
-              </a:rPr>
-              <a:t>관찰: 세 사암은 비슷한 패턴이지만 공극 비율과 모양이 분명히 다르다.</a:t>
-            </a:r>
-          </a:p>
-        </p:txBody>
-      </p:sp>
-      <p:sp>
-        <p:nvSpPr>
-          <p:cNvPr id="8" name="TextBox 7"/>
-          <p:cNvSpPr txBox="1"/>
-          <p:nvPr/>
-        </p:nvSpPr>
-        <p:spPr>
-          <a:xfrm>
-            <a:off x="731520" y="6035040"/>
-            <a:ext cx="10972800" cy="457200"/>
-          </a:xfrm>
-          <a:prstGeom prst="rect">
-            <a:avLst/>
-          </a:prstGeom>
-          <a:noFill/>
-        </p:spPr>
-        <p:txBody>
-          <a:bodyPr wrap="square" lIns="45720" rIns="45720">
-            <a:spAutoFit/>
-          </a:bodyPr>
-          <a:lstStyle/>
-          <a:p>
-            <a:pPr algn="l">
-              <a:lnSpc>
-                <a:spcPct val="115000"/>
-              </a:lnSpc>
-            </a:pPr>
-            <a:r>
               <a:rPr sz="1500" b="0">
                 <a:solidFill>
                   <a:srgbClr val="EA851B"/>
                 </a:solidFill>
                 <a:latin typeface="Pretendard ExtraBold"/>
               </a:rPr>
-              <a:t>[해석] 어느 사암이 더 \"빈 공간\"이 많은가? 그 사암이 \"좋은 저장소\"라 할 수 있을까?</a:t>
+              <a:t>세 방향이 비슷하지만 세부 모양은 다름 → W5 tri-axis aggregation의 motivation</a:t>
             </a:r>
           </a:p>
         </p:txBody>
@@ -9833,7 +8228,7 @@
                 </a:solidFill>
                 <a:latin typeface="Pretendard Black"/>
               </a:rPr>
-              <a:t>1.4  같은 부피, 세 축 슬라이스 (BB)</a:t>
+              <a:t>1.4  데이터 전처리 — 정규화 + Otsu</a:t>
             </a:r>
           </a:p>
         </p:txBody>
@@ -9915,7 +8310,7 @@
                 </a:solidFill>
                 <a:latin typeface="Pretendard Medium"/>
               </a:rPr>
-              <a:t>Week 1 — 데이터 탐색</a:t>
+              <a:t>W1 — 데이터 + Classical · 1조 Advanced</a:t>
             </a:r>
           </a:p>
         </p:txBody>
@@ -9954,45 +8349,21 @@
                 </a:solidFill>
                 <a:latin typeface="Pretendard Medium"/>
               </a:rPr>
-              <a:t>9 / 20</a:t>
-            </a:r>
-          </a:p>
-        </p:txBody>
-      </p:sp>
-      <p:pic>
-        <p:nvPicPr>
-          <p:cNvPr id="6" name="Picture 5" descr="fig2_three_axes.png"/>
-          <p:cNvPicPr>
-            <a:picLocks noChangeAspect="1"/>
-          </p:cNvPicPr>
-          <p:nvPr/>
-        </p:nvPicPr>
-        <p:blipFill>
-          <a:blip r:embed="rId2"/>
-          <a:stretch>
-            <a:fillRect/>
-          </a:stretch>
-        </p:blipFill>
-        <p:spPr>
-          <a:xfrm>
-            <a:off x="457200" y="1371600"/>
-            <a:ext cx="11247120" cy="4000454"/>
-          </a:xfrm>
-          <a:prstGeom prst="rect">
-            <a:avLst/>
-          </a:prstGeom>
-        </p:spPr>
-      </p:pic>
-      <p:sp>
-        <p:nvSpPr>
-          <p:cNvPr id="7" name="TextBox 6"/>
+              <a:t>9 / 15</a:t>
+            </a:r>
+          </a:p>
+        </p:txBody>
+      </p:sp>
+      <p:sp>
+        <p:nvSpPr>
+          <p:cNvPr id="6" name="TextBox 5"/>
           <p:cNvSpPr txBox="1"/>
           <p:nvPr/>
         </p:nvSpPr>
         <p:spPr>
           <a:xfrm>
-            <a:off x="731520" y="5577840"/>
-            <a:ext cx="10972800" cy="457200"/>
+            <a:off x="731520" y="1371600"/>
+            <a:ext cx="10972800" cy="2743200"/>
           </a:xfrm>
           <a:prstGeom prst="rect">
             <a:avLst/>
@@ -10000,63 +8371,120 @@
           <a:noFill/>
         </p:spPr>
         <p:txBody>
-          <a:bodyPr wrap="square" lIns="45720" rIns="45720">
+          <a:bodyPr wrap="square">
             <a:spAutoFit/>
           </a:bodyPr>
           <a:lstStyle/>
           <a:p>
-            <a:pPr algn="l">
-              <a:lnSpc>
-                <a:spcPct val="115000"/>
-              </a:lnSpc>
-            </a:pPr>
-            <a:r>
-              <a:rPr sz="1600" b="0">
+            <a:pPr>
+              <a:lnSpc>
+                <a:spcPct val="130000"/>
+              </a:lnSpc>
+              <a:spcAft>
+                <a:spcPts val="600"/>
+              </a:spcAft>
+            </a:pPr>
+            <a:r>
+              <a:rPr sz="1800" b="0">
+                <a:solidFill>
+                  <a:srgbClr val="EA851B"/>
+                </a:solidFill>
+                <a:latin typeface="Pretendard ExtraBold"/>
+              </a:rPr>
+              <a:t>•  </a:t>
+            </a:r>
+            <a:r>
+              <a:rPr sz="1800" b="0">
                 <a:solidFill>
                   <a:srgbClr val="181818"/>
                 </a:solidFill>
                 <a:latin typeface="Pretendard SemiBold"/>
               </a:rPr>
-              <a:t>세 방향이 통계적으로 비슷하지만 \"세부 모양은 완전히 다르다\".</a:t>
-            </a:r>
-          </a:p>
-        </p:txBody>
-      </p:sp>
-      <p:sp>
-        <p:nvSpPr>
-          <p:cNvPr id="8" name="TextBox 7"/>
-          <p:cNvSpPr txBox="1"/>
-          <p:nvPr/>
-        </p:nvSpPr>
-        <p:spPr>
-          <a:xfrm>
-            <a:off x="731520" y="6035040"/>
-            <a:ext cx="10972800" cy="457200"/>
-          </a:xfrm>
-          <a:prstGeom prst="rect">
-            <a:avLst/>
-          </a:prstGeom>
-          <a:noFill/>
-        </p:spPr>
-        <p:txBody>
-          <a:bodyPr wrap="square" lIns="45720" rIns="45720">
-            <a:spAutoFit/>
-          </a:bodyPr>
-          <a:lstStyle/>
-          <a:p>
-            <a:pPr algn="l">
-              <a:lnSpc>
-                <a:spcPct val="115000"/>
-              </a:lnSpc>
-            </a:pPr>
-            <a:r>
-              <a:rPr sz="1500" b="0">
+              <a:t>normalize_to_float: uint8 [0,255] → float32 [0,1] — DL 학습 안정성</a:t>
+            </a:r>
+          </a:p>
+          <a:p>
+            <a:pPr>
+              <a:lnSpc>
+                <a:spcPct val="130000"/>
+              </a:lnSpc>
+              <a:spcAft>
+                <a:spcPts val="600"/>
+              </a:spcAft>
+            </a:pPr>
+            <a:r>
+              <a:rPr sz="1800" b="0">
                 <a:solidFill>
                   <a:srgbClr val="EA851B"/>
                 </a:solidFill>
                 <a:latin typeface="Pretendard ExtraBold"/>
               </a:rPr>
-              <a:t>핵심 통찰: 본 연구는 z축뿐 아니라 세 축 모두에서 보간 → W5의 tri-axis aggregation</a:t>
+              <a:t>•  </a:t>
+            </a:r>
+            <a:r>
+              <a:rPr sz="1800" b="0">
+                <a:solidFill>
+                  <a:srgbClr val="181818"/>
+                </a:solidFill>
+                <a:latin typeface="Pretendard SemiBold"/>
+              </a:rPr>
+              <a:t>otsu_threshold: 자동 임계값 (binary 데이터에선 trivial, W4 grayscale에서 진가)</a:t>
+            </a:r>
+          </a:p>
+          <a:p>
+            <a:pPr>
+              <a:lnSpc>
+                <a:spcPct val="130000"/>
+              </a:lnSpc>
+              <a:spcAft>
+                <a:spcPts val="600"/>
+              </a:spcAft>
+            </a:pPr>
+            <a:r>
+              <a:rPr sz="1800" b="0">
+                <a:solidFill>
+                  <a:srgbClr val="EA851B"/>
+                </a:solidFill>
+                <a:latin typeface="Pretendard ExtraBold"/>
+              </a:rPr>
+              <a:t>•  </a:t>
+            </a:r>
+            <a:r>
+              <a:rPr sz="1800" b="0">
+                <a:solidFill>
+                  <a:srgbClr val="181818"/>
+                </a:solidFill>
+                <a:latin typeface="Pretendard SemiBold"/>
+              </a:rPr>
+              <a:t>"두 봉우리 사이 골짜기를 찾는" 고전 알고리즘</a:t>
+            </a:r>
+          </a:p>
+          <a:p>
+            <a:pPr>
+              <a:lnSpc>
+                <a:spcPct val="130000"/>
+              </a:lnSpc>
+              <a:spcAft>
+                <a:spcPts val="600"/>
+              </a:spcAft>
+            </a:pPr>
+            <a:r>
+              <a:rPr sz="1800" b="0">
+                <a:solidFill>
+                  <a:srgbClr val="EA851B"/>
+                </a:solidFill>
+                <a:latin typeface="Pretendard ExtraBold"/>
+              </a:rPr>
+              <a:t>•  </a:t>
+            </a:r>
+            <a:r>
+              <a:rPr sz="1800" b="0">
+                <a:solidFill>
+                  <a:srgbClr val="181818"/>
+                </a:solidFill>
+                <a:latin typeface="Pretendard SemiBold"/>
+              </a:rPr>
+              <a:t>Micro-CT segmentation의 표준 기법</a:t>
             </a:r>
           </a:p>
         </p:txBody>

--- a/group1_advanced/week1/slides/W1_group1.pptx
+++ b/group1_advanced/week1/slides/W1_group1.pptx
@@ -19,7 +19,6 @@
     <p:sldId id="267" r:id="rId18"/>
     <p:sldId id="268" r:id="rId19"/>
     <p:sldId id="269" r:id="rId20"/>
-    <p:sldId id="270" r:id="rId21"/>
   </p:sldIdLst>
   <p:sldSz cx="12191695" cy="6858000" type="screen4x3"/>
   <p:notesSz cx="6858000" cy="9144000"/>
@@ -3177,7 +3176,7 @@
                 </a:solidFill>
                 <a:latin typeface="Pretendard ExtraBold"/>
               </a:rPr>
-              <a:t>Week 1  ·  1조 Advanced</a:t>
+              <a:t>Week 1  ·  1조</a:t>
             </a:r>
           </a:p>
         </p:txBody>
@@ -3255,7 +3254,7 @@
                 </a:solidFill>
                 <a:latin typeface="Pretendard SemiBold"/>
               </a:rPr>
-              <a:t>Voxel · 전처리 · sparse · 선형/Cubic · k sweep</a:t>
+              <a:t>Voxel · 전처리 · sparse imaging · Linear / Cubic 보간</a:t>
             </a:r>
           </a:p>
         </p:txBody>
@@ -3351,7 +3350,7 @@
                 </a:solidFill>
                 <a:latin typeface="Pretendard Black"/>
               </a:rPr>
-              <a:t>1.5  Otsu 시각 — 인공 grayscale에서</a:t>
+              <a:t>Linear vs Cubic 보간 (BB, z=62, k=5)</a:t>
             </a:r>
           </a:p>
         </p:txBody>
@@ -3433,7 +3432,7 @@
                 </a:solidFill>
                 <a:latin typeface="Pretendard Medium"/>
               </a:rPr>
-              <a:t>W1 — 데이터 + Classical · 1조 Advanced</a:t>
+              <a:t>W1 · 데이터 + Classical · 1조</a:t>
             </a:r>
           </a:p>
         </p:txBody>
@@ -3472,14 +3471,14 @@
                 </a:solidFill>
                 <a:latin typeface="Pretendard Medium"/>
               </a:rPr>
-              <a:t>10 / 15</a:t>
+              <a:t>10 / 14</a:t>
             </a:r>
           </a:p>
         </p:txBody>
       </p:sp>
       <p:pic>
         <p:nvPicPr>
-          <p:cNvPr id="6" name="Picture 5" descr="fig3_otsu.png"/>
+          <p:cNvPr id="6" name="Picture 5" descr="fig4_b1_vs_b2.png"/>
           <p:cNvPicPr>
             <a:picLocks noChangeAspect="1"/>
           </p:cNvPicPr>
@@ -3493,8 +3492,8 @@
         </p:blipFill>
         <p:spPr>
           <a:xfrm>
-            <a:off x="274320" y="1280160"/>
-            <a:ext cx="11612880" cy="3665462"/>
+            <a:off x="457200" y="1280160"/>
+            <a:ext cx="11247120" cy="3989961"/>
           </a:xfrm>
           <a:prstGeom prst="rect">
             <a:avLst/>
@@ -3509,7 +3508,7 @@
         </p:nvSpPr>
         <p:spPr>
           <a:xfrm>
-            <a:off x="731520" y="5212080"/>
+            <a:off x="731520" y="5486400"/>
             <a:ext cx="10972800" cy="457200"/>
           </a:xfrm>
           <a:prstGeom prst="rect">
@@ -3531,11 +3530,11 @@
             <a:r>
               <a:rPr sz="1500" b="0">
                 <a:solidFill>
-                  <a:srgbClr val="EA851B"/>
-                </a:solidFill>
-                <a:latin typeface="Pretendard ExtraBold"/>
-              </a:rPr>
-              <a:t>[Try-it!] 노이즈 σ를 0.05/0.2/0.4로 바꾸면 Otsu가 어디서 망가지나</a:t>
+                  <a:srgbClr val="181818"/>
+                </a:solidFill>
+                <a:latin typeface="Pretendard SemiBold"/>
+              </a:rPr>
+              <a:t>평가 지표 3종: |Δφ| (공극률 오차), |ΔSA| (표면적 오차), SSIM (구조 유사도)</a:t>
             </a:r>
           </a:p>
         </p:txBody>
@@ -3560,20 +3559,59 @@
       <p:grpSpPr/>
       <p:sp>
         <p:nvSpPr>
-          <p:cNvPr id="2" name="Rectangle 1"/>
+          <p:cNvPr id="2" name="TextBox 1"/>
+          <p:cNvSpPr txBox="1"/>
+          <p:nvPr/>
+        </p:nvSpPr>
+        <p:spPr>
+          <a:xfrm>
+            <a:off x="457200" y="320040"/>
+            <a:ext cx="11430000" cy="640080"/>
+          </a:xfrm>
+          <a:prstGeom prst="rect">
+            <a:avLst/>
+          </a:prstGeom>
+          <a:noFill/>
+        </p:spPr>
+        <p:txBody>
+          <a:bodyPr wrap="square" lIns="45720" rIns="45720">
+            <a:spAutoFit/>
+          </a:bodyPr>
+          <a:lstStyle/>
+          <a:p>
+            <a:pPr algn="l">
+              <a:lnSpc>
+                <a:spcPct val="115000"/>
+              </a:lnSpc>
+            </a:pPr>
+            <a:r>
+              <a:rPr sz="2800" b="0">
+                <a:solidFill>
+                  <a:srgbClr val="EA851B"/>
+                </a:solidFill>
+                <a:latin typeface="Pretendard Black"/>
+              </a:rPr>
+              <a:t>k Sweep — 학습 기반 방법이 필요한 지점</a:t>
+            </a:r>
+          </a:p>
+        </p:txBody>
+      </p:sp>
+      <p:sp>
+        <p:nvSpPr>
+          <p:cNvPr id="3" name="Rectangle 2"/>
           <p:cNvSpPr/>
           <p:nvPr/>
         </p:nvSpPr>
         <p:spPr>
           <a:xfrm>
-            <a:off x="0" y="0"/>
-            <a:ext cx="12191695" cy="6858000"/>
+            <a:off x="502920" y="960120"/>
+            <a:ext cx="1097280" cy="54864"/>
           </a:xfrm>
           <a:prstGeom prst="rect">
             <a:avLst/>
           </a:prstGeom>
           <a:solidFill>
-            <a:srgbClr val="FAF5EE"/>
+            <a:srgbClr val="EA851B"/>
           </a:solidFill>
           <a:ln>
             <a:noFill/>
@@ -3596,90 +3634,14 @@
         <p:txBody>
           <a:bodyPr rtlCol="0" anchor="ctr"/>
           <a:lstStyle/>
-          <a:p/>
-        </p:txBody>
-      </p:sp>
-      <p:sp>
-        <p:nvSpPr>
-          <p:cNvPr id="3" name="TextBox 2"/>
-          <p:cNvSpPr txBox="1"/>
-          <p:nvPr/>
-        </p:nvSpPr>
-        <p:spPr>
-          <a:xfrm>
-            <a:off x="731520" y="2286000"/>
-            <a:ext cx="10058400" cy="548640"/>
-          </a:xfrm>
-          <a:prstGeom prst="rect">
-            <a:avLst/>
-          </a:prstGeom>
-          <a:noFill/>
-        </p:spPr>
-        <p:txBody>
-          <a:bodyPr wrap="square" lIns="45720" rIns="45720">
-            <a:spAutoFit/>
-          </a:bodyPr>
-          <a:lstStyle/>
-          <a:p>
-            <a:pPr algn="l">
-              <a:lnSpc>
-                <a:spcPct val="115000"/>
-              </a:lnSpc>
-            </a:pPr>
-            <a:r>
-              <a:rPr sz="2000" b="0">
-                <a:solidFill>
-                  <a:srgbClr val="EA851B"/>
-                </a:solidFill>
-                <a:latin typeface="Pretendard ExtraBold"/>
-              </a:rPr>
-              <a:t>Section 2</a:t>
-            </a:r>
+          <a:p>
+            <a:pPr algn="ctr"/>
           </a:p>
         </p:txBody>
       </p:sp>
       <p:sp>
         <p:nvSpPr>
           <p:cNvPr id="4" name="TextBox 3"/>
-          <p:cNvSpPr txBox="1"/>
-          <p:nvPr/>
-        </p:nvSpPr>
-        <p:spPr>
-          <a:xfrm>
-            <a:off x="731520" y="2834640"/>
-            <a:ext cx="10058400" cy="1371600"/>
-          </a:xfrm>
-          <a:prstGeom prst="rect">
-            <a:avLst/>
-          </a:prstGeom>
-          <a:noFill/>
-        </p:spPr>
-        <p:txBody>
-          <a:bodyPr wrap="square" lIns="45720" rIns="45720">
-            <a:spAutoFit/>
-          </a:bodyPr>
-          <a:lstStyle/>
-          <a:p>
-            <a:pPr algn="l">
-              <a:lnSpc>
-                <a:spcPct val="115000"/>
-              </a:lnSpc>
-            </a:pPr>
-            <a:r>
-              <a:rPr sz="4400" b="0">
-                <a:solidFill>
-                  <a:srgbClr val="181818"/>
-                </a:solidFill>
-                <a:latin typeface="Pretendard Black"/>
-              </a:rPr>
-              <a:t>Sparse Imaging + Classical Baseline</a:t>
-            </a:r>
-          </a:p>
-        </p:txBody>
-      </p:sp>
-      <p:sp>
-        <p:nvSpPr>
-          <p:cNvPr id="5" name="TextBox 4"/>
           <p:cNvSpPr txBox="1"/>
           <p:nvPr/>
         </p:nvSpPr>
@@ -3711,14 +3673,14 @@
                 </a:solidFill>
                 <a:latin typeface="Pretendard Medium"/>
               </a:rPr>
-              <a:t>W1 — 데이터 + Classical · 1조 Advanced</a:t>
-            </a:r>
-          </a:p>
-        </p:txBody>
-      </p:sp>
-      <p:sp>
-        <p:nvSpPr>
-          <p:cNvPr id="6" name="TextBox 5"/>
+              <a:t>W1 · 데이터 + Classical · 1조</a:t>
+            </a:r>
+          </a:p>
+        </p:txBody>
+      </p:sp>
+      <p:sp>
+        <p:nvSpPr>
+          <p:cNvPr id="5" name="TextBox 4"/>
           <p:cNvSpPr txBox="1"/>
           <p:nvPr/>
         </p:nvSpPr>
@@ -3750,7 +3712,109 @@
                 </a:solidFill>
                 <a:latin typeface="Pretendard Medium"/>
               </a:rPr>
-              <a:t>11 / 15</a:t>
+              <a:t>11 / 14</a:t>
+            </a:r>
+          </a:p>
+        </p:txBody>
+      </p:sp>
+      <p:pic>
+        <p:nvPicPr>
+          <p:cNvPr id="6" name="Picture 5" descr="fig5_motivation.png"/>
+          <p:cNvPicPr>
+            <a:picLocks noChangeAspect="1"/>
+          </p:cNvPicPr>
+          <p:nvPr/>
+        </p:nvPicPr>
+        <p:blipFill>
+          <a:blip r:embed="rId2"/>
+          <a:stretch>
+            <a:fillRect/>
+          </a:stretch>
+        </p:blipFill>
+        <p:spPr>
+          <a:xfrm>
+            <a:off x="2286000" y="1188720"/>
+            <a:ext cx="7589520" cy="3746725"/>
+          </a:xfrm>
+          <a:prstGeom prst="rect">
+            <a:avLst/>
+          </a:prstGeom>
+        </p:spPr>
+      </p:pic>
+      <p:sp>
+        <p:nvSpPr>
+          <p:cNvPr id="7" name="TextBox 6"/>
+          <p:cNvSpPr txBox="1"/>
+          <p:nvPr/>
+        </p:nvSpPr>
+        <p:spPr>
+          <a:xfrm>
+            <a:off x="731520" y="5486400"/>
+            <a:ext cx="10972800" cy="457200"/>
+          </a:xfrm>
+          <a:prstGeom prst="rect">
+            <a:avLst/>
+          </a:prstGeom>
+          <a:noFill/>
+        </p:spPr>
+        <p:txBody>
+          <a:bodyPr wrap="square" lIns="45720" rIns="45720">
+            <a:spAutoFit/>
+          </a:bodyPr>
+          <a:lstStyle/>
+          <a:p>
+            <a:pPr algn="l">
+              <a:lnSpc>
+                <a:spcPct val="115000"/>
+              </a:lnSpc>
+            </a:pPr>
+            <a:r>
+              <a:rPr sz="1500" b="0">
+                <a:solidFill>
+                  <a:srgbClr val="181818"/>
+                </a:solidFill>
+                <a:latin typeface="Pretendard SemiBold"/>
+              </a:rPr>
+              <a:t>k가 커질수록 모든 도메인의 |Δφ|가 증가합니다.</a:t>
+            </a:r>
+          </a:p>
+        </p:txBody>
+      </p:sp>
+      <p:sp>
+        <p:nvSpPr>
+          <p:cNvPr id="8" name="TextBox 7"/>
+          <p:cNvSpPr txBox="1"/>
+          <p:nvPr/>
+        </p:nvSpPr>
+        <p:spPr>
+          <a:xfrm>
+            <a:off x="731520" y="5943600"/>
+            <a:ext cx="10972800" cy="457200"/>
+          </a:xfrm>
+          <a:prstGeom prst="rect">
+            <a:avLst/>
+          </a:prstGeom>
+          <a:noFill/>
+        </p:spPr>
+        <p:txBody>
+          <a:bodyPr wrap="square" lIns="45720" rIns="45720">
+            <a:spAutoFit/>
+          </a:bodyPr>
+          <a:lstStyle/>
+          <a:p>
+            <a:pPr algn="l">
+              <a:lnSpc>
+                <a:spcPct val="115000"/>
+              </a:lnSpc>
+            </a:pPr>
+            <a:r>
+              <a:rPr sz="1400" b="0">
+                <a:solidFill>
+                  <a:srgbClr val="7A7A7A"/>
+                </a:solidFill>
+                <a:latin typeface="Pretendard Medium"/>
+              </a:rPr>
+              <a:t>곡선이 가파르게 꺾이는 지점부터 단순 보간으로는 부족합니다 (W2~ deep learning).</a:t>
             </a:r>
           </a:p>
         </p:txBody>
@@ -3807,7 +3871,7 @@
                 </a:solidFill>
                 <a:latin typeface="Pretendard Black"/>
               </a:rPr>
-              <a:t>2.1  Sparse Imaging — 왜 필요한가</a:t>
+              <a:t>탐구 과제</a:t>
             </a:r>
           </a:p>
         </p:txBody>
@@ -3889,7 +3953,7 @@
                 </a:solidFill>
                 <a:latin typeface="Pretendard Medium"/>
               </a:rPr>
-              <a:t>W1 — 데이터 + Classical · 1조 Advanced</a:t>
+              <a:t>W1 · 데이터 + Classical · 1조</a:t>
             </a:r>
           </a:p>
         </p:txBody>
@@ -3928,7 +3992,7 @@
                 </a:solidFill>
                 <a:latin typeface="Pretendard Medium"/>
               </a:rPr>
-              <a:t>12 / 15</a:t>
+              <a:t>12 / 14</a:t>
             </a:r>
           </a:p>
         </p:txBody>
@@ -3941,47 +4005,8 @@
         </p:nvSpPr>
         <p:spPr>
           <a:xfrm>
-            <a:off x="731520" y="1280160"/>
-            <a:ext cx="10972800" cy="457200"/>
-          </a:xfrm>
-          <a:prstGeom prst="rect">
-            <a:avLst/>
-          </a:prstGeom>
-          <a:noFill/>
-        </p:spPr>
-        <p:txBody>
-          <a:bodyPr wrap="square" lIns="45720" rIns="45720">
-            <a:spAutoFit/>
-          </a:bodyPr>
-          <a:lstStyle/>
-          <a:p>
-            <a:pPr algn="l">
-              <a:lnSpc>
-                <a:spcPct val="115000"/>
-              </a:lnSpc>
-            </a:pPr>
-            <a:r>
-              <a:rPr sz="2200" b="0">
-                <a:solidFill>
-                  <a:srgbClr val="EA851B"/>
-                </a:solidFill>
-                <a:latin typeface="Pretendard ExtraBold"/>
-              </a:rPr>
-              <a:t>문제</a:t>
-            </a:r>
-          </a:p>
-        </p:txBody>
-      </p:sp>
-      <p:sp>
-        <p:nvSpPr>
-          <p:cNvPr id="7" name="TextBox 6"/>
-          <p:cNvSpPr txBox="1"/>
-          <p:nvPr/>
-        </p:nvSpPr>
-        <p:spPr>
-          <a:xfrm>
-            <a:off x="731520" y="1828800"/>
-            <a:ext cx="10972800" cy="548640"/>
+            <a:off x="640080" y="1463040"/>
+            <a:ext cx="11155680" cy="4114800"/>
           </a:xfrm>
           <a:prstGeom prst="rect">
             <a:avLst/>
@@ -4003,7 +4028,7 @@
               </a:spcAft>
             </a:pPr>
             <a:r>
-              <a:rPr sz="1900" b="0">
+              <a:rPr sz="1800" b="0">
                 <a:solidFill>
                   <a:srgbClr val="EA851B"/>
                 </a:solidFill>
@@ -4012,77 +4037,15 @@
               <a:t>•  </a:t>
             </a:r>
             <a:r>
-              <a:rPr sz="1900" b="0">
+              <a:rPr sz="1800" b="0">
                 <a:solidFill>
                   <a:srgbClr val="181818"/>
                 </a:solidFill>
                 <a:latin typeface="Pretendard SemiBold"/>
               </a:rPr>
-              <a:t>micro-CT 스캔은 시간 + 비용 비쌈</a:t>
-            </a:r>
-          </a:p>
-        </p:txBody>
-      </p:sp>
-      <p:sp>
-        <p:nvSpPr>
-          <p:cNvPr id="8" name="TextBox 7"/>
-          <p:cNvSpPr txBox="1"/>
-          <p:nvPr/>
-        </p:nvSpPr>
-        <p:spPr>
-          <a:xfrm>
-            <a:off x="731520" y="2560320"/>
-            <a:ext cx="10972800" cy="457200"/>
-          </a:xfrm>
-          <a:prstGeom prst="rect">
-            <a:avLst/>
-          </a:prstGeom>
-          <a:noFill/>
-        </p:spPr>
-        <p:txBody>
-          <a:bodyPr wrap="square" lIns="45720" rIns="45720">
-            <a:spAutoFit/>
-          </a:bodyPr>
-          <a:lstStyle/>
-          <a:p>
-            <a:pPr algn="l">
-              <a:lnSpc>
-                <a:spcPct val="115000"/>
-              </a:lnSpc>
-            </a:pPr>
-            <a:r>
-              <a:rPr sz="2200" b="0">
-                <a:solidFill>
-                  <a:srgbClr val="EA851B"/>
-                </a:solidFill>
-                <a:latin typeface="Pretendard ExtraBold"/>
-              </a:rPr>
-              <a:t>해결</a:t>
-            </a:r>
-          </a:p>
-        </p:txBody>
-      </p:sp>
-      <p:sp>
-        <p:nvSpPr>
-          <p:cNvPr id="9" name="TextBox 8"/>
-          <p:cNvSpPr txBox="1"/>
-          <p:nvPr/>
-        </p:nvSpPr>
-        <p:spPr>
-          <a:xfrm>
-            <a:off x="731520" y="3108960"/>
-            <a:ext cx="10972800" cy="2286000"/>
-          </a:xfrm>
-          <a:prstGeom prst="rect">
-            <a:avLst/>
-          </a:prstGeom>
-          <a:noFill/>
-        </p:spPr>
-        <p:txBody>
-          <a:bodyPr wrap="square">
-            <a:spAutoFit/>
-          </a:bodyPr>
-          <a:lstStyle/>
+              <a:t>필수 1 — 네 도메인 × {Linear, Cubic} × k=[2,3,5,7] 전수 비교 표 (DataFrame)</a:t>
+            </a:r>
+          </a:p>
           <a:p>
             <a:pPr>
               <a:lnSpc>
@@ -4093,7 +4056,7 @@
               </a:spcAft>
             </a:pPr>
             <a:r>
-              <a:rPr sz="1900" b="0">
+              <a:rPr sz="1800" b="0">
                 <a:solidFill>
                   <a:srgbClr val="EA851B"/>
                 </a:solidFill>
@@ -4102,13 +4065,13 @@
               <a:t>•  </a:t>
             </a:r>
             <a:r>
-              <a:rPr sz="1900" b="0">
+              <a:rPr sz="1800" b="0">
                 <a:solidFill>
                   <a:srgbClr val="181818"/>
                 </a:solidFill>
                 <a:latin typeface="Pretendard SemiBold"/>
               </a:rPr>
-              <a:t>k 슬라이스마다 1개만 측정 → 시간 (1−1/k)×100% 절감</a:t>
+              <a:t>필수 2 — z·y·x 세 축 보간 비교 (등방성 정량 검토)</a:t>
             </a:r>
           </a:p>
           <a:p>
@@ -4121,7 +4084,7 @@
               </a:spcAft>
             </a:pPr>
             <a:r>
-              <a:rPr sz="1900" b="0">
+              <a:rPr sz="1800" b="0">
                 <a:solidFill>
                   <a:srgbClr val="EA851B"/>
                 </a:solidFill>
@@ -4130,13 +4093,13 @@
               <a:t>•  </a:t>
             </a:r>
             <a:r>
-              <a:rPr sz="1900" b="0">
+              <a:rPr sz="1800" b="0">
                 <a:solidFill>
                   <a:srgbClr val="181818"/>
                 </a:solidFill>
                 <a:latin typeface="Pretendard SemiBold"/>
               </a:rPr>
-              <a:t>k=3 → 67% 절감, k=5 → 80% 절감</a:t>
+              <a:t>선택 3 — Otsu 민감도 분석 (인공 grayscale 노이즈 σ sweep)</a:t>
             </a:r>
           </a:p>
           <a:p>
@@ -4149,7 +4112,7 @@
               </a:spcAft>
             </a:pPr>
             <a:r>
-              <a:rPr sz="1900" b="0">
+              <a:rPr sz="1800" b="0">
                 <a:solidFill>
                   <a:srgbClr val="EA851B"/>
                 </a:solidFill>
@@ -4158,13 +4121,93 @@
               <a:t>•  </a:t>
             </a:r>
             <a:r>
-              <a:rPr sz="1900" b="0">
+              <a:rPr sz="1800" b="0">
                 <a:solidFill>
                   <a:srgbClr val="181818"/>
                 </a:solidFill>
                 <a:latin typeface="Pretendard SemiBold"/>
               </a:rPr>
-              <a:t>핵심 질문: 누락 슬라이스를 측정 슬라이스로부터 얼마나 정확히 복원?</a:t>
+              <a:t>선택 4 — Random sparse (무작위 33% 측정) vs Deterministic k=3 비교</a:t>
+            </a:r>
+          </a:p>
+        </p:txBody>
+      </p:sp>
+      <p:sp>
+        <p:nvSpPr>
+          <p:cNvPr id="7" name="Rounded Rectangle 6"/>
+          <p:cNvSpPr/>
+          <p:nvPr/>
+        </p:nvSpPr>
+        <p:spPr>
+          <a:xfrm>
+            <a:off x="640080" y="5486400"/>
+            <a:ext cx="11155680" cy="731520"/>
+          </a:xfrm>
+          <a:prstGeom prst="roundRect">
+            <a:avLst/>
+          </a:prstGeom>
+          <a:solidFill>
+            <a:srgbClr val="FAF5EE"/>
+          </a:solidFill>
+          <a:ln>
+            <a:noFill/>
+          </a:ln>
+        </p:spPr>
+        <p:style>
+          <a:lnRef idx="1">
+            <a:schemeClr val="accent1"/>
+          </a:lnRef>
+          <a:fillRef idx="3">
+            <a:schemeClr val="accent1"/>
+          </a:fillRef>
+          <a:effectRef idx="2">
+            <a:schemeClr val="accent1"/>
+          </a:effectRef>
+          <a:fontRef idx="minor">
+            <a:schemeClr val="lt1"/>
+          </a:fontRef>
+        </p:style>
+        <p:txBody>
+          <a:bodyPr rtlCol="0" anchor="ctr"/>
+          <a:lstStyle/>
+          <a:p/>
+        </p:txBody>
+      </p:sp>
+      <p:sp>
+        <p:nvSpPr>
+          <p:cNvPr id="8" name="TextBox 7"/>
+          <p:cNvSpPr txBox="1"/>
+          <p:nvPr/>
+        </p:nvSpPr>
+        <p:spPr>
+          <a:xfrm>
+            <a:off x="822960" y="5669280"/>
+            <a:ext cx="10789920" cy="457200"/>
+          </a:xfrm>
+          <a:prstGeom prst="rect">
+            <a:avLst/>
+          </a:prstGeom>
+          <a:noFill/>
+        </p:spPr>
+        <p:txBody>
+          <a:bodyPr wrap="square" lIns="45720" rIns="45720">
+            <a:spAutoFit/>
+          </a:bodyPr>
+          <a:lstStyle/>
+          <a:p>
+            <a:pPr algn="ctr">
+              <a:lnSpc>
+                <a:spcPct val="115000"/>
+              </a:lnSpc>
+            </a:pPr>
+            <a:r>
+              <a:rPr sz="1400" b="0">
+                <a:solidFill>
+                  <a:srgbClr val="181818"/>
+                </a:solidFill>
+                <a:latin typeface="Pretendard Medium"/>
+              </a:rPr>
+              <a:t>자세한 안내는 handout 참조. 본인 작업 파일로 fork 후 분석·시각화·해석과 함께 제출.</a:t>
             </a:r>
           </a:p>
         </p:txBody>
@@ -4221,7 +4264,7 @@
                 </a:solidFill>
                 <a:latin typeface="Pretendard Black"/>
               </a:rPr>
-              <a:t>2.2  B1 Linear vs B2 Cubic (z=62, k=5)</a:t>
+              <a:t>다음 주차 예고 — W2</a:t>
             </a:r>
           </a:p>
         </p:txBody>
@@ -4303,7 +4346,7 @@
                 </a:solidFill>
                 <a:latin typeface="Pretendard Medium"/>
               </a:rPr>
-              <a:t>W1 — 데이터 + Classical · 1조 Advanced</a:t>
+              <a:t>W1 · 데이터 + Classical · 1조</a:t>
             </a:r>
           </a:p>
         </p:txBody>
@@ -4342,35 +4385,50 @@
                 </a:solidFill>
                 <a:latin typeface="Pretendard Medium"/>
               </a:rPr>
-              <a:t>13 / 15</a:t>
-            </a:r>
-          </a:p>
-        </p:txBody>
-      </p:sp>
-      <p:pic>
-        <p:nvPicPr>
-          <p:cNvPr id="6" name="Picture 5" descr="fig4_b1_vs_b2.png"/>
-          <p:cNvPicPr>
-            <a:picLocks noChangeAspect="1"/>
-          </p:cNvPicPr>
-          <p:nvPr/>
-        </p:nvPicPr>
-        <p:blipFill>
-          <a:blip r:embed="rId2"/>
-          <a:stretch>
-            <a:fillRect/>
-          </a:stretch>
-        </p:blipFill>
-        <p:spPr>
-          <a:xfrm>
-            <a:off x="457200" y="1280160"/>
-            <a:ext cx="11247120" cy="3989961"/>
-          </a:xfrm>
-          <a:prstGeom prst="rect">
-            <a:avLst/>
-          </a:prstGeom>
-        </p:spPr>
-      </p:pic>
+              <a:t>13 / 14</a:t>
+            </a:r>
+          </a:p>
+        </p:txBody>
+      </p:sp>
+      <p:sp>
+        <p:nvSpPr>
+          <p:cNvPr id="6" name="TextBox 5"/>
+          <p:cNvSpPr txBox="1"/>
+          <p:nvPr/>
+        </p:nvSpPr>
+        <p:spPr>
+          <a:xfrm>
+            <a:off x="731520" y="1463040"/>
+            <a:ext cx="10972800" cy="548640"/>
+          </a:xfrm>
+          <a:prstGeom prst="rect">
+            <a:avLst/>
+          </a:prstGeom>
+          <a:noFill/>
+        </p:spPr>
+        <p:txBody>
+          <a:bodyPr wrap="square" lIns="45720" rIns="45720">
+            <a:spAutoFit/>
+          </a:bodyPr>
+          <a:lstStyle/>
+          <a:p>
+            <a:pPr algn="l">
+              <a:lnSpc>
+                <a:spcPct val="115000"/>
+              </a:lnSpc>
+            </a:pPr>
+            <a:r>
+              <a:rPr sz="2400" b="0">
+                <a:solidFill>
+                  <a:srgbClr val="EA851B"/>
+                </a:solidFill>
+                <a:latin typeface="Pretendard ExtraBold"/>
+              </a:rPr>
+              <a:t>Deep Learning 입문 — UNet / pix2pix 구조</a:t>
+            </a:r>
+          </a:p>
+        </p:txBody>
+      </p:sp>
       <p:sp>
         <p:nvSpPr>
           <p:cNvPr id="7" name="TextBox 6"/>
@@ -4379,7 +4437,142 @@
         </p:nvSpPr>
         <p:spPr>
           <a:xfrm>
-            <a:off x="731520" y="5394960"/>
+            <a:off x="731520" y="2194560"/>
+            <a:ext cx="10972800" cy="3200400"/>
+          </a:xfrm>
+          <a:prstGeom prst="rect">
+            <a:avLst/>
+          </a:prstGeom>
+          <a:noFill/>
+        </p:spPr>
+        <p:txBody>
+          <a:bodyPr wrap="square">
+            <a:spAutoFit/>
+          </a:bodyPr>
+          <a:lstStyle/>
+          <a:p>
+            <a:pPr>
+              <a:lnSpc>
+                <a:spcPct val="130000"/>
+              </a:lnSpc>
+              <a:spcAft>
+                <a:spcPts val="600"/>
+              </a:spcAft>
+            </a:pPr>
+            <a:r>
+              <a:rPr sz="1800" b="0">
+                <a:solidFill>
+                  <a:srgbClr val="EA851B"/>
+                </a:solidFill>
+                <a:latin typeface="Pretendard ExtraBold"/>
+              </a:rPr>
+              <a:t>•  </a:t>
+            </a:r>
+            <a:r>
+              <a:rPr sz="1800" b="0">
+                <a:solidFill>
+                  <a:srgbClr val="181818"/>
+                </a:solidFill>
+                <a:latin typeface="Pretendard SemiBold"/>
+              </a:rPr>
+              <a:t>슬라이스 보간을 학습 가능한 함수로 정식화</a:t>
+            </a:r>
+          </a:p>
+          <a:p>
+            <a:pPr>
+              <a:lnSpc>
+                <a:spcPct val="130000"/>
+              </a:lnSpc>
+              <a:spcAft>
+                <a:spcPts val="600"/>
+              </a:spcAft>
+            </a:pPr>
+            <a:r>
+              <a:rPr sz="1800" b="0">
+                <a:solidFill>
+                  <a:srgbClr val="EA851B"/>
+                </a:solidFill>
+                <a:latin typeface="Pretendard ExtraBold"/>
+              </a:rPr>
+              <a:t>•  </a:t>
+            </a:r>
+            <a:r>
+              <a:rPr sz="1800" b="0">
+                <a:solidFill>
+                  <a:srgbClr val="181818"/>
+                </a:solidFill>
+                <a:latin typeface="Pretendard SemiBold"/>
+              </a:rPr>
+              <a:t>UNet 기본 구조 (encoder · decoder · skip-connection)</a:t>
+            </a:r>
+          </a:p>
+          <a:p>
+            <a:pPr>
+              <a:lnSpc>
+                <a:spcPct val="130000"/>
+              </a:lnSpc>
+              <a:spcAft>
+                <a:spcPts val="600"/>
+              </a:spcAft>
+            </a:pPr>
+            <a:r>
+              <a:rPr sz="1800" b="0">
+                <a:solidFill>
+                  <a:srgbClr val="EA851B"/>
+                </a:solidFill>
+                <a:latin typeface="Pretendard ExtraBold"/>
+              </a:rPr>
+              <a:t>•  </a:t>
+            </a:r>
+            <a:r>
+              <a:rPr sz="1800" b="0">
+                <a:solidFill>
+                  <a:srgbClr val="181818"/>
+                </a:solidFill>
+                <a:latin typeface="Pretendard SemiBold"/>
+              </a:rPr>
+              <a:t>pix2pix — 조건부 image-to-image 학습 흐름</a:t>
+            </a:r>
+          </a:p>
+          <a:p>
+            <a:pPr>
+              <a:lnSpc>
+                <a:spcPct val="130000"/>
+              </a:lnSpc>
+              <a:spcAft>
+                <a:spcPts val="600"/>
+              </a:spcAft>
+            </a:pPr>
+            <a:r>
+              <a:rPr sz="1800" b="0">
+                <a:solidFill>
+                  <a:srgbClr val="EA851B"/>
+                </a:solidFill>
+                <a:latin typeface="Pretendard ExtraBold"/>
+              </a:rPr>
+              <a:t>•  </a:t>
+            </a:r>
+            <a:r>
+              <a:rPr sz="1800" b="0">
+                <a:solidFill>
+                  <a:srgbClr val="181818"/>
+                </a:solidFill>
+                <a:latin typeface="Pretendard SemiBold"/>
+              </a:rPr>
+              <a:t>mini UNet을 학생 노트북(CPU)에서 직접 학습 + W1 baseline 비교</a:t>
+            </a:r>
+          </a:p>
+        </p:txBody>
+      </p:sp>
+      <p:sp>
+        <p:nvSpPr>
+          <p:cNvPr id="8" name="TextBox 7"/>
+          <p:cNvSpPr txBox="1"/>
+          <p:nvPr/>
+        </p:nvSpPr>
+        <p:spPr>
+          <a:xfrm>
+            <a:off x="731520" y="5669280"/>
             <a:ext cx="10972800" cy="457200"/>
           </a:xfrm>
           <a:prstGeom prst="rect">
@@ -4399,52 +4592,13 @@
               </a:lnSpc>
             </a:pPr>
             <a:r>
-              <a:rPr sz="1600" b="0">
-                <a:solidFill>
-                  <a:srgbClr val="EA851B"/>
-                </a:solidFill>
-                <a:latin typeface="Pretendard ExtraBold"/>
-              </a:rPr>
-              <a:t>B1 = 선형 (직선), B2 = scipy cubic spline (부드러운 곡선)</a:t>
-            </a:r>
-          </a:p>
-        </p:txBody>
-      </p:sp>
-      <p:sp>
-        <p:nvSpPr>
-          <p:cNvPr id="8" name="TextBox 7"/>
-          <p:cNvSpPr txBox="1"/>
-          <p:nvPr/>
-        </p:nvSpPr>
-        <p:spPr>
-          <a:xfrm>
-            <a:off x="731520" y="5852160"/>
-            <a:ext cx="10972800" cy="457200"/>
-          </a:xfrm>
-          <a:prstGeom prst="rect">
-            <a:avLst/>
-          </a:prstGeom>
-          <a:noFill/>
-        </p:spPr>
-        <p:txBody>
-          <a:bodyPr wrap="square" lIns="45720" rIns="45720">
-            <a:spAutoFit/>
-          </a:bodyPr>
-          <a:lstStyle/>
-          <a:p>
-            <a:pPr algn="l">
-              <a:lnSpc>
-                <a:spcPct val="115000"/>
-              </a:lnSpc>
-            </a:pPr>
-            <a:r>
-              <a:rPr sz="1400" b="0">
-                <a:solidFill>
-                  <a:srgbClr val="181818"/>
-                </a:solidFill>
-                <a:latin typeface="Pretendard SemiBold"/>
-              </a:rPr>
-              <a:t>평가 지표 3종: |Δφ| (공극률 오차), |ΔSA| (표면적 오차), SSIM (구조 유사도)</a:t>
+              <a:rPr sz="1500" b="0">
+                <a:solidFill>
+                  <a:srgbClr val="7A7A7A"/>
+                </a:solidFill>
+                <a:latin typeface="Consolas"/>
+              </a:rPr>
+              <a:t>pip install torch torchvision pytorch-msssim</a:t>
             </a:r>
           </a:p>
         </p:txBody>
@@ -4501,7 +4655,7 @@
                 </a:solidFill>
                 <a:latin typeface="Pretendard Black"/>
               </a:rPr>
-              <a:t>2.3  k Sweep — 본 연구의 motivation</a:t>
+              <a:t>Q &amp; A</a:t>
             </a:r>
           </a:p>
         </p:txBody>
@@ -4583,7 +4737,7 @@
                 </a:solidFill>
                 <a:latin typeface="Pretendard Medium"/>
               </a:rPr>
-              <a:t>W1 — 데이터 + Classical · 1조 Advanced</a:t>
+              <a:t>W1 · 데이터 + Classical · 1조</a:t>
             </a:r>
           </a:p>
         </p:txBody>
@@ -4622,45 +4776,21 @@
                 </a:solidFill>
                 <a:latin typeface="Pretendard Medium"/>
               </a:rPr>
-              <a:t>14 / 15</a:t>
-            </a:r>
-          </a:p>
-        </p:txBody>
-      </p:sp>
-      <p:pic>
-        <p:nvPicPr>
-          <p:cNvPr id="6" name="Picture 5" descr="fig5_motivation.png"/>
-          <p:cNvPicPr>
-            <a:picLocks noChangeAspect="1"/>
-          </p:cNvPicPr>
-          <p:nvPr/>
-        </p:nvPicPr>
-        <p:blipFill>
-          <a:blip r:embed="rId2"/>
-          <a:stretch>
-            <a:fillRect/>
-          </a:stretch>
-        </p:blipFill>
-        <p:spPr>
-          <a:xfrm>
-            <a:off x="2286000" y="1188720"/>
-            <a:ext cx="7589520" cy="3746725"/>
-          </a:xfrm>
-          <a:prstGeom prst="rect">
-            <a:avLst/>
-          </a:prstGeom>
-        </p:spPr>
-      </p:pic>
-      <p:sp>
-        <p:nvSpPr>
-          <p:cNvPr id="7" name="TextBox 6"/>
-          <p:cNvSpPr txBox="1"/>
-          <p:nvPr/>
-        </p:nvSpPr>
-        <p:spPr>
-          <a:xfrm>
-            <a:off x="731520" y="5486400"/>
-            <a:ext cx="10972800" cy="457200"/>
+              <a:t>14 / 14</a:t>
+            </a:r>
+          </a:p>
+        </p:txBody>
+      </p:sp>
+      <p:sp>
+        <p:nvSpPr>
+          <p:cNvPr id="6" name="TextBox 5"/>
+          <p:cNvSpPr txBox="1"/>
+          <p:nvPr/>
+        </p:nvSpPr>
+        <p:spPr>
+          <a:xfrm>
+            <a:off x="731520" y="2743200"/>
+            <a:ext cx="10972800" cy="914400"/>
           </a:xfrm>
           <a:prstGeom prst="rect">
             <a:avLst/>
@@ -4673,720 +4803,19 @@
           </a:bodyPr>
           <a:lstStyle/>
           <a:p>
-            <a:pPr algn="l">
+            <a:pPr algn="ctr">
               <a:lnSpc>
                 <a:spcPct val="115000"/>
               </a:lnSpc>
             </a:pPr>
             <a:r>
-              <a:rPr sz="1600" b="0">
-                <a:solidFill>
-                  <a:srgbClr val="EA851B"/>
+              <a:rPr sz="2800" b="0">
+                <a:solidFill>
+                  <a:srgbClr val="181818"/>
                 </a:solidFill>
                 <a:latin typeface="Pretendard ExtraBold"/>
               </a:rPr>
-              <a:t>k 가 커질수록 모든 도메인의 |Δφ| 가 빠르게 악화</a:t>
-            </a:r>
-          </a:p>
-        </p:txBody>
-      </p:sp>
-      <p:sp>
-        <p:nvSpPr>
-          <p:cNvPr id="8" name="TextBox 7"/>
-          <p:cNvSpPr txBox="1"/>
-          <p:nvPr/>
-        </p:nvSpPr>
-        <p:spPr>
-          <a:xfrm>
-            <a:off x="731520" y="5943600"/>
-            <a:ext cx="10972800" cy="457200"/>
-          </a:xfrm>
-          <a:prstGeom prst="rect">
-            <a:avLst/>
-          </a:prstGeom>
-          <a:noFill/>
-        </p:spPr>
-        <p:txBody>
-          <a:bodyPr wrap="square" lIns="45720" rIns="45720">
-            <a:spAutoFit/>
-          </a:bodyPr>
-          <a:lstStyle/>
-          <a:p>
-            <a:pPr algn="l">
-              <a:lnSpc>
-                <a:spcPct val="115000"/>
-              </a:lnSpc>
-            </a:pPr>
-            <a:r>
-              <a:rPr sz="1400" b="0">
-                <a:solidFill>
-                  <a:srgbClr val="181818"/>
-                </a:solidFill>
-                <a:latin typeface="Pretendard SemiBold"/>
-              </a:rPr>
-              <a:t>Deep learning이 이 곡선을 "평평하게" 만들 수 있을까? → W3 이후</a:t>
-            </a:r>
-          </a:p>
-        </p:txBody>
-      </p:sp>
-    </p:spTree>
-  </p:cSld>
-  <p:clrMapOvr>
-    <a:masterClrMapping/>
-  </p:clrMapOvr>
-</p:sld>
-</file>
-
-<file path=ppt/slides/slide15.xml><?xml version="1.0" encoding="utf-8"?>
-<p:sld xmlns:a="http://schemas.openxmlformats.org/drawingml/2006/main" xmlns:p="http://schemas.openxmlformats.org/presentationml/2006/main" xmlns:r="http://schemas.openxmlformats.org/officeDocument/2006/relationships">
-  <p:cSld>
-    <p:spTree>
-      <p:nvGrpSpPr>
-        <p:cNvPr id="1" name=""/>
-        <p:cNvGrpSpPr/>
-        <p:nvPr/>
-      </p:nvGrpSpPr>
-      <p:grpSpPr/>
-      <p:sp>
-        <p:nvSpPr>
-          <p:cNvPr id="2" name="TextBox 1"/>
-          <p:cNvSpPr txBox="1"/>
-          <p:nvPr/>
-        </p:nvSpPr>
-        <p:spPr>
-          <a:xfrm>
-            <a:off x="457200" y="320040"/>
-            <a:ext cx="11430000" cy="640080"/>
-          </a:xfrm>
-          <a:prstGeom prst="rect">
-            <a:avLst/>
-          </a:prstGeom>
-          <a:noFill/>
-        </p:spPr>
-        <p:txBody>
-          <a:bodyPr wrap="square" lIns="45720" rIns="45720">
-            <a:spAutoFit/>
-          </a:bodyPr>
-          <a:lstStyle/>
-          <a:p>
-            <a:pPr algn="l">
-              <a:lnSpc>
-                <a:spcPct val="115000"/>
-              </a:lnSpc>
-            </a:pPr>
-            <a:r>
-              <a:rPr sz="2800" b="0">
-                <a:solidFill>
-                  <a:srgbClr val="EA851B"/>
-                </a:solidFill>
-                <a:latin typeface="Pretendard Black"/>
-              </a:rPr>
-              <a:t>자기 점검 &amp; W2 예고</a:t>
-            </a:r>
-          </a:p>
-        </p:txBody>
-      </p:sp>
-      <p:sp>
-        <p:nvSpPr>
-          <p:cNvPr id="3" name="Rectangle 2"/>
-          <p:cNvSpPr/>
-          <p:nvPr/>
-        </p:nvSpPr>
-        <p:spPr>
-          <a:xfrm>
-            <a:off x="502920" y="960120"/>
-            <a:ext cx="1097280" cy="54864"/>
-          </a:xfrm>
-          <a:prstGeom prst="rect">
-            <a:avLst/>
-          </a:prstGeom>
-          <a:solidFill>
-            <a:srgbClr val="EA851B"/>
-          </a:solidFill>
-          <a:ln>
-            <a:noFill/>
-          </a:ln>
-        </p:spPr>
-        <p:style>
-          <a:lnRef idx="1">
-            <a:schemeClr val="accent1"/>
-          </a:lnRef>
-          <a:fillRef idx="3">
-            <a:schemeClr val="accent1"/>
-          </a:fillRef>
-          <a:effectRef idx="2">
-            <a:schemeClr val="accent1"/>
-          </a:effectRef>
-          <a:fontRef idx="minor">
-            <a:schemeClr val="lt1"/>
-          </a:fontRef>
-        </p:style>
-        <p:txBody>
-          <a:bodyPr rtlCol="0" anchor="ctr"/>
-          <a:lstStyle/>
-          <a:p>
-            <a:pPr algn="ctr"/>
-          </a:p>
-        </p:txBody>
-      </p:sp>
-      <p:sp>
-        <p:nvSpPr>
-          <p:cNvPr id="4" name="TextBox 3"/>
-          <p:cNvSpPr txBox="1"/>
-          <p:nvPr/>
-        </p:nvSpPr>
-        <p:spPr>
-          <a:xfrm>
-            <a:off x="365760" y="6492240"/>
-            <a:ext cx="7315200" cy="274320"/>
-          </a:xfrm>
-          <a:prstGeom prst="rect">
-            <a:avLst/>
-          </a:prstGeom>
-          <a:noFill/>
-        </p:spPr>
-        <p:txBody>
-          <a:bodyPr wrap="square" lIns="45720" rIns="45720">
-            <a:spAutoFit/>
-          </a:bodyPr>
-          <a:lstStyle/>
-          <a:p>
-            <a:pPr algn="l">
-              <a:lnSpc>
-                <a:spcPct val="115000"/>
-              </a:lnSpc>
-            </a:pPr>
-            <a:r>
-              <a:rPr sz="1000" b="0">
-                <a:solidFill>
-                  <a:srgbClr val="7A7A7A"/>
-                </a:solidFill>
-                <a:latin typeface="Pretendard Medium"/>
-              </a:rPr>
-              <a:t>W1 — 데이터 + Classical · 1조 Advanced</a:t>
-            </a:r>
-          </a:p>
-        </p:txBody>
-      </p:sp>
-      <p:sp>
-        <p:nvSpPr>
-          <p:cNvPr id="5" name="TextBox 4"/>
-          <p:cNvSpPr txBox="1"/>
-          <p:nvPr/>
-        </p:nvSpPr>
-        <p:spPr>
-          <a:xfrm>
-            <a:off x="11155680" y="6492240"/>
-            <a:ext cx="914400" cy="274320"/>
-          </a:xfrm>
-          <a:prstGeom prst="rect">
-            <a:avLst/>
-          </a:prstGeom>
-          <a:noFill/>
-        </p:spPr>
-        <p:txBody>
-          <a:bodyPr wrap="square" lIns="45720" rIns="45720">
-            <a:spAutoFit/>
-          </a:bodyPr>
-          <a:lstStyle/>
-          <a:p>
-            <a:pPr algn="r">
-              <a:lnSpc>
-                <a:spcPct val="115000"/>
-              </a:lnSpc>
-            </a:pPr>
-            <a:r>
-              <a:rPr sz="1000" b="0">
-                <a:solidFill>
-                  <a:srgbClr val="7A7A7A"/>
-                </a:solidFill>
-                <a:latin typeface="Pretendard Medium"/>
-              </a:rPr>
-              <a:t>15 / 15</a:t>
-            </a:r>
-          </a:p>
-        </p:txBody>
-      </p:sp>
-      <p:sp>
-        <p:nvSpPr>
-          <p:cNvPr id="6" name="TextBox 5"/>
-          <p:cNvSpPr txBox="1"/>
-          <p:nvPr/>
-        </p:nvSpPr>
-        <p:spPr>
-          <a:xfrm>
-            <a:off x="548640" y="1280160"/>
-            <a:ext cx="6400800" cy="457200"/>
-          </a:xfrm>
-          <a:prstGeom prst="rect">
-            <a:avLst/>
-          </a:prstGeom>
-          <a:noFill/>
-        </p:spPr>
-        <p:txBody>
-          <a:bodyPr wrap="square" lIns="45720" rIns="45720">
-            <a:spAutoFit/>
-          </a:bodyPr>
-          <a:lstStyle/>
-          <a:p>
-            <a:pPr algn="l">
-              <a:lnSpc>
-                <a:spcPct val="115000"/>
-              </a:lnSpc>
-            </a:pPr>
-            <a:r>
-              <a:rPr sz="2000" b="0">
-                <a:solidFill>
-                  <a:srgbClr val="EA851B"/>
-                </a:solidFill>
-                <a:latin typeface="Pretendard ExtraBold"/>
-              </a:rPr>
-              <a:t>자기 점검</a:t>
-            </a:r>
-          </a:p>
-        </p:txBody>
-      </p:sp>
-      <p:sp>
-        <p:nvSpPr>
-          <p:cNvPr id="7" name="TextBox 6"/>
-          <p:cNvSpPr txBox="1"/>
-          <p:nvPr/>
-        </p:nvSpPr>
-        <p:spPr>
-          <a:xfrm>
-            <a:off x="548640" y="1828800"/>
-            <a:ext cx="6400800" cy="3657600"/>
-          </a:xfrm>
-          <a:prstGeom prst="rect">
-            <a:avLst/>
-          </a:prstGeom>
-          <a:noFill/>
-        </p:spPr>
-        <p:txBody>
-          <a:bodyPr wrap="square">
-            <a:spAutoFit/>
-          </a:bodyPr>
-          <a:lstStyle/>
-          <a:p>
-            <a:pPr>
-              <a:lnSpc>
-                <a:spcPct val="130000"/>
-              </a:lnSpc>
-              <a:spcAft>
-                <a:spcPts val="600"/>
-              </a:spcAft>
-            </a:pPr>
-            <a:r>
-              <a:rPr sz="1500" b="0">
-                <a:solidFill>
-                  <a:srgbClr val="EA851B"/>
-                </a:solidFill>
-                <a:latin typeface="Pretendard ExtraBold"/>
-              </a:rPr>
-              <a:t>•  </a:t>
-            </a:r>
-            <a:r>
-              <a:rPr sz="1500" b="0">
-                <a:solidFill>
-                  <a:srgbClr val="181818"/>
-                </a:solidFill>
-                <a:latin typeface="Pretendard SemiBold"/>
-              </a:rPr>
-              <a:t>normalize_to_float가 DL에 필요한 이유</a:t>
-            </a:r>
-          </a:p>
-          <a:p>
-            <a:pPr>
-              <a:lnSpc>
-                <a:spcPct val="130000"/>
-              </a:lnSpc>
-              <a:spcAft>
-                <a:spcPts val="600"/>
-              </a:spcAft>
-            </a:pPr>
-            <a:r>
-              <a:rPr sz="1500" b="0">
-                <a:solidFill>
-                  <a:srgbClr val="EA851B"/>
-                </a:solidFill>
-                <a:latin typeface="Pretendard ExtraBold"/>
-              </a:rPr>
-              <a:t>•  </a:t>
-            </a:r>
-            <a:r>
-              <a:rPr sz="1500" b="0">
-                <a:solidFill>
-                  <a:srgbClr val="181818"/>
-                </a:solidFill>
-                <a:latin typeface="Pretendard SemiBold"/>
-              </a:rPr>
-              <a:t>Otsu가 binary에서 trivial한 이유</a:t>
-            </a:r>
-          </a:p>
-          <a:p>
-            <a:pPr>
-              <a:lnSpc>
-                <a:spcPct val="130000"/>
-              </a:lnSpc>
-              <a:spcAft>
-                <a:spcPts val="600"/>
-              </a:spcAft>
-            </a:pPr>
-            <a:r>
-              <a:rPr sz="1500" b="0">
-                <a:solidFill>
-                  <a:srgbClr val="EA851B"/>
-                </a:solidFill>
-                <a:latin typeface="Pretendard ExtraBold"/>
-              </a:rPr>
-              <a:t>•  </a:t>
-            </a:r>
-            <a:r>
-              <a:rPr sz="1500" b="0">
-                <a:solidFill>
-                  <a:srgbClr val="181818"/>
-                </a:solidFill>
-                <a:latin typeface="Pretendard SemiBold"/>
-              </a:rPr>
-              <a:t>4 도메인 등방성 순위</a:t>
-            </a:r>
-          </a:p>
-          <a:p>
-            <a:pPr>
-              <a:lnSpc>
-                <a:spcPct val="130000"/>
-              </a:lnSpc>
-              <a:spcAft>
-                <a:spcPts val="600"/>
-              </a:spcAft>
-            </a:pPr>
-            <a:r>
-              <a:rPr sz="1500" b="0">
-                <a:solidFill>
-                  <a:srgbClr val="EA851B"/>
-                </a:solidFill>
-                <a:latin typeface="Pretendard ExtraBold"/>
-              </a:rPr>
-              <a:t>•  </a:t>
-            </a:r>
-            <a:r>
-              <a:rPr sz="1500" b="0">
-                <a:solidFill>
-                  <a:srgbClr val="181818"/>
-                </a:solidFill>
-                <a:latin typeface="Pretendard SemiBold"/>
-              </a:rPr>
-              <a:t>B1·B2 k=5 차이 + 가설</a:t>
-            </a:r>
-          </a:p>
-          <a:p>
-            <a:pPr>
-              <a:lnSpc>
-                <a:spcPct val="130000"/>
-              </a:lnSpc>
-              <a:spcAft>
-                <a:spcPts val="600"/>
-              </a:spcAft>
-            </a:pPr>
-            <a:r>
-              <a:rPr sz="1500" b="0">
-                <a:solidFill>
-                  <a:srgbClr val="EA851B"/>
-                </a:solidFill>
-                <a:latin typeface="Pretendard ExtraBold"/>
-              </a:rPr>
-              <a:t>•  </a:t>
-            </a:r>
-            <a:r>
-              <a:rPr sz="1500" b="0">
-                <a:solidFill>
-                  <a:srgbClr val="181818"/>
-                </a:solidFill>
-                <a:latin typeface="Pretendard SemiBold"/>
-              </a:rPr>
-              <a:t>"왜 DL이 필요한가" — motivation 곡선 해석</a:t>
-            </a:r>
-          </a:p>
-        </p:txBody>
-      </p:sp>
-      <p:sp>
-        <p:nvSpPr>
-          <p:cNvPr id="8" name="TextBox 7"/>
-          <p:cNvSpPr txBox="1"/>
-          <p:nvPr/>
-        </p:nvSpPr>
-        <p:spPr>
-          <a:xfrm>
-            <a:off x="7132320" y="1280160"/>
-            <a:ext cx="5029200" cy="457200"/>
-          </a:xfrm>
-          <a:prstGeom prst="rect">
-            <a:avLst/>
-          </a:prstGeom>
-          <a:noFill/>
-        </p:spPr>
-        <p:txBody>
-          <a:bodyPr wrap="square" lIns="45720" rIns="45720">
-            <a:spAutoFit/>
-          </a:bodyPr>
-          <a:lstStyle/>
-          <a:p>
-            <a:pPr algn="l">
-              <a:lnSpc>
-                <a:spcPct val="115000"/>
-              </a:lnSpc>
-            </a:pPr>
-            <a:r>
-              <a:rPr sz="2000" b="0">
-                <a:solidFill>
-                  <a:srgbClr val="EA851B"/>
-                </a:solidFill>
-                <a:latin typeface="Pretendard ExtraBold"/>
-              </a:rPr>
-              <a:t>W2 — DL 입문 + mini UNet 학습</a:t>
-            </a:r>
-          </a:p>
-        </p:txBody>
-      </p:sp>
-      <p:sp>
-        <p:nvSpPr>
-          <p:cNvPr id="9" name="TextBox 8"/>
-          <p:cNvSpPr txBox="1"/>
-          <p:nvPr/>
-        </p:nvSpPr>
-        <p:spPr>
-          <a:xfrm>
-            <a:off x="7132320" y="1828800"/>
-            <a:ext cx="5029200" cy="3657600"/>
-          </a:xfrm>
-          <a:prstGeom prst="rect">
-            <a:avLst/>
-          </a:prstGeom>
-          <a:noFill/>
-        </p:spPr>
-        <p:txBody>
-          <a:bodyPr wrap="square">
-            <a:spAutoFit/>
-          </a:bodyPr>
-          <a:lstStyle/>
-          <a:p>
-            <a:pPr>
-              <a:lnSpc>
-                <a:spcPct val="130000"/>
-              </a:lnSpc>
-              <a:spcAft>
-                <a:spcPts val="600"/>
-              </a:spcAft>
-            </a:pPr>
-            <a:r>
-              <a:rPr sz="1500" b="0">
-                <a:solidFill>
-                  <a:srgbClr val="EA851B"/>
-                </a:solidFill>
-                <a:latin typeface="Pretendard ExtraBold"/>
-              </a:rPr>
-              <a:t>•  </a:t>
-            </a:r>
-            <a:r>
-              <a:rPr sz="1500" b="0">
-                <a:solidFill>
-                  <a:srgbClr val="181818"/>
-                </a:solidFill>
-                <a:latin typeface="Pretendard SemiBold"/>
-              </a:rPr>
-              <a:t>UNet 구조 + skip-connection 이해</a:t>
-            </a:r>
-          </a:p>
-          <a:p>
-            <a:pPr>
-              <a:lnSpc>
-                <a:spcPct val="130000"/>
-              </a:lnSpc>
-              <a:spcAft>
-                <a:spcPts val="600"/>
-              </a:spcAft>
-            </a:pPr>
-            <a:r>
-              <a:rPr sz="1500" b="0">
-                <a:solidFill>
-                  <a:srgbClr val="EA851B"/>
-                </a:solidFill>
-                <a:latin typeface="Pretendard ExtraBold"/>
-              </a:rPr>
-              <a:t>•  </a:t>
-            </a:r>
-            <a:r>
-              <a:rPr sz="1500" b="0">
-                <a:solidFill>
-                  <a:srgbClr val="181818"/>
-                </a:solidFill>
-                <a:latin typeface="Pretendard SemiBold"/>
-              </a:rPr>
-              <a:t>mini UNet (~100K params) 직접 학습</a:t>
-            </a:r>
-          </a:p>
-          <a:p>
-            <a:pPr>
-              <a:lnSpc>
-                <a:spcPct val="130000"/>
-              </a:lnSpc>
-              <a:spcAft>
-                <a:spcPts val="600"/>
-              </a:spcAft>
-            </a:pPr>
-            <a:r>
-              <a:rPr sz="1500" b="0">
-                <a:solidFill>
-                  <a:srgbClr val="EA851B"/>
-                </a:solidFill>
-                <a:latin typeface="Pretendard ExtraBold"/>
-              </a:rPr>
-              <a:t>•  </a:t>
-            </a:r>
-            <a:r>
-              <a:rPr sz="1500" b="0">
-                <a:solidFill>
-                  <a:srgbClr val="181818"/>
-                </a:solidFill>
-                <a:latin typeface="Pretendard SemiBold"/>
-              </a:rPr>
-              <a:t>학습 시간 옵션: 10분 / 30분 / 60분</a:t>
-            </a:r>
-          </a:p>
-          <a:p>
-            <a:pPr>
-              <a:lnSpc>
-                <a:spcPct val="130000"/>
-              </a:lnSpc>
-              <a:spcAft>
-                <a:spcPts val="600"/>
-              </a:spcAft>
-            </a:pPr>
-            <a:r>
-              <a:rPr sz="1500" b="0">
-                <a:solidFill>
-                  <a:srgbClr val="EA851B"/>
-                </a:solidFill>
-                <a:latin typeface="Pretendard ExtraBold"/>
-              </a:rPr>
-              <a:t>•  </a:t>
-            </a:r>
-            <a:r>
-              <a:rPr sz="1500" b="0">
-                <a:solidFill>
-                  <a:srgbClr val="181818"/>
-                </a:solidFill>
-                <a:latin typeface="Pretendard SemiBold"/>
-              </a:rPr>
-              <a:t>본 W1 baseline vs UNet 직접 비교</a:t>
-            </a:r>
-          </a:p>
-          <a:p>
-            <a:pPr>
-              <a:lnSpc>
-                <a:spcPct val="130000"/>
-              </a:lnSpc>
-              <a:spcAft>
-                <a:spcPts val="600"/>
-              </a:spcAft>
-            </a:pPr>
-            <a:r>
-              <a:rPr sz="1500" b="0">
-                <a:solidFill>
-                  <a:srgbClr val="EA851B"/>
-                </a:solidFill>
-                <a:latin typeface="Pretendard ExtraBold"/>
-              </a:rPr>
-              <a:t>•  </a:t>
-            </a:r>
-            <a:r>
-              <a:rPr sz="1500" b="0">
-                <a:solidFill>
-                  <a:srgbClr val="181818"/>
-                </a:solidFill>
-                <a:latin typeface="Pretendard SemiBold"/>
-              </a:rPr>
-              <a:t>pip install torch torchvision pytorch-msssim</a:t>
-            </a:r>
-          </a:p>
-        </p:txBody>
-      </p:sp>
-      <p:sp>
-        <p:nvSpPr>
-          <p:cNvPr id="10" name="Rounded Rectangle 9"/>
-          <p:cNvSpPr/>
-          <p:nvPr/>
-        </p:nvSpPr>
-        <p:spPr>
-          <a:xfrm>
-            <a:off x="548640" y="5486400"/>
-            <a:ext cx="11612880" cy="731520"/>
-          </a:xfrm>
-          <a:prstGeom prst="roundRect">
-            <a:avLst/>
-          </a:prstGeom>
-          <a:solidFill>
-            <a:srgbClr val="FAF5EE"/>
-          </a:solidFill>
-          <a:ln>
-            <a:noFill/>
-          </a:ln>
-        </p:spPr>
-        <p:style>
-          <a:lnRef idx="1">
-            <a:schemeClr val="accent1"/>
-          </a:lnRef>
-          <a:fillRef idx="3">
-            <a:schemeClr val="accent1"/>
-          </a:fillRef>
-          <a:effectRef idx="2">
-            <a:schemeClr val="accent1"/>
-          </a:effectRef>
-          <a:fontRef idx="minor">
-            <a:schemeClr val="lt1"/>
-          </a:fontRef>
-        </p:style>
-        <p:txBody>
-          <a:bodyPr rtlCol="0" anchor="ctr"/>
-          <a:lstStyle/>
-          <a:p/>
-        </p:txBody>
-      </p:sp>
-      <p:sp>
-        <p:nvSpPr>
-          <p:cNvPr id="11" name="TextBox 10"/>
-          <p:cNvSpPr txBox="1"/>
-          <p:nvPr/>
-        </p:nvSpPr>
-        <p:spPr>
-          <a:xfrm>
-            <a:off x="731520" y="5669280"/>
-            <a:ext cx="11247120" cy="457200"/>
-          </a:xfrm>
-          <a:prstGeom prst="rect">
-            <a:avLst/>
-          </a:prstGeom>
-          <a:noFill/>
-        </p:spPr>
-        <p:txBody>
-          <a:bodyPr wrap="square" lIns="45720" rIns="45720">
-            <a:spAutoFit/>
-          </a:bodyPr>
-          <a:lstStyle/>
-          <a:p>
-            <a:pPr algn="ctr">
-              <a:lnSpc>
-                <a:spcPct val="115000"/>
-              </a:lnSpc>
-            </a:pPr>
-            <a:r>
-              <a:rPr sz="1700" b="0">
-                <a:solidFill>
-                  <a:srgbClr val="EA851B"/>
-                </a:solidFill>
-                <a:latin typeface="Pretendard ExtraBold"/>
-              </a:rPr>
-              <a:t>Q&amp;A — 막힌 부분 / 더 알고 싶은 부분 자유롭게</a:t>
+              <a:t>질문 · 토론 환영</a:t>
             </a:r>
           </a:p>
         </p:txBody>
@@ -5443,7 +4872,7 @@
                 </a:solidFill>
                 <a:latin typeface="Pretendard Black"/>
               </a:rPr>
-              <a:t>신 6주 코스 한눈에 보기</a:t>
+              <a:t>6주 코스 한눈에 보기</a:t>
             </a:r>
           </a:p>
         </p:txBody>
@@ -5525,7 +4954,7 @@
                 </a:solidFill>
                 <a:latin typeface="Pretendard Medium"/>
               </a:rPr>
-              <a:t>W1 — 데이터 + Classical · 1조 Advanced</a:t>
+              <a:t>W1 · 데이터 + Classical · 1조</a:t>
             </a:r>
           </a:p>
         </p:txBody>
@@ -5564,7 +4993,7 @@
                 </a:solidFill>
                 <a:latin typeface="Pretendard Medium"/>
               </a:rPr>
-              <a:t>2 / 15</a:t>
+              <a:t>2 / 14</a:t>
             </a:r>
           </a:p>
         </p:txBody>
@@ -5642,7 +5071,7 @@
                 </a:solidFill>
                 <a:latin typeface="Pretendard SemiBold"/>
               </a:rPr>
-              <a:t>데이터 탐색 + Classical Baseline (구 W1+W2 통합)</a:t>
+              <a:t>데이터 탐색 + Classical Baseline</a:t>
             </a:r>
           </a:p>
         </p:txBody>
@@ -5759,7 +5188,7 @@
                 </a:solidFill>
                 <a:latin typeface="Pretendard SemiBold"/>
               </a:rPr>
-              <a:t>Deep Learning 입문 — mini UNet 학습</a:t>
+              <a:t>Deep Learning 입문 — UNet · pix2pix 구조</a:t>
             </a:r>
           </a:p>
         </p:txBody>
@@ -5798,7 +5227,7 @@
                 </a:solidFill>
                 <a:latin typeface="Pretendard ExtraBold"/>
               </a:rPr>
-              <a:t>다음 주</a:t>
+              <a:t>다음</a:t>
             </a:r>
           </a:p>
         </p:txBody>
@@ -5876,7 +5305,7 @@
                 </a:solidFill>
                 <a:latin typeface="Pretendard SemiBold"/>
               </a:rPr>
-              <a:t>손실 함수 + HPO 입문 (Optuna)</a:t>
+              <a:t>적대적 학습 — pix2pix GAN</a:t>
             </a:r>
           </a:p>
         </p:txBody>
@@ -5954,7 +5383,7 @@
                 </a:solidFill>
                 <a:latin typeface="Pretendard SemiBold"/>
               </a:rPr>
-              <a:t>다른 아키텍처 (SwinUNet vs UNetG vs 3D)</a:t>
+              <a:t>다른 아키텍처 비교 — Transformer · 3D</a:t>
             </a:r>
           </a:p>
         </p:txBody>
@@ -6032,7 +5461,7 @@
                 </a:solidFill>
                 <a:latin typeface="Pretendard SemiBold"/>
               </a:rPr>
-              <a:t>Tri-Axis Aggregation — 본 연구 핵심</a:t>
+              <a:t>한계 극복 기법 — tri-axis · multi-k · 증강</a:t>
             </a:r>
           </a:p>
         </p:txBody>
@@ -6110,7 +5539,7 @@
                 </a:solidFill>
                 <a:latin typeface="Pretendard SemiBold"/>
               </a:rPr>
-              <a:t>Cross-domain (Carbonate) + LBM + 발표</a:t>
+              <a:t>Cross-domain 분석 — Zero-shot · Fine-tune</a:t>
             </a:r>
           </a:p>
         </p:txBody>
@@ -6167,7 +5596,7 @@
                 </a:solidFill>
                 <a:latin typeface="Pretendard Black"/>
               </a:rPr>
-              <a:t>이번 주가 끝나면</a:t>
+              <a:t>이번 주 학습 목표</a:t>
             </a:r>
           </a:p>
         </p:txBody>
@@ -6249,7 +5678,7 @@
                 </a:solidFill>
                 <a:latin typeface="Pretendard Medium"/>
               </a:rPr>
-              <a:t>W1 — 데이터 + Classical · 1조 Advanced</a:t>
+              <a:t>W1 · 데이터 + Classical · 1조</a:t>
             </a:r>
           </a:p>
         </p:txBody>
@@ -6288,7 +5717,7 @@
                 </a:solidFill>
                 <a:latin typeface="Pretendard Medium"/>
               </a:rPr>
-              <a:t>3 / 15</a:t>
+              <a:t>3 / 14</a:t>
             </a:r>
           </a:p>
         </p:txBody>
@@ -6301,8 +5730,8 @@
         </p:nvSpPr>
         <p:spPr>
           <a:xfrm>
-            <a:off x="731520" y="1463040"/>
-            <a:ext cx="10972800" cy="4114800"/>
+            <a:off x="640080" y="1463040"/>
+            <a:ext cx="11155680" cy="4572000"/>
           </a:xfrm>
           <a:prstGeom prst="rect">
             <a:avLst/>
@@ -6339,7 +5768,7 @@
                 </a:solidFill>
                 <a:latin typeface="Pretendard SemiBold"/>
               </a:rPr>
-              <a:t>데이터 I/O + 전처리: .bin 로드, float 정규화, Otsu 임계값</a:t>
+              <a:t>256³ binary 부피 로딩 · 정규화 · 시각화</a:t>
             </a:r>
           </a:p>
           <a:p>
@@ -6367,7 +5796,7 @@
                 </a:solidFill>
                 <a:latin typeface="Pretendard SemiBold"/>
               </a:rPr>
-              <a:t>3D voxel 시각화 — 4 도메인 비교 + 등방성 검증</a:t>
+              <a:t>Otsu 임계값과 binary 데이터에서의 한계 이해</a:t>
             </a:r>
           </a:p>
           <a:p>
@@ -6395,7 +5824,7 @@
                 </a:solidFill>
                 <a:latin typeface="Pretendard SemiBold"/>
               </a:rPr>
-              <a:t>공극률(φ) · 표면적(SA) · SSIM 세 지표로 평가</a:t>
+              <a:t>네 도메인(BB · CastleGate · Bentheimer · Parker)의 통계 비교 + 등방성 검토</a:t>
             </a:r>
           </a:p>
           <a:p>
@@ -6423,7 +5852,7 @@
                 </a:solidFill>
                 <a:latin typeface="Pretendard SemiBold"/>
               </a:rPr>
-              <a:t>Sparse imaging 문제 정의 + Classical baseline (B1 Linear, B2 Cubic)</a:t>
+              <a:t>Sparse imaging 시뮬레이션과 평가 지표 (|Δφ|·|ΔSA|·SSIM)</a:t>
             </a:r>
           </a:p>
           <a:p>
@@ -6451,87 +5880,7 @@
                 </a:solidFill>
                 <a:latin typeface="Pretendard SemiBold"/>
               </a:rPr>
-              <a:t>k sweep으로 "왜 deep learning이 필요한가" 정량 확인</a:t>
-            </a:r>
-          </a:p>
-        </p:txBody>
-      </p:sp>
-      <p:sp>
-        <p:nvSpPr>
-          <p:cNvPr id="7" name="Rounded Rectangle 6"/>
-          <p:cNvSpPr/>
-          <p:nvPr/>
-        </p:nvSpPr>
-        <p:spPr>
-          <a:xfrm>
-            <a:off x="731520" y="5303520"/>
-            <a:ext cx="10698480" cy="822960"/>
-          </a:xfrm>
-          <a:prstGeom prst="roundRect">
-            <a:avLst/>
-          </a:prstGeom>
-          <a:solidFill>
-            <a:srgbClr val="FAF5EE"/>
-          </a:solidFill>
-          <a:ln>
-            <a:noFill/>
-          </a:ln>
-        </p:spPr>
-        <p:style>
-          <a:lnRef idx="1">
-            <a:schemeClr val="accent1"/>
-          </a:lnRef>
-          <a:fillRef idx="3">
-            <a:schemeClr val="accent1"/>
-          </a:fillRef>
-          <a:effectRef idx="2">
-            <a:schemeClr val="accent1"/>
-          </a:effectRef>
-          <a:fontRef idx="minor">
-            <a:schemeClr val="lt1"/>
-          </a:fontRef>
-        </p:style>
-        <p:txBody>
-          <a:bodyPr rtlCol="0" anchor="ctr"/>
-          <a:lstStyle/>
-          <a:p/>
-        </p:txBody>
-      </p:sp>
-      <p:sp>
-        <p:nvSpPr>
-          <p:cNvPr id="8" name="TextBox 7"/>
-          <p:cNvSpPr txBox="1"/>
-          <p:nvPr/>
-        </p:nvSpPr>
-        <p:spPr>
-          <a:xfrm>
-            <a:off x="914400" y="5486400"/>
-            <a:ext cx="10332720" cy="457200"/>
-          </a:xfrm>
-          <a:prstGeom prst="rect">
-            <a:avLst/>
-          </a:prstGeom>
-          <a:noFill/>
-        </p:spPr>
-        <p:txBody>
-          <a:bodyPr wrap="square" lIns="45720" rIns="45720">
-            <a:spAutoFit/>
-          </a:bodyPr>
-          <a:lstStyle/>
-          <a:p>
-            <a:pPr algn="ctr">
-              <a:lnSpc>
-                <a:spcPct val="115000"/>
-              </a:lnSpc>
-            </a:pPr>
-            <a:r>
-              <a:rPr sz="1800" b="0">
-                <a:solidFill>
-                  <a:srgbClr val="EA851B"/>
-                </a:solidFill>
-                <a:latin typeface="Pretendard ExtraBold"/>
-              </a:rPr>
-              <a:t>구 W1+W2를 합쳐서 한 세션에 데이터+classical까지 다룹니다</a:t>
+              <a:t>Linear / Cubic spline 보간 도메인·k 전수 비교</a:t>
             </a:r>
           </a:p>
         </p:txBody>
@@ -6588,7 +5937,7 @@
                 </a:solidFill>
                 <a:latin typeface="Pretendard Black"/>
               </a:rPr>
-              <a:t>본 코스의 학습 방식</a:t>
+              <a:t>데이터 사양</a:t>
             </a:r>
           </a:p>
         </p:txBody>
@@ -6670,7 +6019,7 @@
                 </a:solidFill>
                 <a:latin typeface="Pretendard Medium"/>
               </a:rPr>
-              <a:t>W1 — 데이터 + Classical · 1조 Advanced</a:t>
+              <a:t>W1 · 데이터 + Classical · 1조</a:t>
             </a:r>
           </a:p>
         </p:txBody>
@@ -6709,50 +6058,48 @@
                 </a:solidFill>
                 <a:latin typeface="Pretendard Medium"/>
               </a:rPr>
-              <a:t>4 / 15</a:t>
-            </a:r>
-          </a:p>
-        </p:txBody>
-      </p:sp>
-      <p:sp>
-        <p:nvSpPr>
-          <p:cNvPr id="6" name="Rounded Rectangle 5"/>
-          <p:cNvSpPr/>
-          <p:nvPr/>
-        </p:nvSpPr>
-        <p:spPr>
-          <a:xfrm>
-            <a:off x="731520" y="1463040"/>
-            <a:ext cx="10698480" cy="1371600"/>
-          </a:xfrm>
-          <a:prstGeom prst="roundRect">
-            <a:avLst/>
-          </a:prstGeom>
-          <a:solidFill>
-            <a:srgbClr val="FAF5EE"/>
-          </a:solidFill>
-          <a:ln>
-            <a:noFill/>
-          </a:ln>
-        </p:spPr>
-        <p:style>
-          <a:lnRef idx="1">
-            <a:schemeClr val="accent1"/>
-          </a:lnRef>
-          <a:fillRef idx="3">
-            <a:schemeClr val="accent1"/>
-          </a:fillRef>
-          <a:effectRef idx="2">
-            <a:schemeClr val="accent1"/>
-          </a:effectRef>
-          <a:fontRef idx="minor">
-            <a:schemeClr val="lt1"/>
-          </a:fontRef>
-        </p:style>
-        <p:txBody>
-          <a:bodyPr rtlCol="0" anchor="ctr"/>
-          <a:lstStyle/>
-          <a:p/>
+              <a:t>4 / 14</a:t>
+            </a:r>
+          </a:p>
+        </p:txBody>
+      </p:sp>
+      <p:sp>
+        <p:nvSpPr>
+          <p:cNvPr id="6" name="TextBox 5"/>
+          <p:cNvSpPr txBox="1"/>
+          <p:nvPr/>
+        </p:nvSpPr>
+        <p:spPr>
+          <a:xfrm>
+            <a:off x="731520" y="1371600"/>
+            <a:ext cx="2743200" cy="457200"/>
+          </a:xfrm>
+          <a:prstGeom prst="rect">
+            <a:avLst/>
+          </a:prstGeom>
+          <a:noFill/>
+        </p:spPr>
+        <p:txBody>
+          <a:bodyPr wrap="square" lIns="45720" rIns="45720">
+            <a:spAutoFit/>
+          </a:bodyPr>
+          <a:lstStyle/>
+          <a:p>
+            <a:pPr algn="l">
+              <a:lnSpc>
+                <a:spcPct val="115000"/>
+              </a:lnSpc>
+            </a:pPr>
+            <a:r>
+              <a:rPr sz="1700" b="0">
+                <a:solidFill>
+                  <a:srgbClr val="EA851B"/>
+                </a:solidFill>
+                <a:latin typeface="Pretendard ExtraBold"/>
+              </a:rPr>
+              <a:t>파일 형식</a:t>
+            </a:r>
+          </a:p>
         </p:txBody>
       </p:sp>
       <p:sp>
@@ -6763,8 +6110,8 @@
         </p:nvSpPr>
         <p:spPr>
           <a:xfrm>
-            <a:off x="914400" y="1828800"/>
-            <a:ext cx="10332720" cy="640080"/>
+            <a:off x="3657600" y="1371600"/>
+            <a:ext cx="8229600" cy="457200"/>
           </a:xfrm>
           <a:prstGeom prst="rect">
             <a:avLst/>
@@ -6777,154 +6124,409 @@
           </a:bodyPr>
           <a:lstStyle/>
           <a:p>
-            <a:pPr algn="ctr">
+            <a:pPr algn="l">
               <a:lnSpc>
                 <a:spcPct val="115000"/>
               </a:lnSpc>
             </a:pPr>
             <a:r>
-              <a:rPr sz="1800" b="0">
+              <a:rPr sz="1700" b="0">
+                <a:solidFill>
+                  <a:srgbClr val="181818"/>
+                </a:solidFill>
+                <a:latin typeface="Pretendard SemiBold"/>
+              </a:rPr>
+              <a:t>.bin (raw binary, header 없음)</a:t>
+            </a:r>
+          </a:p>
+        </p:txBody>
+      </p:sp>
+      <p:sp>
+        <p:nvSpPr>
+          <p:cNvPr id="8" name="TextBox 7"/>
+          <p:cNvSpPr txBox="1"/>
+          <p:nvPr/>
+        </p:nvSpPr>
+        <p:spPr>
+          <a:xfrm>
+            <a:off x="731520" y="2011680"/>
+            <a:ext cx="2743200" cy="457200"/>
+          </a:xfrm>
+          <a:prstGeom prst="rect">
+            <a:avLst/>
+          </a:prstGeom>
+          <a:noFill/>
+        </p:spPr>
+        <p:txBody>
+          <a:bodyPr wrap="square" lIns="45720" rIns="45720">
+            <a:spAutoFit/>
+          </a:bodyPr>
+          <a:lstStyle/>
+          <a:p>
+            <a:pPr algn="l">
+              <a:lnSpc>
+                <a:spcPct val="115000"/>
+              </a:lnSpc>
+            </a:pPr>
+            <a:r>
+              <a:rPr sz="1700" b="0">
                 <a:solidFill>
                   <a:srgbClr val="EA851B"/>
                 </a:solidFill>
                 <a:latin typeface="Pretendard ExtraBold"/>
               </a:rPr>
-              <a:t>코드를 직접 짜기보다, 배포된 함수의 인자를 바꿔보며 결과 변화를 관찰</a:t>
-            </a:r>
-          </a:p>
-        </p:txBody>
-      </p:sp>
-      <p:sp>
-        <p:nvSpPr>
-          <p:cNvPr id="8" name="TextBox 7"/>
-          <p:cNvSpPr txBox="1"/>
-          <p:nvPr/>
-        </p:nvSpPr>
-        <p:spPr>
-          <a:xfrm>
-            <a:off x="731520" y="3108960"/>
-            <a:ext cx="10972800" cy="2743200"/>
-          </a:xfrm>
-          <a:prstGeom prst="rect">
-            <a:avLst/>
-          </a:prstGeom>
-          <a:noFill/>
-        </p:spPr>
-        <p:txBody>
-          <a:bodyPr wrap="square">
-            <a:spAutoFit/>
-          </a:bodyPr>
-          <a:lstStyle/>
-          <a:p>
-            <a:pPr>
-              <a:lnSpc>
-                <a:spcPct val="130000"/>
-              </a:lnSpc>
-              <a:spcAft>
-                <a:spcPts val="600"/>
-              </a:spcAft>
-            </a:pPr>
-            <a:r>
-              <a:rPr sz="1900" b="0">
+              <a:t>shape</a:t>
+            </a:r>
+          </a:p>
+        </p:txBody>
+      </p:sp>
+      <p:sp>
+        <p:nvSpPr>
+          <p:cNvPr id="9" name="TextBox 8"/>
+          <p:cNvSpPr txBox="1"/>
+          <p:nvPr/>
+        </p:nvSpPr>
+        <p:spPr>
+          <a:xfrm>
+            <a:off x="3657600" y="2011680"/>
+            <a:ext cx="8229600" cy="457200"/>
+          </a:xfrm>
+          <a:prstGeom prst="rect">
+            <a:avLst/>
+          </a:prstGeom>
+          <a:noFill/>
+        </p:spPr>
+        <p:txBody>
+          <a:bodyPr wrap="square" lIns="45720" rIns="45720">
+            <a:spAutoFit/>
+          </a:bodyPr>
+          <a:lstStyle/>
+          <a:p>
+            <a:pPr algn="l">
+              <a:lnSpc>
+                <a:spcPct val="115000"/>
+              </a:lnSpc>
+            </a:pPr>
+            <a:r>
+              <a:rPr sz="1700" b="0">
+                <a:solidFill>
+                  <a:srgbClr val="181818"/>
+                </a:solidFill>
+                <a:latin typeface="Pretendard SemiBold"/>
+              </a:rPr>
+              <a:t>(256, 256, 256) — 약 1,677만 voxel</a:t>
+            </a:r>
+          </a:p>
+        </p:txBody>
+      </p:sp>
+      <p:sp>
+        <p:nvSpPr>
+          <p:cNvPr id="10" name="TextBox 9"/>
+          <p:cNvSpPr txBox="1"/>
+          <p:nvPr/>
+        </p:nvSpPr>
+        <p:spPr>
+          <a:xfrm>
+            <a:off x="731520" y="2651760"/>
+            <a:ext cx="2743200" cy="457200"/>
+          </a:xfrm>
+          <a:prstGeom prst="rect">
+            <a:avLst/>
+          </a:prstGeom>
+          <a:noFill/>
+        </p:spPr>
+        <p:txBody>
+          <a:bodyPr wrap="square" lIns="45720" rIns="45720">
+            <a:spAutoFit/>
+          </a:bodyPr>
+          <a:lstStyle/>
+          <a:p>
+            <a:pPr algn="l">
+              <a:lnSpc>
+                <a:spcPct val="115000"/>
+              </a:lnSpc>
+            </a:pPr>
+            <a:r>
+              <a:rPr sz="1700" b="0">
                 <a:solidFill>
                   <a:srgbClr val="EA851B"/>
                 </a:solidFill>
                 <a:latin typeface="Pretendard ExtraBold"/>
               </a:rPr>
-              <a:t>•  </a:t>
-            </a:r>
-            <a:r>
-              <a:rPr sz="1900" b="0">
+              <a:t>dtype</a:t>
+            </a:r>
+          </a:p>
+        </p:txBody>
+      </p:sp>
+      <p:sp>
+        <p:nvSpPr>
+          <p:cNvPr id="11" name="TextBox 10"/>
+          <p:cNvSpPr txBox="1"/>
+          <p:nvPr/>
+        </p:nvSpPr>
+        <p:spPr>
+          <a:xfrm>
+            <a:off x="3657600" y="2651760"/>
+            <a:ext cx="8229600" cy="457200"/>
+          </a:xfrm>
+          <a:prstGeom prst="rect">
+            <a:avLst/>
+          </a:prstGeom>
+          <a:noFill/>
+        </p:spPr>
+        <p:txBody>
+          <a:bodyPr wrap="square" lIns="45720" rIns="45720">
+            <a:spAutoFit/>
+          </a:bodyPr>
+          <a:lstStyle/>
+          <a:p>
+            <a:pPr algn="l">
+              <a:lnSpc>
+                <a:spcPct val="115000"/>
+              </a:lnSpc>
+            </a:pPr>
+            <a:r>
+              <a:rPr sz="1700" b="0">
                 <a:solidFill>
                   <a:srgbClr val="181818"/>
                 </a:solidFill>
                 <a:latin typeface="Pretendard SemiBold"/>
               </a:rPr>
-              <a:t>[Try-it!] 박스 — 변수 값을 바꿔보고 차이 관찰</a:t>
-            </a:r>
-          </a:p>
-          <a:p>
-            <a:pPr>
-              <a:lnSpc>
-                <a:spcPct val="130000"/>
-              </a:lnSpc>
-              <a:spcAft>
-                <a:spcPts val="600"/>
-              </a:spcAft>
-            </a:pPr>
-            <a:r>
-              <a:rPr sz="1900" b="0">
+              <a:t>uint8 (값은 0 또는 1)</a:t>
+            </a:r>
+          </a:p>
+        </p:txBody>
+      </p:sp>
+      <p:sp>
+        <p:nvSpPr>
+          <p:cNvPr id="12" name="TextBox 11"/>
+          <p:cNvSpPr txBox="1"/>
+          <p:nvPr/>
+        </p:nvSpPr>
+        <p:spPr>
+          <a:xfrm>
+            <a:off x="731520" y="3291839"/>
+            <a:ext cx="2743200" cy="457200"/>
+          </a:xfrm>
+          <a:prstGeom prst="rect">
+            <a:avLst/>
+          </a:prstGeom>
+          <a:noFill/>
+        </p:spPr>
+        <p:txBody>
+          <a:bodyPr wrap="square" lIns="45720" rIns="45720">
+            <a:spAutoFit/>
+          </a:bodyPr>
+          <a:lstStyle/>
+          <a:p>
+            <a:pPr algn="l">
+              <a:lnSpc>
+                <a:spcPct val="115000"/>
+              </a:lnSpc>
+            </a:pPr>
+            <a:r>
+              <a:rPr sz="1700" b="0">
                 <a:solidFill>
                   <a:srgbClr val="EA851B"/>
                 </a:solidFill>
                 <a:latin typeface="Pretendard ExtraBold"/>
               </a:rPr>
-              <a:t>•  </a:t>
-            </a:r>
-            <a:r>
-              <a:rPr sz="1900" b="0">
+              <a:t>값 의미</a:t>
+            </a:r>
+          </a:p>
+        </p:txBody>
+      </p:sp>
+      <p:sp>
+        <p:nvSpPr>
+          <p:cNvPr id="13" name="TextBox 12"/>
+          <p:cNvSpPr txBox="1"/>
+          <p:nvPr/>
+        </p:nvSpPr>
+        <p:spPr>
+          <a:xfrm>
+            <a:off x="3657600" y="3291839"/>
+            <a:ext cx="8229600" cy="457200"/>
+          </a:xfrm>
+          <a:prstGeom prst="rect">
+            <a:avLst/>
+          </a:prstGeom>
+          <a:noFill/>
+        </p:spPr>
+        <p:txBody>
+          <a:bodyPr wrap="square" lIns="45720" rIns="45720">
+            <a:spAutoFit/>
+          </a:bodyPr>
+          <a:lstStyle/>
+          <a:p>
+            <a:pPr algn="l">
+              <a:lnSpc>
+                <a:spcPct val="115000"/>
+              </a:lnSpc>
+            </a:pPr>
+            <a:r>
+              <a:rPr sz="1700" b="0">
                 <a:solidFill>
                   <a:srgbClr val="181818"/>
                 </a:solidFill>
                 <a:latin typeface="Pretendard SemiBold"/>
               </a:rPr>
-              <a:t>[해석 질문] — 결과를 자신의 말로 답</a:t>
-            </a:r>
-          </a:p>
-          <a:p>
-            <a:pPr>
-              <a:lnSpc>
-                <a:spcPct val="130000"/>
-              </a:lnSpc>
-              <a:spcAft>
-                <a:spcPts val="600"/>
-              </a:spcAft>
-            </a:pPr>
-            <a:r>
-              <a:rPr sz="1900" b="0">
+              <a:t>0 = solid (암석), 1 = pore (공극)</a:t>
+            </a:r>
+          </a:p>
+        </p:txBody>
+      </p:sp>
+      <p:sp>
+        <p:nvSpPr>
+          <p:cNvPr id="14" name="TextBox 13"/>
+          <p:cNvSpPr txBox="1"/>
+          <p:nvPr/>
+        </p:nvSpPr>
+        <p:spPr>
+          <a:xfrm>
+            <a:off x="731520" y="3931920"/>
+            <a:ext cx="2743200" cy="457200"/>
+          </a:xfrm>
+          <a:prstGeom prst="rect">
+            <a:avLst/>
+          </a:prstGeom>
+          <a:noFill/>
+        </p:spPr>
+        <p:txBody>
+          <a:bodyPr wrap="square" lIns="45720" rIns="45720">
+            <a:spAutoFit/>
+          </a:bodyPr>
+          <a:lstStyle/>
+          <a:p>
+            <a:pPr algn="l">
+              <a:lnSpc>
+                <a:spcPct val="115000"/>
+              </a:lnSpc>
+            </a:pPr>
+            <a:r>
+              <a:rPr sz="1700" b="0">
                 <a:solidFill>
                   <a:srgbClr val="EA851B"/>
                 </a:solidFill>
                 <a:latin typeface="Pretendard ExtraBold"/>
               </a:rPr>
-              <a:t>•  </a:t>
-            </a:r>
-            <a:r>
-              <a:rPr sz="1900" b="0">
+              <a:t>voxel 크기</a:t>
+            </a:r>
+          </a:p>
+        </p:txBody>
+      </p:sp>
+      <p:sp>
+        <p:nvSpPr>
+          <p:cNvPr id="15" name="TextBox 14"/>
+          <p:cNvSpPr txBox="1"/>
+          <p:nvPr/>
+        </p:nvSpPr>
+        <p:spPr>
+          <a:xfrm>
+            <a:off x="3657600" y="3931920"/>
+            <a:ext cx="8229600" cy="457200"/>
+          </a:xfrm>
+          <a:prstGeom prst="rect">
+            <a:avLst/>
+          </a:prstGeom>
+          <a:noFill/>
+        </p:spPr>
+        <p:txBody>
+          <a:bodyPr wrap="square" lIns="45720" rIns="45720">
+            <a:spAutoFit/>
+          </a:bodyPr>
+          <a:lstStyle/>
+          <a:p>
+            <a:pPr algn="l">
+              <a:lnSpc>
+                <a:spcPct val="115000"/>
+              </a:lnSpc>
+            </a:pPr>
+            <a:r>
+              <a:rPr sz="1700" b="0">
                 <a:solidFill>
                   <a:srgbClr val="181818"/>
                 </a:solidFill>
                 <a:latin typeface="Pretendard SemiBold"/>
               </a:rPr>
-              <a:t>[심화] — 추가 분석 트랙</a:t>
-            </a:r>
-          </a:p>
-          <a:p>
-            <a:pPr>
-              <a:lnSpc>
-                <a:spcPct val="130000"/>
-              </a:lnSpc>
-              <a:spcAft>
-                <a:spcPts val="600"/>
-              </a:spcAft>
-            </a:pPr>
-            <a:r>
-              <a:rPr sz="1900" b="0">
+              <a:t>2.25 μm · 한 부피 ≈ 0.58 mm³</a:t>
+            </a:r>
+          </a:p>
+        </p:txBody>
+      </p:sp>
+      <p:sp>
+        <p:nvSpPr>
+          <p:cNvPr id="16" name="TextBox 15"/>
+          <p:cNvSpPr txBox="1"/>
+          <p:nvPr/>
+        </p:nvSpPr>
+        <p:spPr>
+          <a:xfrm>
+            <a:off x="731520" y="4572000"/>
+            <a:ext cx="2743200" cy="457200"/>
+          </a:xfrm>
+          <a:prstGeom prst="rect">
+            <a:avLst/>
+          </a:prstGeom>
+          <a:noFill/>
+        </p:spPr>
+        <p:txBody>
+          <a:bodyPr wrap="square" lIns="45720" rIns="45720">
+            <a:spAutoFit/>
+          </a:bodyPr>
+          <a:lstStyle/>
+          <a:p>
+            <a:pPr algn="l">
+              <a:lnSpc>
+                <a:spcPct val="115000"/>
+              </a:lnSpc>
+            </a:pPr>
+            <a:r>
+              <a:rPr sz="1700" b="0">
                 <a:solidFill>
                   <a:srgbClr val="EA851B"/>
                 </a:solidFill>
                 <a:latin typeface="Pretendard ExtraBold"/>
               </a:rPr>
-              <a:t>•  </a:t>
-            </a:r>
-            <a:r>
-              <a:rPr sz="1900" b="0">
+              <a:t>도메인 수</a:t>
+            </a:r>
+          </a:p>
+        </p:txBody>
+      </p:sp>
+      <p:sp>
+        <p:nvSpPr>
+          <p:cNvPr id="17" name="TextBox 16"/>
+          <p:cNvSpPr txBox="1"/>
+          <p:nvPr/>
+        </p:nvSpPr>
+        <p:spPr>
+          <a:xfrm>
+            <a:off x="3657600" y="4572000"/>
+            <a:ext cx="8229600" cy="457200"/>
+          </a:xfrm>
+          <a:prstGeom prst="rect">
+            <a:avLst/>
+          </a:prstGeom>
+          <a:noFill/>
+        </p:spPr>
+        <p:txBody>
+          <a:bodyPr wrap="square" lIns="45720" rIns="45720">
+            <a:spAutoFit/>
+          </a:bodyPr>
+          <a:lstStyle/>
+          <a:p>
+            <a:pPr algn="l">
+              <a:lnSpc>
+                <a:spcPct val="115000"/>
+              </a:lnSpc>
+            </a:pPr>
+            <a:r>
+              <a:rPr sz="1700" b="0">
                 <a:solidFill>
                   <a:srgbClr val="181818"/>
                 </a:solidFill>
                 <a:latin typeface="Pretendard SemiBold"/>
               </a:rPr>
-              <a:t>탐구 과제 — 노트북 안에서 코드 수정하며 답 만들기</a:t>
+              <a:t>4개 (BB · CastleGate · Bentheimer · Parker)</a:t>
             </a:r>
           </a:p>
         </p:txBody>
@@ -6949,20 +6551,59 @@
       <p:grpSpPr/>
       <p:sp>
         <p:nvSpPr>
-          <p:cNvPr id="2" name="Rectangle 1"/>
+          <p:cNvPr id="2" name="TextBox 1"/>
+          <p:cNvSpPr txBox="1"/>
+          <p:nvPr/>
+        </p:nvSpPr>
+        <p:spPr>
+          <a:xfrm>
+            <a:off x="457200" y="320040"/>
+            <a:ext cx="11430000" cy="640080"/>
+          </a:xfrm>
+          <a:prstGeom prst="rect">
+            <a:avLst/>
+          </a:prstGeom>
+          <a:noFill/>
+        </p:spPr>
+        <p:txBody>
+          <a:bodyPr wrap="square" lIns="45720" rIns="45720">
+            <a:spAutoFit/>
+          </a:bodyPr>
+          <a:lstStyle/>
+          <a:p>
+            <a:pPr algn="l">
+              <a:lnSpc>
+                <a:spcPct val="115000"/>
+              </a:lnSpc>
+            </a:pPr>
+            <a:r>
+              <a:rPr sz="2800" b="0">
+                <a:solidFill>
+                  <a:srgbClr val="EA851B"/>
+                </a:solidFill>
+                <a:latin typeface="Pretendard Black"/>
+              </a:rPr>
+              <a:t>4개 도메인 — 같은 z=128 슬라이스</a:t>
+            </a:r>
+          </a:p>
+        </p:txBody>
+      </p:sp>
+      <p:sp>
+        <p:nvSpPr>
+          <p:cNvPr id="3" name="Rectangle 2"/>
           <p:cNvSpPr/>
           <p:nvPr/>
         </p:nvSpPr>
         <p:spPr>
           <a:xfrm>
-            <a:off x="0" y="0"/>
-            <a:ext cx="12191695" cy="6858000"/>
+            <a:off x="502920" y="960120"/>
+            <a:ext cx="1097280" cy="54864"/>
           </a:xfrm>
           <a:prstGeom prst="rect">
             <a:avLst/>
           </a:prstGeom>
           <a:solidFill>
-            <a:srgbClr val="FAF5EE"/>
+            <a:srgbClr val="EA851B"/>
           </a:solidFill>
           <a:ln>
             <a:noFill/>
@@ -6985,90 +6626,14 @@
         <p:txBody>
           <a:bodyPr rtlCol="0" anchor="ctr"/>
           <a:lstStyle/>
-          <a:p/>
-        </p:txBody>
-      </p:sp>
-      <p:sp>
-        <p:nvSpPr>
-          <p:cNvPr id="3" name="TextBox 2"/>
-          <p:cNvSpPr txBox="1"/>
-          <p:nvPr/>
-        </p:nvSpPr>
-        <p:spPr>
-          <a:xfrm>
-            <a:off x="731520" y="2286000"/>
-            <a:ext cx="10058400" cy="548640"/>
-          </a:xfrm>
-          <a:prstGeom prst="rect">
-            <a:avLst/>
-          </a:prstGeom>
-          <a:noFill/>
-        </p:spPr>
-        <p:txBody>
-          <a:bodyPr wrap="square" lIns="45720" rIns="45720">
-            <a:spAutoFit/>
-          </a:bodyPr>
-          <a:lstStyle/>
-          <a:p>
-            <a:pPr algn="l">
-              <a:lnSpc>
-                <a:spcPct val="115000"/>
-              </a:lnSpc>
-            </a:pPr>
-            <a:r>
-              <a:rPr sz="2000" b="0">
-                <a:solidFill>
-                  <a:srgbClr val="EA851B"/>
-                </a:solidFill>
-                <a:latin typeface="Pretendard ExtraBold"/>
-              </a:rPr>
-              <a:t>Section 1</a:t>
-            </a:r>
+          <a:p>
+            <a:pPr algn="ctr"/>
           </a:p>
         </p:txBody>
       </p:sp>
       <p:sp>
         <p:nvSpPr>
           <p:cNvPr id="4" name="TextBox 3"/>
-          <p:cNvSpPr txBox="1"/>
-          <p:nvPr/>
-        </p:nvSpPr>
-        <p:spPr>
-          <a:xfrm>
-            <a:off x="731520" y="2834640"/>
-            <a:ext cx="10058400" cy="1371600"/>
-          </a:xfrm>
-          <a:prstGeom prst="rect">
-            <a:avLst/>
-          </a:prstGeom>
-          <a:noFill/>
-        </p:spPr>
-        <p:txBody>
-          <a:bodyPr wrap="square" lIns="45720" rIns="45720">
-            <a:spAutoFit/>
-          </a:bodyPr>
-          <a:lstStyle/>
-          <a:p>
-            <a:pPr algn="l">
-              <a:lnSpc>
-                <a:spcPct val="115000"/>
-              </a:lnSpc>
-            </a:pPr>
-            <a:r>
-              <a:rPr sz="4400" b="0">
-                <a:solidFill>
-                  <a:srgbClr val="181818"/>
-                </a:solidFill>
-                <a:latin typeface="Pretendard Black"/>
-              </a:rPr>
-              <a:t>데이터 + 전처리</a:t>
-            </a:r>
-          </a:p>
-        </p:txBody>
-      </p:sp>
-      <p:sp>
-        <p:nvSpPr>
-          <p:cNvPr id="5" name="TextBox 4"/>
           <p:cNvSpPr txBox="1"/>
           <p:nvPr/>
         </p:nvSpPr>
@@ -7100,14 +6665,14 @@
                 </a:solidFill>
                 <a:latin typeface="Pretendard Medium"/>
               </a:rPr>
-              <a:t>W1 — 데이터 + Classical · 1조 Advanced</a:t>
-            </a:r>
-          </a:p>
-        </p:txBody>
-      </p:sp>
-      <p:sp>
-        <p:nvSpPr>
-          <p:cNvPr id="6" name="TextBox 5"/>
+              <a:t>W1 · 데이터 + Classical · 1조</a:t>
+            </a:r>
+          </a:p>
+        </p:txBody>
+      </p:sp>
+      <p:sp>
+        <p:nvSpPr>
+          <p:cNvPr id="5" name="TextBox 4"/>
           <p:cNvSpPr txBox="1"/>
           <p:nvPr/>
         </p:nvSpPr>
@@ -7139,7 +6704,70 @@
                 </a:solidFill>
                 <a:latin typeface="Pretendard Medium"/>
               </a:rPr>
-              <a:t>5 / 15</a:t>
+              <a:t>5 / 14</a:t>
+            </a:r>
+          </a:p>
+        </p:txBody>
+      </p:sp>
+      <p:pic>
+        <p:nvPicPr>
+          <p:cNvPr id="6" name="Picture 5" descr="fig1_domains.png"/>
+          <p:cNvPicPr>
+            <a:picLocks noChangeAspect="1"/>
+          </p:cNvPicPr>
+          <p:nvPr/>
+        </p:nvPicPr>
+        <p:blipFill>
+          <a:blip r:embed="rId2"/>
+          <a:stretch>
+            <a:fillRect/>
+          </a:stretch>
+        </p:blipFill>
+        <p:spPr>
+          <a:xfrm>
+            <a:off x="274320" y="1280160"/>
+            <a:ext cx="11612880" cy="3104728"/>
+          </a:xfrm>
+          <a:prstGeom prst="rect">
+            <a:avLst/>
+          </a:prstGeom>
+        </p:spPr>
+      </p:pic>
+      <p:sp>
+        <p:nvSpPr>
+          <p:cNvPr id="7" name="TextBox 6"/>
+          <p:cNvSpPr txBox="1"/>
+          <p:nvPr/>
+        </p:nvSpPr>
+        <p:spPr>
+          <a:xfrm>
+            <a:off x="731520" y="5486400"/>
+            <a:ext cx="10972800" cy="457200"/>
+          </a:xfrm>
+          <a:prstGeom prst="rect">
+            <a:avLst/>
+          </a:prstGeom>
+          <a:noFill/>
+        </p:spPr>
+        <p:txBody>
+          <a:bodyPr wrap="square" lIns="45720" rIns="45720">
+            <a:spAutoFit/>
+          </a:bodyPr>
+          <a:lstStyle/>
+          <a:p>
+            <a:pPr algn="l">
+              <a:lnSpc>
+                <a:spcPct val="115000"/>
+              </a:lnSpc>
+            </a:pPr>
+            <a:r>
+              <a:rPr sz="1500" b="0">
+                <a:solidFill>
+                  <a:srgbClr val="181818"/>
+                </a:solidFill>
+                <a:latin typeface="Pretendard SemiBold"/>
+              </a:rPr>
+              <a:t>도메인마다 공극률 · 구조 · 균질성이 다름. W6 cross-domain 분석의 사전 검토.</a:t>
             </a:r>
           </a:p>
         </p:txBody>
@@ -7196,7 +6824,7 @@
                 </a:solidFill>
                 <a:latin typeface="Pretendard Black"/>
               </a:rPr>
-              <a:t>1.1  Voxel vs Pixel</a:t>
+              <a:t>같은 부피의 세 축 슬라이스 (BB)</a:t>
             </a:r>
           </a:p>
         </p:txBody>
@@ -7278,7 +6906,7 @@
                 </a:solidFill>
                 <a:latin typeface="Pretendard Medium"/>
               </a:rPr>
-              <a:t>W1 — 데이터 + Classical · 1조 Advanced</a:t>
+              <a:t>W1 · 데이터 + Classical · 1조</a:t>
             </a:r>
           </a:p>
         </p:txBody>
@@ -7317,21 +6945,45 @@
                 </a:solidFill>
                 <a:latin typeface="Pretendard Medium"/>
               </a:rPr>
-              <a:t>6 / 15</a:t>
-            </a:r>
-          </a:p>
-        </p:txBody>
-      </p:sp>
-      <p:sp>
-        <p:nvSpPr>
-          <p:cNvPr id="6" name="TextBox 5"/>
-          <p:cNvSpPr txBox="1"/>
-          <p:nvPr/>
-        </p:nvSpPr>
-        <p:spPr>
-          <a:xfrm>
-            <a:off x="548640" y="1463040"/>
-            <a:ext cx="5486400" cy="457200"/>
+              <a:t>6 / 14</a:t>
+            </a:r>
+          </a:p>
+        </p:txBody>
+      </p:sp>
+      <p:pic>
+        <p:nvPicPr>
+          <p:cNvPr id="6" name="Picture 5" descr="fig2_three_axes.png"/>
+          <p:cNvPicPr>
+            <a:picLocks noChangeAspect="1"/>
+          </p:cNvPicPr>
+          <p:nvPr/>
+        </p:nvPicPr>
+        <p:blipFill>
+          <a:blip r:embed="rId2"/>
+          <a:stretch>
+            <a:fillRect/>
+          </a:stretch>
+        </p:blipFill>
+        <p:spPr>
+          <a:xfrm>
+            <a:off x="457200" y="1280160"/>
+            <a:ext cx="11247120" cy="4004712"/>
+          </a:xfrm>
+          <a:prstGeom prst="rect">
+            <a:avLst/>
+          </a:prstGeom>
+        </p:spPr>
+      </p:pic>
+      <p:sp>
+        <p:nvSpPr>
+          <p:cNvPr id="7" name="TextBox 6"/>
+          <p:cNvSpPr txBox="1"/>
+          <p:nvPr/>
+        </p:nvSpPr>
+        <p:spPr>
+          <a:xfrm>
+            <a:off x="731520" y="5486400"/>
+            <a:ext cx="10972800" cy="457200"/>
           </a:xfrm>
           <a:prstGeom prst="rect">
             <a:avLst/>
@@ -7350,120 +7002,13 @@
               </a:lnSpc>
             </a:pPr>
             <a:r>
-              <a:rPr sz="2200" b="0">
-                <a:solidFill>
-                  <a:srgbClr val="EA851B"/>
-                </a:solidFill>
-                <a:latin typeface="Pretendard Black"/>
-              </a:rPr>
-              <a:t>2D 이미지 (Pixel)</a:t>
-            </a:r>
-          </a:p>
-        </p:txBody>
-      </p:sp>
-      <p:sp>
-        <p:nvSpPr>
-          <p:cNvPr id="7" name="TextBox 6"/>
-          <p:cNvSpPr txBox="1"/>
-          <p:nvPr/>
-        </p:nvSpPr>
-        <p:spPr>
-          <a:xfrm>
-            <a:off x="548640" y="2011680"/>
-            <a:ext cx="5486400" cy="4572000"/>
-          </a:xfrm>
-          <a:prstGeom prst="rect">
-            <a:avLst/>
-          </a:prstGeom>
-          <a:noFill/>
-        </p:spPr>
-        <p:txBody>
-          <a:bodyPr wrap="square">
-            <a:spAutoFit/>
-          </a:bodyPr>
-          <a:lstStyle/>
-          <a:p>
-            <a:pPr>
-              <a:lnSpc>
-                <a:spcPct val="130000"/>
-              </a:lnSpc>
-              <a:spcAft>
-                <a:spcPts val="600"/>
-              </a:spcAft>
-            </a:pPr>
-            <a:r>
-              <a:rPr sz="1800" b="0">
-                <a:solidFill>
-                  <a:srgbClr val="EA851B"/>
-                </a:solidFill>
-                <a:latin typeface="Pretendard ExtraBold"/>
-              </a:rPr>
-              <a:t>•  </a:t>
-            </a:r>
-            <a:r>
-              <a:rPr sz="1800" b="0">
+              <a:rPr sz="1500" b="0">
                 <a:solidFill>
                   <a:srgbClr val="181818"/>
                 </a:solidFill>
                 <a:latin typeface="Pretendard SemiBold"/>
               </a:rPr>
-              <a:t>Pixel = Picture Element</a:t>
-            </a:r>
-          </a:p>
-          <a:p>
-            <a:pPr>
-              <a:lnSpc>
-                <a:spcPct val="130000"/>
-              </a:lnSpc>
-              <a:spcAft>
-                <a:spcPts val="600"/>
-              </a:spcAft>
-            </a:pPr>
-            <a:r>
-              <a:rPr sz="1800" b="0">
-                <a:solidFill>
-                  <a:srgbClr val="EA851B"/>
-                </a:solidFill>
-                <a:latin typeface="Pretendard ExtraBold"/>
-              </a:rPr>
-              <a:t>•  </a:t>
-            </a:r>
-            <a:r>
-              <a:rPr sz="1800" b="0">
-                <a:solidFill>
-                  <a:srgbClr val="181818"/>
-                </a:solidFill>
-                <a:latin typeface="Pretendard SemiBold"/>
-              </a:rPr>
-              <a:t>2차원 격자 (높이 × 너비)</a:t>
-            </a:r>
-          </a:p>
-          <a:p>
-            <a:pPr>
-              <a:lnSpc>
-                <a:spcPct val="130000"/>
-              </a:lnSpc>
-              <a:spcAft>
-                <a:spcPts val="600"/>
-              </a:spcAft>
-            </a:pPr>
-            <a:r>
-              <a:rPr sz="1800" b="0">
-                <a:solidFill>
-                  <a:srgbClr val="EA851B"/>
-                </a:solidFill>
-                <a:latin typeface="Pretendard ExtraBold"/>
-              </a:rPr>
-              <a:t>•  </a:t>
-            </a:r>
-            <a:r>
-              <a:rPr sz="1800" b="0">
-                <a:solidFill>
-                  <a:srgbClr val="181818"/>
-                </a:solidFill>
-                <a:latin typeface="Pretendard SemiBold"/>
-              </a:rPr>
-              <a:t>numpy: img[y, x]</a:t>
+              <a:t>동일 부피를 z · y · x 세 직교 평면으로 자른 결과. 통계는 유사하지만 세부 패턴은 서로 다름.</a:t>
             </a:r>
           </a:p>
         </p:txBody>
@@ -7476,8 +7021,8 @@
         </p:nvSpPr>
         <p:spPr>
           <a:xfrm>
-            <a:off x="6400800" y="1463040"/>
-            <a:ext cx="5486400" cy="457200"/>
+            <a:off x="731520" y="5943600"/>
+            <a:ext cx="10972800" cy="457200"/>
           </a:xfrm>
           <a:prstGeom prst="rect">
             <a:avLst/>
@@ -7496,200 +7041,13 @@
               </a:lnSpc>
             </a:pPr>
             <a:r>
-              <a:rPr sz="2200" b="0">
-                <a:solidFill>
-                  <a:srgbClr val="EA851B"/>
-                </a:solidFill>
-                <a:latin typeface="Pretendard Black"/>
-              </a:rPr>
-              <a:t>3D 부피 (Voxel)</a:t>
-            </a:r>
-          </a:p>
-        </p:txBody>
-      </p:sp>
-      <p:sp>
-        <p:nvSpPr>
-          <p:cNvPr id="9" name="TextBox 8"/>
-          <p:cNvSpPr txBox="1"/>
-          <p:nvPr/>
-        </p:nvSpPr>
-        <p:spPr>
-          <a:xfrm>
-            <a:off x="6400800" y="2011680"/>
-            <a:ext cx="5486400" cy="4572000"/>
-          </a:xfrm>
-          <a:prstGeom prst="rect">
-            <a:avLst/>
-          </a:prstGeom>
-          <a:noFill/>
-        </p:spPr>
-        <p:txBody>
-          <a:bodyPr wrap="square">
-            <a:spAutoFit/>
-          </a:bodyPr>
-          <a:lstStyle/>
-          <a:p>
-            <a:pPr>
-              <a:lnSpc>
-                <a:spcPct val="130000"/>
-              </a:lnSpc>
-              <a:spcAft>
-                <a:spcPts val="600"/>
-              </a:spcAft>
-            </a:pPr>
-            <a:r>
-              <a:rPr sz="1800" b="0">
-                <a:solidFill>
-                  <a:srgbClr val="EA851B"/>
-                </a:solidFill>
-                <a:latin typeface="Pretendard ExtraBold"/>
-              </a:rPr>
-              <a:t>•  </a:t>
-            </a:r>
-            <a:r>
-              <a:rPr sz="1800" b="0">
-                <a:solidFill>
-                  <a:srgbClr val="181818"/>
-                </a:solidFill>
-                <a:latin typeface="Pretendard SemiBold"/>
-              </a:rPr>
-              <a:t>Voxel = Volume Element</a:t>
-            </a:r>
-          </a:p>
-          <a:p>
-            <a:pPr>
-              <a:lnSpc>
-                <a:spcPct val="130000"/>
-              </a:lnSpc>
-              <a:spcAft>
-                <a:spcPts val="600"/>
-              </a:spcAft>
-            </a:pPr>
-            <a:r>
-              <a:rPr sz="1800" b="0">
-                <a:solidFill>
-                  <a:srgbClr val="EA851B"/>
-                </a:solidFill>
-                <a:latin typeface="Pretendard ExtraBold"/>
-              </a:rPr>
-              <a:t>•  </a:t>
-            </a:r>
-            <a:r>
-              <a:rPr sz="1800" b="0">
-                <a:solidFill>
-                  <a:srgbClr val="181818"/>
-                </a:solidFill>
-                <a:latin typeface="Pretendard SemiBold"/>
-              </a:rPr>
-              <a:t>3차원 (Z × Y × X), 본 W1: 256×256×256</a:t>
-            </a:r>
-          </a:p>
-          <a:p>
-            <a:pPr>
-              <a:lnSpc>
-                <a:spcPct val="130000"/>
-              </a:lnSpc>
-              <a:spcAft>
-                <a:spcPts val="600"/>
-              </a:spcAft>
-            </a:pPr>
-            <a:r>
-              <a:rPr sz="1800" b="0">
-                <a:solidFill>
-                  <a:srgbClr val="EA851B"/>
-                </a:solidFill>
-                <a:latin typeface="Pretendard ExtraBold"/>
-              </a:rPr>
-              <a:t>•  </a:t>
-            </a:r>
-            <a:r>
-              <a:rPr sz="1800" b="0">
-                <a:solidFill>
-                  <a:srgbClr val="181818"/>
-                </a:solidFill>
-                <a:latin typeface="Pretendard SemiBold"/>
-              </a:rPr>
-              <a:t>numpy: vol[z, y, x]</a:t>
-            </a:r>
-          </a:p>
-        </p:txBody>
-      </p:sp>
-      <p:sp>
-        <p:nvSpPr>
-          <p:cNvPr id="10" name="Rounded Rectangle 9"/>
-          <p:cNvSpPr/>
-          <p:nvPr/>
-        </p:nvSpPr>
-        <p:spPr>
-          <a:xfrm>
-            <a:off x="731520" y="5212080"/>
-            <a:ext cx="10698480" cy="914400"/>
-          </a:xfrm>
-          <a:prstGeom prst="roundRect">
-            <a:avLst/>
-          </a:prstGeom>
-          <a:solidFill>
-            <a:srgbClr val="FAF5EE"/>
-          </a:solidFill>
-          <a:ln>
-            <a:noFill/>
-          </a:ln>
-        </p:spPr>
-        <p:style>
-          <a:lnRef idx="1">
-            <a:schemeClr val="accent1"/>
-          </a:lnRef>
-          <a:fillRef idx="3">
-            <a:schemeClr val="accent1"/>
-          </a:fillRef>
-          <a:effectRef idx="2">
-            <a:schemeClr val="accent1"/>
-          </a:effectRef>
-          <a:fontRef idx="minor">
-            <a:schemeClr val="lt1"/>
-          </a:fontRef>
-        </p:style>
-        <p:txBody>
-          <a:bodyPr rtlCol="0" anchor="ctr"/>
-          <a:lstStyle/>
-          <a:p/>
-        </p:txBody>
-      </p:sp>
-      <p:sp>
-        <p:nvSpPr>
-          <p:cNvPr id="11" name="TextBox 10"/>
-          <p:cNvSpPr txBox="1"/>
-          <p:nvPr/>
-        </p:nvSpPr>
-        <p:spPr>
-          <a:xfrm>
-            <a:off x="914400" y="5440680"/>
-            <a:ext cx="10332720" cy="457200"/>
-          </a:xfrm>
-          <a:prstGeom prst="rect">
-            <a:avLst/>
-          </a:prstGeom>
-          <a:noFill/>
-        </p:spPr>
-        <p:txBody>
-          <a:bodyPr wrap="square" lIns="45720" rIns="45720">
-            <a:spAutoFit/>
-          </a:bodyPr>
-          <a:lstStyle/>
-          <a:p>
-            <a:pPr algn="ctr">
-              <a:lnSpc>
-                <a:spcPct val="115000"/>
-              </a:lnSpc>
-            </a:pPr>
-            <a:r>
-              <a:rPr sz="1800" b="0">
-                <a:solidFill>
-                  <a:srgbClr val="EA851B"/>
-                </a:solidFill>
-                <a:latin typeface="Pretendard ExtraBold"/>
-              </a:rPr>
-              <a:t>한 voxel 한 변 = 2.25 μm</a:t>
+              <a:rPr sz="1400" b="0">
+                <a:solidFill>
+                  <a:srgbClr val="7A7A7A"/>
+                </a:solidFill>
+                <a:latin typeface="Pretendard Medium"/>
+              </a:rPr>
+              <a:t>→ W5의 tri-axis 기법은 세 축의 보완적 정보를 융합해 2.5D 방식으로 3D 부피를 복원합니다.</a:t>
             </a:r>
           </a:p>
         </p:txBody>
@@ -7746,7 +7104,7 @@
                 </a:solidFill>
                 <a:latin typeface="Pretendard Black"/>
               </a:rPr>
-              <a:t>1.2  4 도메인 비교 — 같은 z=128 슬라이스</a:t>
+              <a:t>데이터 전처리 — 정규화 + Otsu</a:t>
             </a:r>
           </a:p>
         </p:txBody>
@@ -7828,7 +7186,7 @@
                 </a:solidFill>
                 <a:latin typeface="Pretendard Medium"/>
               </a:rPr>
-              <a:t>W1 — 데이터 + Classical · 1조 Advanced</a:t>
+              <a:t>W1 · 데이터 + Classical · 1조</a:t>
             </a:r>
           </a:p>
         </p:txBody>
@@ -7867,70 +7225,142 @@
                 </a:solidFill>
                 <a:latin typeface="Pretendard Medium"/>
               </a:rPr>
-              <a:t>7 / 15</a:t>
-            </a:r>
-          </a:p>
-        </p:txBody>
-      </p:sp>
-      <p:pic>
-        <p:nvPicPr>
-          <p:cNvPr id="6" name="Picture 5" descr="fig1_domains.png"/>
-          <p:cNvPicPr>
-            <a:picLocks noChangeAspect="1"/>
-          </p:cNvPicPr>
-          <p:nvPr/>
-        </p:nvPicPr>
-        <p:blipFill>
-          <a:blip r:embed="rId2"/>
-          <a:stretch>
-            <a:fillRect/>
-          </a:stretch>
-        </p:blipFill>
-        <p:spPr>
-          <a:xfrm>
-            <a:off x="274320" y="1280160"/>
-            <a:ext cx="11612880" cy="3104728"/>
-          </a:xfrm>
-          <a:prstGeom prst="rect">
-            <a:avLst/>
-          </a:prstGeom>
-        </p:spPr>
-      </p:pic>
-      <p:sp>
-        <p:nvSpPr>
-          <p:cNvPr id="7" name="TextBox 6"/>
-          <p:cNvSpPr txBox="1"/>
-          <p:nvPr/>
-        </p:nvSpPr>
-        <p:spPr>
-          <a:xfrm>
-            <a:off x="731520" y="5486400"/>
-            <a:ext cx="10972800" cy="457200"/>
-          </a:xfrm>
-          <a:prstGeom prst="rect">
-            <a:avLst/>
-          </a:prstGeom>
-          <a:noFill/>
-        </p:spPr>
-        <p:txBody>
-          <a:bodyPr wrap="square" lIns="45720" rIns="45720">
-            <a:spAutoFit/>
-          </a:bodyPr>
-          <a:lstStyle/>
-          <a:p>
-            <a:pPr algn="l">
-              <a:lnSpc>
-                <a:spcPct val="115000"/>
-              </a:lnSpc>
-            </a:pPr>
-            <a:r>
-              <a:rPr sz="1500" b="0">
+              <a:t>7 / 14</a:t>
+            </a:r>
+          </a:p>
+        </p:txBody>
+      </p:sp>
+      <p:sp>
+        <p:nvSpPr>
+          <p:cNvPr id="6" name="TextBox 5"/>
+          <p:cNvSpPr txBox="1"/>
+          <p:nvPr/>
+        </p:nvSpPr>
+        <p:spPr>
+          <a:xfrm>
+            <a:off x="640080" y="1463040"/>
+            <a:ext cx="11155680" cy="3657600"/>
+          </a:xfrm>
+          <a:prstGeom prst="rect">
+            <a:avLst/>
+          </a:prstGeom>
+          <a:noFill/>
+        </p:spPr>
+        <p:txBody>
+          <a:bodyPr wrap="square">
+            <a:spAutoFit/>
+          </a:bodyPr>
+          <a:lstStyle/>
+          <a:p>
+            <a:pPr>
+              <a:lnSpc>
+                <a:spcPct val="130000"/>
+              </a:lnSpc>
+              <a:spcAft>
+                <a:spcPts val="600"/>
+              </a:spcAft>
+            </a:pPr>
+            <a:r>
+              <a:rPr sz="1800" b="0">
                 <a:solidFill>
                   <a:srgbClr val="EA851B"/>
                 </a:solidFill>
                 <a:latin typeface="Pretendard ExtraBold"/>
               </a:rPr>
-              <a:t>도메인마다 공극률·구조가 분명히 다름 → W6 cross-domain 평가의 motivation</a:t>
+              <a:t>•  </a:t>
+            </a:r>
+            <a:r>
+              <a:rPr sz="1800" b="0">
+                <a:solidFill>
+                  <a:srgbClr val="181818"/>
+                </a:solidFill>
+                <a:latin typeface="Pretendard SemiBold"/>
+              </a:rPr>
+              <a:t>normalize_to_float: uint8 [0, 255] → float [0, 1]. 학습 기반 모델 입력의 표준 전처리</a:t>
+            </a:r>
+          </a:p>
+          <a:p>
+            <a:pPr>
+              <a:lnSpc>
+                <a:spcPct val="130000"/>
+              </a:lnSpc>
+              <a:spcAft>
+                <a:spcPts val="600"/>
+              </a:spcAft>
+            </a:pPr>
+            <a:r>
+              <a:rPr sz="1800" b="0">
+                <a:solidFill>
+                  <a:srgbClr val="EA851B"/>
+                </a:solidFill>
+                <a:latin typeface="Pretendard ExtraBold"/>
+              </a:rPr>
+              <a:t>•  </a:t>
+            </a:r>
+            <a:r>
+              <a:rPr sz="1800" b="0">
+                <a:solidFill>
+                  <a:srgbClr val="181818"/>
+                </a:solidFill>
+                <a:latin typeface="Pretendard SemiBold"/>
+              </a:rPr>
+              <a:t>otsu_threshold: 클래스 간 분산을 최대화하는 자동 임계값</a:t>
+            </a:r>
+          </a:p>
+          <a:p>
+            <a:pPr>
+              <a:lnSpc>
+                <a:spcPct val="130000"/>
+              </a:lnSpc>
+              <a:spcAft>
+                <a:spcPts val="600"/>
+              </a:spcAft>
+            </a:pPr>
+            <a:r>
+              <a:rPr sz="1800" b="0">
+                <a:solidFill>
+                  <a:srgbClr val="EA851B"/>
+                </a:solidFill>
+                <a:latin typeface="Pretendard ExtraBold"/>
+              </a:rPr>
+              <a:t>•  </a:t>
+            </a:r>
+            <a:r>
+              <a:rPr sz="1800" b="0">
+                <a:solidFill>
+                  <a:srgbClr val="181818"/>
+                </a:solidFill>
+                <a:latin typeface="Pretendard SemiBold"/>
+              </a:rPr>
+              <a:t>본 데이터는 이미 binary이므로 Otsu는 trivial (0.5 부근)</a:t>
+            </a:r>
+          </a:p>
+          <a:p>
+            <a:pPr>
+              <a:lnSpc>
+                <a:spcPct val="130000"/>
+              </a:lnSpc>
+              <a:spcAft>
+                <a:spcPts val="600"/>
+              </a:spcAft>
+            </a:pPr>
+            <a:r>
+              <a:rPr sz="1800" b="0">
+                <a:solidFill>
+                  <a:srgbClr val="EA851B"/>
+                </a:solidFill>
+                <a:latin typeface="Pretendard ExtraBold"/>
+              </a:rPr>
+              <a:t>•  </a:t>
+            </a:r>
+            <a:r>
+              <a:rPr sz="1800" b="0">
+                <a:solidFill>
+                  <a:srgbClr val="181818"/>
+                </a:solidFill>
+                <a:latin typeface="Pretendard SemiBold"/>
+              </a:rPr>
+              <a:t>실제 grayscale CT나 노이즈가 있는 데이터에서 Otsu의 가치가 드러남</a:t>
             </a:r>
           </a:p>
         </p:txBody>
@@ -7987,7 +7417,7 @@
                 </a:solidFill>
                 <a:latin typeface="Pretendard Black"/>
               </a:rPr>
-              <a:t>1.3  같은 부피, 세 축 슬라이스</a:t>
+              <a:t>Otsu 시각 — 인공 grayscale 예시</a:t>
             </a:r>
           </a:p>
         </p:txBody>
@@ -8069,7 +7499,7 @@
                 </a:solidFill>
                 <a:latin typeface="Pretendard Medium"/>
               </a:rPr>
-              <a:t>W1 — 데이터 + Classical · 1조 Advanced</a:t>
+              <a:t>W1 · 데이터 + Classical · 1조</a:t>
             </a:r>
           </a:p>
         </p:txBody>
@@ -8108,14 +7538,14 @@
                 </a:solidFill>
                 <a:latin typeface="Pretendard Medium"/>
               </a:rPr>
-              <a:t>8 / 15</a:t>
+              <a:t>8 / 14</a:t>
             </a:r>
           </a:p>
         </p:txBody>
       </p:sp>
       <p:pic>
         <p:nvPicPr>
-          <p:cNvPr id="6" name="Picture 5" descr="fig2_three_axes.png"/>
+          <p:cNvPr id="6" name="Picture 5" descr="fig3_otsu.png"/>
           <p:cNvPicPr>
             <a:picLocks noChangeAspect="1"/>
           </p:cNvPicPr>
@@ -8129,8 +7559,8 @@
         </p:blipFill>
         <p:spPr>
           <a:xfrm>
-            <a:off x="457200" y="1280160"/>
-            <a:ext cx="11247120" cy="4004712"/>
+            <a:off x="274320" y="1280160"/>
+            <a:ext cx="11612880" cy="3665462"/>
           </a:xfrm>
           <a:prstGeom prst="rect">
             <a:avLst/>
@@ -8145,7 +7575,7 @@
         </p:nvSpPr>
         <p:spPr>
           <a:xfrm>
-            <a:off x="731520" y="5486400"/>
+            <a:off x="731520" y="5394960"/>
             <a:ext cx="10972800" cy="457200"/>
           </a:xfrm>
           <a:prstGeom prst="rect">
@@ -8167,11 +7597,11 @@
             <a:r>
               <a:rPr sz="1500" b="0">
                 <a:solidFill>
-                  <a:srgbClr val="EA851B"/>
-                </a:solidFill>
-                <a:latin typeface="Pretendard ExtraBold"/>
-              </a:rPr>
-              <a:t>세 방향이 비슷하지만 세부 모양은 다름 → W5 tri-axis aggregation의 motivation</a:t>
+                  <a:srgbClr val="181818"/>
+                </a:solidFill>
+                <a:latin typeface="Pretendard SemiBold"/>
+              </a:rPr>
+              <a:t>노이즈가 작으면 Otsu가 두 봉우리의 골짜기에 정확히 위치. 노이즈가 커지면 안정성이 떨어집니다.</a:t>
             </a:r>
           </a:p>
         </p:txBody>
@@ -8228,7 +7658,7 @@
                 </a:solidFill>
                 <a:latin typeface="Pretendard Black"/>
               </a:rPr>
-              <a:t>1.4  데이터 전처리 — 정규화 + Otsu</a:t>
+              <a:t>Sparse Imaging — 문제 정의</a:t>
             </a:r>
           </a:p>
         </p:txBody>
@@ -8310,7 +7740,7 @@
                 </a:solidFill>
                 <a:latin typeface="Pretendard Medium"/>
               </a:rPr>
-              <a:t>W1 — 데이터 + Classical · 1조 Advanced</a:t>
+              <a:t>W1 · 데이터 + Classical · 1조</a:t>
             </a:r>
           </a:p>
         </p:txBody>
@@ -8349,7 +7779,7 @@
                 </a:solidFill>
                 <a:latin typeface="Pretendard Medium"/>
               </a:rPr>
-              <a:t>9 / 15</a:t>
+              <a:t>9 / 14</a:t>
             </a:r>
           </a:p>
         </p:txBody>
@@ -8362,8 +7792,47 @@
         </p:nvSpPr>
         <p:spPr>
           <a:xfrm>
-            <a:off x="731520" y="1371600"/>
-            <a:ext cx="10972800" cy="2743200"/>
+            <a:off x="731520" y="1280160"/>
+            <a:ext cx="10972800" cy="457200"/>
+          </a:xfrm>
+          <a:prstGeom prst="rect">
+            <a:avLst/>
+          </a:prstGeom>
+          <a:noFill/>
+        </p:spPr>
+        <p:txBody>
+          <a:bodyPr wrap="square" lIns="45720" rIns="45720">
+            <a:spAutoFit/>
+          </a:bodyPr>
+          <a:lstStyle/>
+          <a:p>
+            <a:pPr algn="l">
+              <a:lnSpc>
+                <a:spcPct val="115000"/>
+              </a:lnSpc>
+            </a:pPr>
+            <a:r>
+              <a:rPr sz="2000" b="0">
+                <a:solidFill>
+                  <a:srgbClr val="EA851B"/>
+                </a:solidFill>
+                <a:latin typeface="Pretendard ExtraBold"/>
+              </a:rPr>
+              <a:t>배경</a:t>
+            </a:r>
+          </a:p>
+        </p:txBody>
+      </p:sp>
+      <p:sp>
+        <p:nvSpPr>
+          <p:cNvPr id="7" name="TextBox 6"/>
+          <p:cNvSpPr txBox="1"/>
+          <p:nvPr/>
+        </p:nvSpPr>
+        <p:spPr>
+          <a:xfrm>
+            <a:off x="731520" y="1828800"/>
+            <a:ext cx="10972800" cy="548640"/>
           </a:xfrm>
           <a:prstGeom prst="rect">
             <a:avLst/>
@@ -8400,9 +7869,71 @@
                 </a:solidFill>
                 <a:latin typeface="Pretendard SemiBold"/>
               </a:rPr>
-              <a:t>normalize_to_float: uint8 [0,255] → float32 [0,1] — DL 학습 안정성</a:t>
-            </a:r>
-          </a:p>
+              <a:t>micro-CT 스캔은 시간 · 비용 모두 비쌈</a:t>
+            </a:r>
+          </a:p>
+        </p:txBody>
+      </p:sp>
+      <p:sp>
+        <p:nvSpPr>
+          <p:cNvPr id="8" name="TextBox 7"/>
+          <p:cNvSpPr txBox="1"/>
+          <p:nvPr/>
+        </p:nvSpPr>
+        <p:spPr>
+          <a:xfrm>
+            <a:off x="731520" y="2560320"/>
+            <a:ext cx="10972800" cy="457200"/>
+          </a:xfrm>
+          <a:prstGeom prst="rect">
+            <a:avLst/>
+          </a:prstGeom>
+          <a:noFill/>
+        </p:spPr>
+        <p:txBody>
+          <a:bodyPr wrap="square" lIns="45720" rIns="45720">
+            <a:spAutoFit/>
+          </a:bodyPr>
+          <a:lstStyle/>
+          <a:p>
+            <a:pPr algn="l">
+              <a:lnSpc>
+                <a:spcPct val="115000"/>
+              </a:lnSpc>
+            </a:pPr>
+            <a:r>
+              <a:rPr sz="2000" b="0">
+                <a:solidFill>
+                  <a:srgbClr val="EA851B"/>
+                </a:solidFill>
+                <a:latin typeface="Pretendard ExtraBold"/>
+              </a:rPr>
+              <a:t>전략</a:t>
+            </a:r>
+          </a:p>
+        </p:txBody>
+      </p:sp>
+      <p:sp>
+        <p:nvSpPr>
+          <p:cNvPr id="9" name="TextBox 8"/>
+          <p:cNvSpPr txBox="1"/>
+          <p:nvPr/>
+        </p:nvSpPr>
+        <p:spPr>
+          <a:xfrm>
+            <a:off x="731520" y="3108960"/>
+            <a:ext cx="10972800" cy="2286000"/>
+          </a:xfrm>
+          <a:prstGeom prst="rect">
+            <a:avLst/>
+          </a:prstGeom>
+          <a:noFill/>
+        </p:spPr>
+        <p:txBody>
+          <a:bodyPr wrap="square">
+            <a:spAutoFit/>
+          </a:bodyPr>
+          <a:lstStyle/>
           <a:p>
             <a:pPr>
               <a:lnSpc>
@@ -8428,7 +7959,7 @@
                 </a:solidFill>
                 <a:latin typeface="Pretendard SemiBold"/>
               </a:rPr>
-              <a:t>otsu_threshold: 자동 임계값 (binary 데이터에선 trivial, W4 grayscale에서 진가)</a:t>
+              <a:t>k 슬라이스마다 1개만 측정 → 시간 (1 − 1/k) × 100% 절감</a:t>
             </a:r>
           </a:p>
           <a:p>
@@ -8456,7 +7987,7 @@
                 </a:solidFill>
                 <a:latin typeface="Pretendard SemiBold"/>
               </a:rPr>
-              <a:t>"두 봉우리 사이 골짜기를 찾는" 고전 알고리즘</a:t>
+              <a:t>k=3 → 67% 절감, k=5 → 80% 절감</a:t>
             </a:r>
           </a:p>
           <a:p>
@@ -8484,7 +8015,7 @@
                 </a:solidFill>
                 <a:latin typeface="Pretendard SemiBold"/>
               </a:rPr>
-              <a:t>Micro-CT segmentation의 표준 기법</a:t>
+              <a:t>핵심 질문: 측정되지 않은 슬라이스를 측정된 슬라이스로부터 얼마나 정확히 복원할 수 있는가</a:t>
             </a:r>
           </a:p>
         </p:txBody>

--- a/group1_advanced/week1/slides/W1_group1.pptx
+++ b/group1_advanced/week1/slides/W1_group1.pptx
@@ -4028,7 +4028,7 @@
               </a:spcAft>
             </a:pPr>
             <a:r>
-              <a:rPr sz="1800" b="0">
+              <a:rPr sz="1600" b="0">
                 <a:solidFill>
                   <a:srgbClr val="EA851B"/>
                 </a:solidFill>
@@ -4037,7 +4037,7 @@
               <a:t>•  </a:t>
             </a:r>
             <a:r>
-              <a:rPr sz="1800" b="0">
+              <a:rPr sz="1600" b="0">
                 <a:solidFill>
                   <a:srgbClr val="181818"/>
                 </a:solidFill>
@@ -4056,7 +4056,7 @@
               </a:spcAft>
             </a:pPr>
             <a:r>
-              <a:rPr sz="1800" b="0">
+              <a:rPr sz="1600" b="0">
                 <a:solidFill>
                   <a:srgbClr val="EA851B"/>
                 </a:solidFill>
@@ -4065,7 +4065,7 @@
               <a:t>•  </a:t>
             </a:r>
             <a:r>
-              <a:rPr sz="1800" b="0">
+              <a:rPr sz="1600" b="0">
                 <a:solidFill>
                   <a:srgbClr val="181818"/>
                 </a:solidFill>
@@ -4084,7 +4084,7 @@
               </a:spcAft>
             </a:pPr>
             <a:r>
-              <a:rPr sz="1800" b="0">
+              <a:rPr sz="1600" b="0">
                 <a:solidFill>
                   <a:srgbClr val="EA851B"/>
                 </a:solidFill>
@@ -4093,7 +4093,7 @@
               <a:t>•  </a:t>
             </a:r>
             <a:r>
-              <a:rPr sz="1800" b="0">
+              <a:rPr sz="1600" b="0">
                 <a:solidFill>
                   <a:srgbClr val="181818"/>
                 </a:solidFill>
@@ -4112,7 +4112,7 @@
               </a:spcAft>
             </a:pPr>
             <a:r>
-              <a:rPr sz="1800" b="0">
+              <a:rPr sz="1600" b="0">
                 <a:solidFill>
                   <a:srgbClr val="EA851B"/>
                 </a:solidFill>
@@ -4121,7 +4121,7 @@
               <a:t>•  </a:t>
             </a:r>
             <a:r>
-              <a:rPr sz="1800" b="0">
+              <a:rPr sz="1600" b="0">
                 <a:solidFill>
                   <a:srgbClr val="181818"/>
                 </a:solidFill>
@@ -4460,7 +4460,7 @@
               </a:spcAft>
             </a:pPr>
             <a:r>
-              <a:rPr sz="1800" b="0">
+              <a:rPr sz="1600" b="0">
                 <a:solidFill>
                   <a:srgbClr val="EA851B"/>
                 </a:solidFill>
@@ -4469,7 +4469,7 @@
               <a:t>•  </a:t>
             </a:r>
             <a:r>
-              <a:rPr sz="1800" b="0">
+              <a:rPr sz="1600" b="0">
                 <a:solidFill>
                   <a:srgbClr val="181818"/>
                 </a:solidFill>
@@ -4488,7 +4488,7 @@
               </a:spcAft>
             </a:pPr>
             <a:r>
-              <a:rPr sz="1800" b="0">
+              <a:rPr sz="1600" b="0">
                 <a:solidFill>
                   <a:srgbClr val="EA851B"/>
                 </a:solidFill>
@@ -4497,7 +4497,7 @@
               <a:t>•  </a:t>
             </a:r>
             <a:r>
-              <a:rPr sz="1800" b="0">
+              <a:rPr sz="1600" b="0">
                 <a:solidFill>
                   <a:srgbClr val="181818"/>
                 </a:solidFill>
@@ -4516,7 +4516,7 @@
               </a:spcAft>
             </a:pPr>
             <a:r>
-              <a:rPr sz="1800" b="0">
+              <a:rPr sz="1600" b="0">
                 <a:solidFill>
                   <a:srgbClr val="EA851B"/>
                 </a:solidFill>
@@ -4525,7 +4525,7 @@
               <a:t>•  </a:t>
             </a:r>
             <a:r>
-              <a:rPr sz="1800" b="0">
+              <a:rPr sz="1600" b="0">
                 <a:solidFill>
                   <a:srgbClr val="181818"/>
                 </a:solidFill>
@@ -4544,7 +4544,7 @@
               </a:spcAft>
             </a:pPr>
             <a:r>
-              <a:rPr sz="1800" b="0">
+              <a:rPr sz="1600" b="0">
                 <a:solidFill>
                   <a:srgbClr val="EA851B"/>
                 </a:solidFill>
@@ -4553,7 +4553,7 @@
               <a:t>•  </a:t>
             </a:r>
             <a:r>
-              <a:rPr sz="1800" b="0">
+              <a:rPr sz="1600" b="0">
                 <a:solidFill>
                   <a:srgbClr val="181818"/>
                 </a:solidFill>
@@ -5753,7 +5753,7 @@
               </a:spcAft>
             </a:pPr>
             <a:r>
-              <a:rPr sz="1900" b="0">
+              <a:rPr sz="1700" b="0">
                 <a:solidFill>
                   <a:srgbClr val="EA851B"/>
                 </a:solidFill>
@@ -5762,7 +5762,7 @@
               <a:t>•  </a:t>
             </a:r>
             <a:r>
-              <a:rPr sz="1900" b="0">
+              <a:rPr sz="1700" b="0">
                 <a:solidFill>
                   <a:srgbClr val="181818"/>
                 </a:solidFill>
@@ -5781,7 +5781,7 @@
               </a:spcAft>
             </a:pPr>
             <a:r>
-              <a:rPr sz="1900" b="0">
+              <a:rPr sz="1700" b="0">
                 <a:solidFill>
                   <a:srgbClr val="EA851B"/>
                 </a:solidFill>
@@ -5790,7 +5790,7 @@
               <a:t>•  </a:t>
             </a:r>
             <a:r>
-              <a:rPr sz="1900" b="0">
+              <a:rPr sz="1700" b="0">
                 <a:solidFill>
                   <a:srgbClr val="181818"/>
                 </a:solidFill>
@@ -5809,7 +5809,7 @@
               </a:spcAft>
             </a:pPr>
             <a:r>
-              <a:rPr sz="1900" b="0">
+              <a:rPr sz="1700" b="0">
                 <a:solidFill>
                   <a:srgbClr val="EA851B"/>
                 </a:solidFill>
@@ -5818,7 +5818,7 @@
               <a:t>•  </a:t>
             </a:r>
             <a:r>
-              <a:rPr sz="1900" b="0">
+              <a:rPr sz="1700" b="0">
                 <a:solidFill>
                   <a:srgbClr val="181818"/>
                 </a:solidFill>
@@ -5837,7 +5837,7 @@
               </a:spcAft>
             </a:pPr>
             <a:r>
-              <a:rPr sz="1900" b="0">
+              <a:rPr sz="1700" b="0">
                 <a:solidFill>
                   <a:srgbClr val="EA851B"/>
                 </a:solidFill>
@@ -5846,7 +5846,7 @@
               <a:t>•  </a:t>
             </a:r>
             <a:r>
-              <a:rPr sz="1900" b="0">
+              <a:rPr sz="1700" b="0">
                 <a:solidFill>
                   <a:srgbClr val="181818"/>
                 </a:solidFill>
@@ -5865,7 +5865,7 @@
               </a:spcAft>
             </a:pPr>
             <a:r>
-              <a:rPr sz="1900" b="0">
+              <a:rPr sz="1700" b="0">
                 <a:solidFill>
                   <a:srgbClr val="EA851B"/>
                 </a:solidFill>
@@ -5874,7 +5874,7 @@
               <a:t>•  </a:t>
             </a:r>
             <a:r>
-              <a:rPr sz="1900" b="0">
+              <a:rPr sz="1700" b="0">
                 <a:solidFill>
                   <a:srgbClr val="181818"/>
                 </a:solidFill>
@@ -6824,7 +6824,7 @@
                 </a:solidFill>
                 <a:latin typeface="Pretendard Black"/>
               </a:rPr>
-              <a:t>같은 부피의 세 축 슬라이스 (BB)</a:t>
+              <a:t>같은 부피의 세 축 슬라이스 (CastleGate)</a:t>
             </a:r>
           </a:p>
         </p:txBody>
@@ -6982,8 +6982,8 @@
         </p:nvSpPr>
         <p:spPr>
           <a:xfrm>
-            <a:off x="731520" y="5486400"/>
-            <a:ext cx="10972800" cy="457200"/>
+            <a:off x="365760" y="5486400"/>
+            <a:ext cx="11430000" cy="457200"/>
           </a:xfrm>
           <a:prstGeom prst="rect">
             <a:avLst/>
@@ -7002,52 +7002,13 @@
               </a:lnSpc>
             </a:pPr>
             <a:r>
-              <a:rPr sz="1500" b="0">
+              <a:rPr sz="1400" b="0">
                 <a:solidFill>
                   <a:srgbClr val="181818"/>
                 </a:solidFill>
                 <a:latin typeface="Pretendard SemiBold"/>
               </a:rPr>
-              <a:t>동일 부피를 z · y · x 세 직교 평면으로 자른 결과. 통계는 유사하지만 세부 패턴은 서로 다름.</a:t>
-            </a:r>
-          </a:p>
-        </p:txBody>
-      </p:sp>
-      <p:sp>
-        <p:nvSpPr>
-          <p:cNvPr id="8" name="TextBox 7"/>
-          <p:cNvSpPr txBox="1"/>
-          <p:nvPr/>
-        </p:nvSpPr>
-        <p:spPr>
-          <a:xfrm>
-            <a:off x="731520" y="5943600"/>
-            <a:ext cx="10972800" cy="457200"/>
-          </a:xfrm>
-          <a:prstGeom prst="rect">
-            <a:avLst/>
-          </a:prstGeom>
-          <a:noFill/>
-        </p:spPr>
-        <p:txBody>
-          <a:bodyPr wrap="square" lIns="45720" rIns="45720">
-            <a:spAutoFit/>
-          </a:bodyPr>
-          <a:lstStyle/>
-          <a:p>
-            <a:pPr algn="l">
-              <a:lnSpc>
-                <a:spcPct val="115000"/>
-              </a:lnSpc>
-            </a:pPr>
-            <a:r>
-              <a:rPr sz="1400" b="0">
-                <a:solidFill>
-                  <a:srgbClr val="7A7A7A"/>
-                </a:solidFill>
-                <a:latin typeface="Pretendard Medium"/>
-              </a:rPr>
-              <a:t>→ W5의 tri-axis 기법은 세 축의 보완적 정보를 융합해 2.5D 방식으로 3D 부피를 복원합니다.</a:t>
+              <a:t>동일 부피를 z · y · x 세 직교 평면으로 자른 결과. 슬라이스 위치도 모두 다르며, 세부 공극 패턴이 서로 다릅니다.</a:t>
             </a:r>
           </a:p>
         </p:txBody>
@@ -7261,7 +7222,7 @@
               </a:spcAft>
             </a:pPr>
             <a:r>
-              <a:rPr sz="1800" b="0">
+              <a:rPr sz="1600" b="0">
                 <a:solidFill>
                   <a:srgbClr val="EA851B"/>
                 </a:solidFill>
@@ -7270,7 +7231,7 @@
               <a:t>•  </a:t>
             </a:r>
             <a:r>
-              <a:rPr sz="1800" b="0">
+              <a:rPr sz="1600" b="0">
                 <a:solidFill>
                   <a:srgbClr val="181818"/>
                 </a:solidFill>
@@ -7289,7 +7250,7 @@
               </a:spcAft>
             </a:pPr>
             <a:r>
-              <a:rPr sz="1800" b="0">
+              <a:rPr sz="1600" b="0">
                 <a:solidFill>
                   <a:srgbClr val="EA851B"/>
                 </a:solidFill>
@@ -7298,7 +7259,7 @@
               <a:t>•  </a:t>
             </a:r>
             <a:r>
-              <a:rPr sz="1800" b="0">
+              <a:rPr sz="1600" b="0">
                 <a:solidFill>
                   <a:srgbClr val="181818"/>
                 </a:solidFill>
@@ -7317,7 +7278,7 @@
               </a:spcAft>
             </a:pPr>
             <a:r>
-              <a:rPr sz="1800" b="0">
+              <a:rPr sz="1600" b="0">
                 <a:solidFill>
                   <a:srgbClr val="EA851B"/>
                 </a:solidFill>
@@ -7326,7 +7287,7 @@
               <a:t>•  </a:t>
             </a:r>
             <a:r>
-              <a:rPr sz="1800" b="0">
+              <a:rPr sz="1600" b="0">
                 <a:solidFill>
                   <a:srgbClr val="181818"/>
                 </a:solidFill>
@@ -7345,7 +7306,7 @@
               </a:spcAft>
             </a:pPr>
             <a:r>
-              <a:rPr sz="1800" b="0">
+              <a:rPr sz="1600" b="0">
                 <a:solidFill>
                   <a:srgbClr val="EA851B"/>
                 </a:solidFill>
@@ -7354,7 +7315,7 @@
               <a:t>•  </a:t>
             </a:r>
             <a:r>
-              <a:rPr sz="1800" b="0">
+              <a:rPr sz="1600" b="0">
                 <a:solidFill>
                   <a:srgbClr val="181818"/>
                 </a:solidFill>
@@ -7854,7 +7815,7 @@
               </a:spcAft>
             </a:pPr>
             <a:r>
-              <a:rPr sz="1800" b="0">
+              <a:rPr sz="1600" b="0">
                 <a:solidFill>
                   <a:srgbClr val="EA851B"/>
                 </a:solidFill>
@@ -7863,7 +7824,7 @@
               <a:t>•  </a:t>
             </a:r>
             <a:r>
-              <a:rPr sz="1800" b="0">
+              <a:rPr sz="1600" b="0">
                 <a:solidFill>
                   <a:srgbClr val="181818"/>
                 </a:solidFill>
@@ -7944,7 +7905,7 @@
               </a:spcAft>
             </a:pPr>
             <a:r>
-              <a:rPr sz="1800" b="0">
+              <a:rPr sz="1600" b="0">
                 <a:solidFill>
                   <a:srgbClr val="EA851B"/>
                 </a:solidFill>
@@ -7953,7 +7914,7 @@
               <a:t>•  </a:t>
             </a:r>
             <a:r>
-              <a:rPr sz="1800" b="0">
+              <a:rPr sz="1600" b="0">
                 <a:solidFill>
                   <a:srgbClr val="181818"/>
                 </a:solidFill>
@@ -7972,7 +7933,7 @@
               </a:spcAft>
             </a:pPr>
             <a:r>
-              <a:rPr sz="1800" b="0">
+              <a:rPr sz="1600" b="0">
                 <a:solidFill>
                   <a:srgbClr val="EA851B"/>
                 </a:solidFill>
@@ -7981,7 +7942,7 @@
               <a:t>•  </a:t>
             </a:r>
             <a:r>
-              <a:rPr sz="1800" b="0">
+              <a:rPr sz="1600" b="0">
                 <a:solidFill>
                   <a:srgbClr val="181818"/>
                 </a:solidFill>
@@ -8000,7 +7961,7 @@
               </a:spcAft>
             </a:pPr>
             <a:r>
-              <a:rPr sz="1800" b="0">
+              <a:rPr sz="1600" b="0">
                 <a:solidFill>
                   <a:srgbClr val="EA851B"/>
                 </a:solidFill>
@@ -8009,7 +7970,7 @@
               <a:t>•  </a:t>
             </a:r>
             <a:r>
-              <a:rPr sz="1800" b="0">
+              <a:rPr sz="1600" b="0">
                 <a:solidFill>
                   <a:srgbClr val="181818"/>
                 </a:solidFill>
